--- a/vqe_research_overview.pptx
+++ b/vqe_research_overview.pptx
@@ -634,13 +634,174 @@
           </a:p>
           <a:p>
             <a:r>
-              <a:t>PENDING. This slide waits for its build step.</a:t>
+              <a:t>Direction C says: learn a better distance prior, and keep physics honest. The prior bounds the accuracy, so the plan has five parts. C1 reproduced the closures this rests on, to the third decimal. A learned ranker on real features moves from 3.043 to 3.026 angstroms as its training set grows; the same model with a leaked label reaches 2.146. A perfect ranker inside the shipped top-25 returns 2.609 against 3.468 for a random member. So learning a ranker is closed, and the proposal is not that. C2 is a ladder of 11 prior inputs, from no language model to the full 650-million-parameter embedding. Its falsifier was fixed before the first run: a rung must beat the shipped posterior on the built chain by more than its own MDE, with a fold-clustered interval excluding zero on five of five folds. Seven rungs are trained; the evaluations are running. C3 asked whether AMBER relaxation is an accuracy step. It is not. The relaxation moves the chain 0.220 angstroms and costs +0.0207; a random move of exactly the same size costs +0.0096. Physics is worse than noise, and its displacement points slightly away from the native. So refine-with-physics is kept as a validity step only: it brings 125 of 126 chains below a thousand kilocalories per mole, though on two targets it breaks a virtual bond. C4, routers, and C5, a learned common-mode correction, are pre-registered and pending. The verdict on C is pending the ladder.</a:t>
             </a:r>
           </a:p>
           <a:p/>
           <a:p>
             <a:r>
+              <a:t>ALSO (not spoken):</a:t>
+            </a:r>
+          </a:p>
+          <a:p>
+            <a:r>
+              <a:t>Verdict form (campaign prompt): KEEP AS STATED / KEEP WITH EDITS / REPLACE; lane P's `s26/PROPOSAL_C.md` is DRAFT and its verdict is pending C2 to C5. The C1 learning curve spans 3.0433 (n = 8) to 3.0258 (full) on the weighted-average basis; the leaked label reaches 2.5342 at n = 8. Perfect ranker in the top-25 2.6087, random member 3.4676, distogram argmin 3.4540 (single window). C2 anchor (L56, L57): selection max abs 0.0e+00 and point cloud 7.3e-14 against the production cache; the built chain through the ladder's own path is 3.2126 A, the leaderboard-rebuild basis, so every C2 contrast is paired on that basis and the 0.002 A offset to 3.2148 is a basis difference, not an effect. Rungs with all five fold checkpoints on disk at build time: 7. C3 (L39, L46): AMBER vs built chain +0.0207 [fold CI [+0.0154, +0.0290]], vs random +0.0111 [[+0.0062, +0.0171]] at 1.12 x MDE (Type-M: sign measured, magnitude an upper bound), vs toward-member +0.0385 [[+0.0298, +0.0479]]; ORACLE cosine of the displacement with the true residual -0.049, positive on 36.5% of targets; before relaxation 58.7% of built chains sit above 1e4 kcal/mol; after it 125 of 126 converge (9KAR ends at 1262 kcal/mol) and the virtual CA-CA bond stretches from 3.804 to 3.867 A. The free calibration flag (L53): the distance the relaxation moves a chain predicts its error, Spearman +0.433 partial on n and Rg; never a selector. Stage 2 of C3 repeats the seven contrasts on the best C2 rung when lane P delivers it.</a:t>
+            </a:r>
+          </a:p>
+          <a:p/>
+          <a:p>
+            <a:r>
               <a:t>SOURCES (not spoken; token = value &lt;- artefact path [basis]):</a:t>
+            </a:r>
+          </a:p>
+          <a:p>
+            <a:r>
+              <a:t>ARM_MEAN = 3.21477 &lt;- bench_results/baseline_tuning126.json :: science/rmsd_arm/mean [built_chain]</a:t>
+            </a:r>
+          </a:p>
+          <a:p>
+            <a:r>
+              <a:t>C1_S12_LEAK_FULL = 2.14595 &lt;- s12/results/agg_dec_v2_oracle.json :: mean_raw [point_cloud (weighted average)]</a:t>
+            </a:r>
+          </a:p>
+          <a:p>
+            <a:r>
+              <a:t>C1_S12_LEAK_N8 = 2.53424 &lt;- s12/results/agg_dec_v2_oracle_n8.json :: mean_raw [point_cloud (weighted average)]</a:t>
+            </a:r>
+          </a:p>
+          <a:p>
+            <a:r>
+              <a:t>C1_S12_REAL_FULL = 3.02585 &lt;- s12/results/agg_dec_v2.json :: mean_raw [point_cloud (weighted average)]</a:t>
+            </a:r>
+          </a:p>
+          <a:p>
+            <a:r>
+              <a:t>C1_S12_REAL_N8 = 3.04334 &lt;- s12/results/agg_dec_v2_n8.json :: mean_raw [point_cloud (weighted average)]</a:t>
+            </a:r>
+          </a:p>
+          <a:p>
+            <a:r>
+              <a:t>C1_S17_BAND_BEST = 2.60868 &lt;- s17/results/inband.json :: rows[*]/cells/25/band_best (mean over 126) [single_window] (DERIVED)</a:t>
+            </a:r>
+          </a:p>
+          <a:p>
+            <a:r>
+              <a:t>C1_S17_DIST_PICK = 3.454 &lt;- s17/results/inband.json :: rows[*]/cells/25/dist_pick (mean over 126) [single_window] (DERIVED)</a:t>
+            </a:r>
+          </a:p>
+          <a:p>
+            <a:r>
+              <a:t>C1_S17_RAND = 3.46759 &lt;- s17/results/inband.json :: rows[*]/cells/25/rand (mean over 126) [single_window] (DERIVED)</a:t>
+            </a:r>
+          </a:p>
+          <a:p>
+            <a:r>
+              <a:t>C2_ANCHOR_ARM = 3.21263 &lt;- s26/results/p_ladder_report_shipped_s0.json :: arm/mean [built_chain (leaderboard-rebuild basis, L57)]</a:t>
+            </a:r>
+          </a:p>
+          <a:p>
+            <a:r>
+              <a:t>C2_ANCHOR_CLOUD_MAXABS = 7.25253e-14 &lt;- s26/results/p_ladder_report_shipped_s0.json :: cloud/maxabs_vs_cache</a:t>
+            </a:r>
+          </a:p>
+          <a:p>
+            <a:r>
+              <a:t>C2_ANCHOR_SEL_MAXABS = 0 &lt;- s26/results/p_ladder_report_shipped_s0.json :: sel/maxabs_vs_cache</a:t>
+            </a:r>
+          </a:p>
+          <a:p>
+            <a:r>
+              <a:t>C2_N_RUNGS = 11 &lt;- s26/PREREG_C2.md / s26/PROPOSAL_C.md: rungs shipped, noesm, conly, pca32, pca32f, pca128, raw, esm8m, wide, pairnet, mix (LEDGER)</a:t>
+            </a:r>
+          </a:p>
+          <a:p>
+            <a:r>
+              <a:t>C2_RUNGS_TRAINED = 7 &lt;- s26/models/p_ladder/&lt;rung&gt;_fold{0..4}_s0.pt (rungs with all five fold checkpoints; L41 lists noesm, conly, pca32, wide, pca32f, pca128, esm8m) (DERIVED)</a:t>
+            </a:r>
+          </a:p>
+          <a:p>
+            <a:r>
+              <a:t>C3_AMBER_VS_MEMBER = 0.0385136 &lt;- s26/results/ph_c3_stage1.json :: summary/'stage1 AMBER minus matched-magnitude TOWARD-MEMBER (16 draws)'/effect [relaxed minus displaced built_chain]</a:t>
+            </a:r>
+          </a:p>
+          <a:p>
+            <a:r>
+              <a:t>C3_AMBER_VS_MEMBER_CI = [0.02980876592028565, 0.04793790929697891] &lt;- s26/results/ph_c3_stage1.json :: summary/'stage1 AMBER minus matched-magnitude TOWARD-MEMBER (16 draws)'/ci95_fold</a:t>
+            </a:r>
+          </a:p>
+          <a:p>
+            <a:r>
+              <a:t>C3_AMBER_VS_NONE = 0.0206947 &lt;- s26/results/ph_c3_stage1.json :: summary/'stage1 AMBER (relaxed) minus do-nothing (built chain)'/effect [relaxed minus built_chain]</a:t>
+            </a:r>
+          </a:p>
+          <a:p>
+            <a:r>
+              <a:t>C3_AMBER_VS_NONE_CI = [0.015410149449308904, 0.02901849743558341] &lt;- s26/results/ph_c3_stage1.json :: summary/'stage1 AMBER (relaxed) minus do-nothing (built chain)'/ci95_fold</a:t>
+            </a:r>
+          </a:p>
+          <a:p>
+            <a:r>
+              <a:t>C3_AMBER_VS_RANDOM = 0.0110805 &lt;- s26/results/ph_c3_stage1.json :: summary/'stage1 AMBER minus matched-magnitude RANDOM (16 draws)'/effect [relaxed minus displaced built_chain]</a:t>
+            </a:r>
+          </a:p>
+          <a:p>
+            <a:r>
+              <a:t>C3_AMBER_VS_RANDOM_CI = [0.006228043344255073, 0.017072513842064756] &lt;- s26/results/ph_c3_stage1.json :: summary/'stage1 AMBER minus matched-magnitude RANDOM (16 draws)'/ci95_fold</a:t>
+            </a:r>
+          </a:p>
+          <a:p>
+            <a:r>
+              <a:t>C3_AMBER_VS_RANDOM_X = 1.11923 &lt;- s26/results/ph_c3_stage1.json :: summary/'stage1 AMBER minus matched-magnitude RANDOM (16 draws)'/effect_over_mde</a:t>
+            </a:r>
+          </a:p>
+          <a:p>
+            <a:r>
+              <a:t>C3_BOND_AFTER = 3.86655 &lt;- s26/results/ph_c3_nativefree.json :: summary/amb_bond_mean/mean</a:t>
+            </a:r>
+          </a:p>
+          <a:p>
+            <a:r>
+              <a:t>C3_BOND_BEFORE = 3.80395 &lt;- s26/results/ph_c3_nativefree.json :: summary/ca_bond_mean/mean</a:t>
+            </a:r>
+          </a:p>
+          <a:p>
+            <a:r>
+              <a:t>C3_COS = -0.0490645 &lt;- s26/results/ph_c3_stage1.json :: rows[*]/cos_amber (mean) (DERIVED)</a:t>
+            </a:r>
+          </a:p>
+          <a:p>
+            <a:r>
+              <a:t>C3_COS_FRAC_POS = 0.365079 &lt;- s26/results/ph_c3_stage1.json :: summary/frac_cos_amber_positive</a:t>
+            </a:r>
+          </a:p>
+          <a:p>
+            <a:r>
+              <a:t>C3_E1_MAX = 1262.41 &lt;- s26/results/ph_c3_nativefree.json :: summary/e1_max</a:t>
+            </a:r>
+          </a:p>
+          <a:p>
+            <a:r>
+              <a:t>C3_FRAC_E0_OVER_1E4 = 0.587302 &lt;- s26/results/ph_c3_nativefree.json :: summary/frac_e0_over_1e4</a:t>
+            </a:r>
+          </a:p>
+          <a:p>
+            <a:r>
+              <a:t>C3_MAG = 0.219778 &lt;- s26/results/ph_c3_nativefree.json :: summary/mag_sup/mean</a:t>
+            </a:r>
+          </a:p>
+          <a:p>
+            <a:r>
+              <a:t>C3_N_CONVERGED = 125 &lt;- s26/results/ph_c3_nativefree.json :: summary/n_converged_le_1000</a:t>
+            </a:r>
+          </a:p>
+          <a:p>
+            <a:r>
+              <a:t>C3_RANDOM_VS_NONE = 0.00961423 &lt;- s26/results/ph_c3_stage1.json :: summary/'stage1 RANDOM minus do-nothing'/effect [displaced built_chain minus built_chain]</a:t>
+            </a:r>
+          </a:p>
+          <a:p>
+            <a:r>
+              <a:t>STRAIN_RHO_MOVED = 0.432567 &lt;- s26/results/ph_strain.json :: summary/partial_n_rg/moved/rho</a:t>
             </a:r>
           </a:p>
         </p:txBody>
@@ -823,7 +984,7 @@
           </a:p>
           <a:p>
             <a:r>
-              <a:t>The library behind retrieval: 787 peptides and 6,003 protein fragments (ledger L11). The sealed benchmark of 60 was spent once (slide 4). The identity leak: 4/126 dev targets and 2/60 benchmark targets carry a verbatim self-copy in their fold model's training set; declared, and the benchmark half is unquantified by design.</a:t>
+              <a:t>The library behind retrieval: 787 peptides and 6,003 protein fragments (ledger L11). The sealed benchmark of 60 was spent once (slide 4). The identity leak: 4/126 dev targets and 2/60 benchmark targets carry a verbatim self-copy in their fold model's training set; declared. Its dev price, re-derived this sprint (L44): +0.0004 A on the lam = 0 chain (S10-4's figure reproduced) and +0.0018 A on the built chain, neither clearing its MDE; the benchmark half is bounded from the dev proxy without opening the benchmark (slide 4 notes).</a:t>
             </a:r>
           </a:p>
           <a:p/>
@@ -855,6 +1016,16 @@
           <a:p>
             <a:r>
               <a:t>HELIX_MINUS_ARM = 0.849989 &lt;- s12/results/s14_ladder.json :: rows/L0_constant_helix/mean minus bench_results/baseline_tuning126.json :: science/rmsd_arm/mean [built_chain] (DERIVED)</a:t>
+            </a:r>
+          </a:p>
+          <a:p>
+            <a:r>
+              <a:t>LEAK_DEV_PRICE_ARM = 0.00175041 &lt;- s26/results/w_selfcopy_endpoint.json :: -A/ge06_mean_delta_all126/arm (clean minus production) [built_chain] (DERIVED)</a:t>
+            </a:r>
+          </a:p>
+          <a:p>
+            <a:r>
+              <a:t>LEAK_DEV_PRICE_FIT = 0.000386789 &lt;- s26/results/w_selfcopy_endpoint.json :: -A/ge06_mean_delta_all126/fit (clean minus production, lam = 0 chain) [fit (lam = 0 chain)] (DERIVED)</a:t>
             </a:r>
           </a:p>
           <a:p>
@@ -1137,7 +1308,7 @@
           </a:p>
           <a:p>
             <a:r>
-              <a:t>The overlays are ORACLE-superposed (Kabsch onto the native through `s12.instrument.superpose_batch`, for the figure only); the RMSD printed on each figure was recomputed by `s26/pr_figures.py` and equals the production record. The benchmark numbers are typed from claim C06 of `s26/EXAMINATION.md`; no S26 lane opened `s9/final_report.json`, and the two benchmark means (2.9610 full system, 2.9507 shipped baseline) are asserted by a passing test.</a:t>
+              <a:t>The overlays are ORACLE-superposed (Kabsch onto the native through `s12.instrument.superpose_batch`, for the figure only); the RMSD printed on each figure was recomputed by `s26/pr_figures.py` and equals the production record. The benchmark numbers are typed from claim C06 of `s26/EXAMINATION.md`; no S26 lane opened `s9/final_report.json`, and the two benchmark means (2.9610 full system, 2.9507 shipped baseline) are asserted by a passing test. Caveat that attaches to every benchmark figure (L44, L55, L58): 2/60 benchmark targets carry a verbatim self-copy in their fold model's training set; dev-proxy price 0.002 A; own-native envelope 0.028 A (mean CI) to 0.151 A (worst target) on the built chain under assumption A2; class MINOR (0.017 to 0.170 A) under every reading, against a benchmark CI half-width of 0.170; it cannot move the benchmark verdict either way.</a:t>
             </a:r>
           </a:p>
           <a:p/>
@@ -1243,12 +1414,42 @@
           </a:p>
           <a:p>
             <a:r>
+              <a:t>LEAK_BENCH_CI_HALF = 0.17 &lt;- s26/results/w_selfcopy_bound.json :: bench_ci_half</a:t>
+            </a:r>
+          </a:p>
+          <a:p>
+            <a:r>
+              <a:t>LEAK_BOUND_ARM_MEANCI = 0.0277068 &lt;- s26/results/w_selfcopy_bound.json :: verdict/arm/envelope_readings_A/mean_ci_limit [built_chain]</a:t>
+            </a:r>
+          </a:p>
+          <a:p>
+            <a:r>
+              <a:t>LEAK_BOUND_ARM_WORST = 0.151206 &lt;- s26/results/w_selfcopy_bound.json :: verdict/arm/envelope_readings_A/worst_target [built_chain]</a:t>
+            </a:r>
+          </a:p>
+          <a:p>
+            <a:r>
+              <a:t>LEAK_CLASS = MINOR (0.017 to 0.170 A) &lt;- s26/results/w_selfcopy_bound.json :: verdict/arm/class_under_every_reading</a:t>
+            </a:r>
+          </a:p>
+          <a:p>
+            <a:r>
+              <a:t>LEAK_DEV4_BOUND_ARM = 0.00227798 &lt;- s26/results/w_selfcopy_bound.json :: signed_bounds_gated/A_real4/arm (dev-proxy price, (2/60) x the signed max over the four dev self-copies) [built_chain]</a:t>
+            </a:r>
+          </a:p>
+          <a:p>
+            <a:r>
               <a:t>POOL_BEST = 1.71082 &lt;- bench_results/baseline_tuning126.json :: science/pool_best/mean [single_window]</a:t>
             </a:r>
           </a:p>
           <a:p>
             <a:r>
               <a:t>RANDOM75 = 3.42513 &lt;- s25/results/phys_suite.json :: random_null_rank/mean [point_cloud]</a:t>
+            </a:r>
+          </a:p>
+          <a:p>
+            <a:r>
+              <a:t>SELFCOPY_BENCH = 2/60 &lt;- s26/results/i_identity_audit.json (count only, ledger L15/L18)</a:t>
             </a:r>
           </a:p>
           <a:p>
@@ -1737,7 +1938,7 @@
           </a:p>
           <a:p>
             <a:r>
-              <a:t>Where does the remaining accuracy live? The ladder on the left is measured on one instrument, with the basis written on every bar. Two native-free controls sit above the pipeline: a constant helix at 4.06 and a sequence-only torsion predictor at 3.77, both built chains. Below the pipeline are oracles that read the native. The best single window in the pool is 1.71 angstroms, and the best inside the shipped top-75 is 2.31. Those windows exist, and no native-free ranker finds them; the record closed that route at every level. The physics does not help either. As selectors, the Legacy potential and AMBER are worse than a random subset by +0.330 and +0.455 angstroms, five of five folds, on the point-cloud basis. And relaxing the built chain with AMBER is worse than a random move of the same size, by +0.0111 angstroms. The one steep lever is the distance prior. A perfect prior through the same pipeline reaches 2.23 on the point-cloud basis, from 3.05. And the pool's error is 68% common-mode, so nothing downstream of retrieval can remove most of it. The conclusion is plain. Search, selection, ranking and physics are closed by measurement. If accuracy moves, it moves through a better prior.</a:t>
+              <a:t>Where does the remaining accuracy live? The ladder on the left is measured on one instrument, with the basis written on every bar. Two native-free controls sit above the pipeline: a constant helix at 4.06 and a sequence-only torsion predictor at 3.77, both built chains. Below the pipeline are oracles that read the native. The best single window in the pool is 1.71 angstroms, and the best inside the shipped top-75 is 2.31. Those windows exist, and no native-free ranker finds them; the record closed that route at every level. The physics does not help either. As selectors, the Legacy potential and AMBER are worse than a random subset by +0.330 and +0.455 angstroms, five of five folds, on the point-cloud basis. And relaxing the built chain with AMBER costs +0.0207 angstroms; a random move of the same size costs only +0.0096, so the physics is worse than noise, and the difference sits in the Type-M zone, so its sign is what I have measured, not its size. The one steep lever is the distance prior. A perfect prior through the same pipeline reaches 2.23 on the point-cloud basis, from 3.05. And the pool's error is 68% common-mode, so nothing downstream of retrieval can remove most of it. The conclusion is plain. Search, selection, ranking and physics are closed by measurement. If accuracy moves, it moves through a better prior.</a:t>
             </a:r>
           </a:p>
           <a:p/>
@@ -1748,7 +1949,7 @@
           </a:p>
           <a:p>
             <a:r>
-              <a:t>Seven-configuration suite, point-cloud basis (`s25/results/phys_suite.json`): distogram 3.058, AMBER+distogram 3.132, Legacy+distogram 3.215, all three 3.253, random-75 3.425, Legacy+AMBER 3.674, Legacy 3.755, AMBER 3.880. The same rows on the built chain (`results/summary/leaderboard.json`): 3.219, 3.310, 3.373, 3.422, 3.825, 3.884, 4.102; the ranking is unchanged. Fold CIs: Legacy vs random [+0.2375, +0.4158], AMBER vs random [+0.3284, +0.5356]. Torsion-space ceiling 1.594 (ORACLE, k = 4); distance geometry from the true distances 0.611 (ORACLE); best window in the whole library 1.313 (ORACLE).</a:t>
+              <a:t>Seven-configuration suite, point-cloud basis (`s25/results/phys_suite.json`): distogram 3.058, AMBER+distogram 3.132, Legacy+distogram 3.215, all three 3.253, random-75 3.425, Legacy+AMBER 3.674, Legacy 3.755, AMBER 3.880. The same rows on the built chain (`results/summary/leaderboard.json`): 3.219, 3.310, 3.373, 3.422, 3.825, 3.884, 4.102; the ranking is unchanged. Fold CIs: Legacy vs random [+0.2375, +0.4158], AMBER vs random [+0.3284, +0.5356]. Torsion-space ceiling 1.594 (ORACLE, k = 4); distance geometry from the true distances 0.611 (ORACLE); best window in the whole library 1.313 (ORACLE). AMBER relaxation (L39, Adversary L46): vs the built chain +0.0207 [fold CI [+0.0154, +0.0290]], 2.16 x MDE; vs a move of the same size toward a random pool member +0.0385 [[+0.0298, +0.0479]]; vs a random move of the same size +0.0111 [[+0.0062, +0.0171]], 5/5 folds, 1.12 x MDE (Type-M zone: sign measured, magnitude an upper bound). A validity step on 124 of 126; on 2BP4 and 9KAR the relaxation breaks a virtual CA-CA bond and 9KAR does not converge. Physics as a steric reject filter at 1e4 kcal/mol (L43, L54, point cloud): +0.228 A worse than the shipped top-75 (median +0.003: near zero on the median target, the harm is tail-carried; Type-M) and +0.167 vs rejecting the same count at random. A free calibration flag, not a lever (L53): how far the relaxation moves the chain predicts its error, Spearman +0.433 partial on n and Rg, fold CI [+0.2472, +0.5876]; quartile means [+2.2861, +2.9364, +3.7583, +3.9226] A.</a:t>
             </a:r>
           </a:p>
           <a:p/>
@@ -1769,11 +1970,56 @@
           </a:p>
           <a:p>
             <a:r>
+              <a:t>C3_AMBER_VS_MEMBER = 0.0385136 &lt;- s26/results/ph_c3_stage1.json :: summary/'stage1 AMBER minus matched-magnitude TOWARD-MEMBER (16 draws)'/effect [relaxed minus displaced built_chain]</a:t>
+            </a:r>
+          </a:p>
+          <a:p>
+            <a:r>
+              <a:t>C3_AMBER_VS_MEMBER_CI = [0.02980876592028565, 0.04793790929697891] &lt;- s26/results/ph_c3_stage1.json :: summary/'stage1 AMBER minus matched-magnitude TOWARD-MEMBER (16 draws)'/ci95_fold</a:t>
+            </a:r>
+          </a:p>
+          <a:p>
+            <a:r>
+              <a:t>C3_AMBER_VS_NONE = 0.0206947 &lt;- s26/results/ph_c3_stage1.json :: summary/'stage1 AMBER (relaxed) minus do-nothing (built chain)'/effect [relaxed minus built_chain]</a:t>
+            </a:r>
+          </a:p>
+          <a:p>
+            <a:r>
+              <a:t>C3_AMBER_VS_NONE_CI = [0.015410149449308904, 0.02901849743558341] &lt;- s26/results/ph_c3_stage1.json :: summary/'stage1 AMBER (relaxed) minus do-nothing (built chain)'/ci95_fold</a:t>
+            </a:r>
+          </a:p>
+          <a:p>
+            <a:r>
+              <a:t>C3_AMBER_VS_NONE_X = 2.15642 &lt;- s26/results/ph_c3_stage1.json :: summary/'stage1 AMBER (relaxed) minus do-nothing (built chain)'/effect_over_mde</a:t>
+            </a:r>
+          </a:p>
+          <a:p>
+            <a:r>
               <a:t>C3_AMBER_VS_RANDOM = 0.0110805 &lt;- s26/results/ph_c3_stage1.json :: summary/'stage1 AMBER minus matched-magnitude RANDOM (16 draws)'/effect [relaxed minus displaced built_chain]</a:t>
             </a:r>
           </a:p>
           <a:p>
             <a:r>
+              <a:t>C3_AMBER_VS_RANDOM_CI = [0.006228043344255073, 0.017072513842064756] &lt;- s26/results/ph_c3_stage1.json :: summary/'stage1 AMBER minus matched-magnitude RANDOM (16 draws)'/ci95_fold</a:t>
+            </a:r>
+          </a:p>
+          <a:p>
+            <a:r>
+              <a:t>C3_AMBER_VS_RANDOM_FOLDS = 5 &lt;- s26/results/ph_c3_stage1.json :: summary/'stage1 AMBER minus matched-magnitude RANDOM (16 draws)'/folds_same_sign</a:t>
+            </a:r>
+          </a:p>
+          <a:p>
+            <a:r>
+              <a:t>C3_AMBER_VS_RANDOM_X = 1.11923 &lt;- s26/results/ph_c3_stage1.json :: summary/'stage1 AMBER minus matched-magnitude RANDOM (16 draws)'/effect_over_mde</a:t>
+            </a:r>
+          </a:p>
+          <a:p>
+            <a:r>
+              <a:t>C3_RANDOM_VS_NONE = 0.00961423 &lt;- s26/results/ph_c3_stage1.json :: summary/'stage1 RANDOM minus do-nothing'/effect [displaced built_chain minus built_chain]</a:t>
+            </a:r>
+          </a:p>
+          <a:p>
+            <a:r>
               <a:t>COMMON_MODE = 0.67577 &lt;- s23/results/errdecomp.json :: rows[*]/f_common (mean over 126) (DERIVED)</a:t>
             </a:r>
           </a:p>
@@ -1850,6 +2096,36 @@
           <a:p>
             <a:r>
               <a:t>RANDOM75 = 3.42513 &lt;- s25/results/phys_suite.json :: random_null_rank/mean [point_cloud]</a:t>
+            </a:r>
+          </a:p>
+          <a:p>
+            <a:r>
+              <a:t>REJECT_R_VS_ANCHOR = 0.227642 &lt;- s26/results/ph_reject_report.json :: report/point_cloud/1e4/R_vs_anchor_all/effect [point_cloud]</a:t>
+            </a:r>
+          </a:p>
+          <a:p>
+            <a:r>
+              <a:t>REJECT_R_VS_ANCHOR_MEDIAN = 0.00269111 &lt;- s26/results/ph_reject_report.json :: report/point_cloud/1e4/R_vs_anchor_all/median_effect [point_cloud]</a:t>
+            </a:r>
+          </a:p>
+          <a:p>
+            <a:r>
+              <a:t>REJECT_R_VS_RANDR = 0.167169 &lt;- s26/results/ph_reject_report.json :: report/point_cloud/1e4/R_vs_RANDR_all/effect [point_cloud]</a:t>
+            </a:r>
+          </a:p>
+          <a:p>
+            <a:r>
+              <a:t>STRAIN_QUARTILE_MEANS = [2.286050405639703, 2.936410873698196, 3.758273630199497, 3.92256307751297] &lt;- s26/results/ph_strain.json :: rows[*]/{moved, rmsd_arm}: mean rmsd_arm by quartile of moved (32/32/32/30) [built_chain] (DERIVED)</a:t>
+            </a:r>
+          </a:p>
+          <a:p>
+            <a:r>
+              <a:t>STRAIN_RHO_MOVED = 0.432567 &lt;- s26/results/ph_strain.json :: summary/partial_n_rg/moved/rho</a:t>
+            </a:r>
+          </a:p>
+          <a:p>
+            <a:r>
+              <a:t>STRAIN_RHO_MOVED_CI = [0.24715403137333128, 0.587580518912838] &lt;- s26/results/ph_strain.json :: summary/partial_n_rg/moved/ci95_fold</a:t>
             </a:r>
           </a:p>
           <a:p>
@@ -5380,7 +5656,7 @@
                 </a:solidFill>
                 <a:latin typeface="Calibri"/>
               </a:rPr>
-              <a:t>Direction C: learn a better distance prior</a:t>
+              <a:t>Direction C: learn a better distance prior; physics for validity, not accuracy</a:t>
             </a:r>
           </a:p>
         </p:txBody>
@@ -5449,7 +5725,7 @@
                 </a:solidFill>
                 <a:latin typeface="Calibri"/>
               </a:rPr>
-              <a:t>10 / 11    PENDING: s26/PROPOSAL_C.md and s26/C3_RESULT.md</a:t>
+              <a:t>10 / 11    from s26/PROPOSAL_C.md (DRAFT, lane P) and s26/C3_RESULT.md (lane PH, L39, Adversary L46); verdict PENDING C2 to C5</a:t>
             </a:r>
           </a:p>
         </p:txBody>
@@ -5462,8 +5738,8 @@
         </p:nvSpPr>
         <p:spPr>
           <a:xfrm>
-            <a:off x="731520" y="2011680"/>
-            <a:ext cx="10698480" cy="2743200"/>
+            <a:off x="548640" y="1280160"/>
+            <a:ext cx="5669280" cy="5120640"/>
           </a:xfrm>
           <a:prstGeom prst="rect">
             <a:avLst/>
@@ -5478,33 +5754,312 @@
           <a:p>
             <a:pPr>
               <a:spcAft>
-                <a:spcPts val="400"/>
+                <a:spcPts val="300"/>
               </a:spcAft>
             </a:pPr>
             <a:r>
-              <a:rPr sz="2000" b="0">
+              <a:rPr sz="1200" b="1">
                 <a:solidFill>
                   <a:srgbClr val="F2A93B"/>
                 </a:solidFill>
                 <a:latin typeface="Calibri"/>
               </a:rPr>
-              <a:t>PENDING. This slide is filled from s26/PROPOSAL_C.md and s26/C3_RESULT.md when it lands.</a:t>
+              <a:t>What the proposal says</a:t>
             </a:r>
           </a:p>
           <a:p>
             <a:pPr>
               <a:spcAft>
-                <a:spcPts val="400"/>
+                <a:spcPts val="300"/>
               </a:spcAft>
             </a:pPr>
             <a:r>
-              <a:rPr sz="1600" b="0">
+              <a:rPr sz="1200" b="0">
                 <a:solidFill>
                   <a:srgbClr val="ECECF0"/>
                 </a:solidFill>
                 <a:latin typeface="Calibri"/>
               </a:rPr>
-              <a:t>Until then nothing on it is claimed.</a:t>
+              <a:t>• The prior bounds the accuracy; improve it by learning: better inputs (C2), physics kept honest (C3), routers for the per-target set size (C4), a learned correction of the common-mode error (C5); C1 reproduces the closures first.</a:t>
+            </a:r>
+          </a:p>
+          <a:p>
+            <a:pPr>
+              <a:spcAft>
+                <a:spcPts val="300"/>
+              </a:spcAft>
+            </a:pPr>
+            <a:r>
+              <a:rPr sz="1200" b="0">
+                <a:solidFill>
+                  <a:srgbClr val="ECECF0"/>
+                </a:solidFill>
+                <a:latin typeface="Calibri"/>
+              </a:rPr>
+              <a:t>• Not 'learn a better ranker': ranking inside the pool is closed at four levels; the prior is the only steep lever.</a:t>
+            </a:r>
+          </a:p>
+          <a:p>
+            <a:pPr>
+              <a:spcAft>
+                <a:spcPts val="300"/>
+              </a:spcAft>
+            </a:pPr>
+            <a:r>
+              <a:rPr sz="1200" b="1">
+                <a:solidFill>
+                  <a:srgbClr val="F2A93B"/>
+                </a:solidFill>
+                <a:latin typeface="Calibri"/>
+              </a:rPr>
+              <a:t>C1, final: the closures reproduce to the third decimal</a:t>
+            </a:r>
+          </a:p>
+          <a:p>
+            <a:pPr>
+              <a:spcAft>
+                <a:spcPts val="300"/>
+              </a:spcAft>
+            </a:pPr>
+            <a:r>
+              <a:rPr sz="1200" b="0">
+                <a:solidFill>
+                  <a:srgbClr val="ECECF0"/>
+                </a:solidFill>
+                <a:latin typeface="Calibri"/>
+              </a:rPr>
+              <a:t>• set-transformer ranker, real features: 3.043 (n = 8) to 3.026 A (full); with a leaked label 2.534 to 2.146 (ORACLE; weighted-average basis)</a:t>
+            </a:r>
+          </a:p>
+          <a:p>
+            <a:pPr>
+              <a:spcAft>
+                <a:spcPts val="300"/>
+              </a:spcAft>
+            </a:pPr>
+            <a:r>
+              <a:rPr sz="1200" b="0">
+                <a:solidFill>
+                  <a:srgbClr val="ECECF0"/>
+                </a:solidFill>
+                <a:latin typeface="Calibri"/>
+              </a:rPr>
+              <a:t>• perfect ranker inside the shipped top-25: 2.609 A vs random member 3.468 and distogram argmin 3.454 (single window)</a:t>
+            </a:r>
+          </a:p>
+          <a:p>
+            <a:pPr>
+              <a:spcAft>
+                <a:spcPts val="300"/>
+              </a:spcAft>
+            </a:pPr>
+            <a:r>
+              <a:rPr sz="1200" b="1">
+                <a:solidFill>
+                  <a:srgbClr val="F2A93B"/>
+                </a:solidFill>
+                <a:latin typeface="Calibri"/>
+              </a:rPr>
+              <a:t>C2, running: the prior-input ladder</a:t>
+            </a:r>
+          </a:p>
+          <a:p>
+            <a:pPr>
+              <a:spcAft>
+                <a:spcPts val="300"/>
+              </a:spcAft>
+            </a:pPr>
+            <a:r>
+              <a:rPr sz="1200" b="0">
+                <a:solidFill>
+                  <a:srgbClr val="ECECF0"/>
+                </a:solidFill>
+                <a:latin typeface="Calibri"/>
+              </a:rPr>
+              <a:t>• 11 rungs (no ESM, contact head only, pca32, pca32f, pca128, raw, 8M vs 650M, wide, pairnet, mix); 7 rungs have all five fold models on disk; evaluations running</a:t>
+            </a:r>
+          </a:p>
+          <a:p>
+            <a:pPr>
+              <a:spcAft>
+                <a:spcPts val="300"/>
+              </a:spcAft>
+            </a:pPr>
+            <a:r>
+              <a:rPr sz="1200" b="0">
+                <a:solidFill>
+                  <a:srgbClr val="ECECF0"/>
+                </a:solidFill>
+                <a:latin typeface="Calibri"/>
+              </a:rPr>
+              <a:t>• falsifier, fixed before the first run: beat the shipped posterior on the built chain by more than its own MDE, fold-clustered CI excluding zero, 5/5 folds</a:t>
+            </a:r>
+          </a:p>
+          <a:p>
+            <a:pPr>
+              <a:spcAft>
+                <a:spcPts val="300"/>
+              </a:spcAft>
+            </a:pPr>
+            <a:r>
+              <a:rPr sz="1200" b="0">
+                <a:solidFill>
+                  <a:srgbClr val="ECECF0"/>
+                </a:solidFill>
+                <a:latin typeface="Calibri"/>
+              </a:rPr>
+              <a:t>• anchor: selection and point cloud reproduce the production cache (0e+00, 7.3e-14); built chain on the rebuild basis 3.2126 A (L57)</a:t>
+            </a:r>
+          </a:p>
+        </p:txBody>
+      </p:sp>
+      <p:sp>
+        <p:nvSpPr>
+          <p:cNvPr id="6" name="TextBox 5"/>
+          <p:cNvSpPr txBox="1"/>
+          <p:nvPr/>
+        </p:nvSpPr>
+        <p:spPr>
+          <a:xfrm>
+            <a:off x="6446520" y="1280160"/>
+            <a:ext cx="5349240" cy="5120640"/>
+          </a:xfrm>
+          <a:prstGeom prst="rect">
+            <a:avLst/>
+          </a:prstGeom>
+          <a:noFill/>
+        </p:spPr>
+        <p:txBody>
+          <a:bodyPr wrap="square">
+            <a:spAutoFit/>
+          </a:bodyPr>
+          <a:lstStyle/>
+          <a:p>
+            <a:pPr>
+              <a:spcAft>
+                <a:spcPts val="300"/>
+              </a:spcAft>
+            </a:pPr>
+            <a:r>
+              <a:rPr sz="1200" b="1">
+                <a:solidFill>
+                  <a:srgbClr val="F2A93B"/>
+                </a:solidFill>
+                <a:latin typeface="Calibri"/>
+              </a:rPr>
+              <a:t>C3, final: refine-with-physics is a validity step, not an accuracy step</a:t>
+            </a:r>
+          </a:p>
+          <a:p>
+            <a:pPr>
+              <a:spcAft>
+                <a:spcPts val="300"/>
+              </a:spcAft>
+            </a:pPr>
+            <a:r>
+              <a:rPr sz="1200" b="0">
+                <a:solidFill>
+                  <a:srgbClr val="ECECF0"/>
+                </a:solidFill>
+                <a:latin typeface="Calibri"/>
+              </a:rPr>
+              <a:t>• the production relaxation moves the built chain 0.220 A and costs +0.0207 A (fold CI [+0.0154, +0.0290]), 2.16 x MDE (relaxed minus built chain)</a:t>
+            </a:r>
+          </a:p>
+          <a:p>
+            <a:pPr>
+              <a:spcAft>
+                <a:spcPts val="300"/>
+              </a:spcAft>
+            </a:pPr>
+            <a:r>
+              <a:rPr sz="1200" b="0">
+                <a:solidFill>
+                  <a:srgbClr val="ECECF0"/>
+                </a:solidFill>
+                <a:latin typeface="Calibri"/>
+              </a:rPr>
+              <a:t>• a random move of the same size costs +0.0096 A [+0.0077, +0.0122]; AMBER minus random +0.0111 [+0.0062, +0.0171], 5/5 folds, 1.12 x MDE: Type-M zone, sign measured, size an upper bound</a:t>
+            </a:r>
+          </a:p>
+          <a:p>
+            <a:pPr>
+              <a:spcAft>
+                <a:spcPts val="300"/>
+              </a:spcAft>
+            </a:pPr>
+            <a:r>
+              <a:rPr sz="1200" b="0">
+                <a:solidFill>
+                  <a:srgbClr val="ECECF0"/>
+                </a:solidFill>
+                <a:latin typeface="Calibri"/>
+              </a:rPr>
+              <a:t>• AMBER minus a move of the same size toward a random pool member: +0.0385 A [+0.0298, +0.0479]; ORACLE cosine of the displacement with the true residual: -0.049</a:t>
+            </a:r>
+          </a:p>
+          <a:p>
+            <a:pPr>
+              <a:spcAft>
+                <a:spcPts val="300"/>
+              </a:spcAft>
+            </a:pPr>
+            <a:r>
+              <a:rPr sz="1200" b="0">
+                <a:solidFill>
+                  <a:srgbClr val="ECECF0"/>
+                </a:solidFill>
+                <a:latin typeface="Calibri"/>
+              </a:rPr>
+              <a:t>• what validity buys: 58.7% of built chains start above 1e4 kcal/mol; 125 of 126 converge below 1000 (9KAR ends at 1262); a validity step on 124 of 126, on 2BP4 and 9KAR it breaks a virtual bond</a:t>
+            </a:r>
+          </a:p>
+          <a:p>
+            <a:pPr>
+              <a:spcAft>
+                <a:spcPts val="300"/>
+              </a:spcAft>
+            </a:pPr>
+            <a:r>
+              <a:rPr sz="1200" b="1">
+                <a:solidFill>
+                  <a:srgbClr val="F2A93B"/>
+                </a:solidFill>
+                <a:latin typeface="Calibri"/>
+              </a:rPr>
+              <a:t>C4, C5: pre-registered, pending</a:t>
+            </a:r>
+          </a:p>
+          <a:p>
+            <a:pPr>
+              <a:spcAft>
+                <a:spcPts val="300"/>
+              </a:spcAft>
+            </a:pPr>
+            <a:r>
+              <a:rPr sz="1200" b="0">
+                <a:solidFill>
+                  <a:srgbClr val="ECECF0"/>
+                </a:solidFill>
+                <a:latin typeface="Calibri"/>
+              </a:rPr>
+              <a:t>• routers on a feature set no previous router used (C4); predict and subtract the common mode (C5)</a:t>
+            </a:r>
+          </a:p>
+          <a:p>
+            <a:pPr>
+              <a:spcAft>
+                <a:spcPts val="300"/>
+              </a:spcAft>
+            </a:pPr>
+            <a:r>
+              <a:rPr sz="1200" b="1">
+                <a:solidFill>
+                  <a:srgbClr val="ECECF0"/>
+                </a:solidFill>
+                <a:latin typeface="Calibri"/>
+              </a:rPr>
+              <a:t>• Verdict: PENDING the ladder (KEEP AS STATED / KEEP WITH EDITS / REPLACE, per lane P)</a:t>
             </a:r>
           </a:p>
         </p:txBody>
@@ -8749,7 +9304,23 @@
                 </a:solidFill>
                 <a:latin typeface="Calibri"/>
               </a:rPr>
-              <a:t>• physics as a relaxer: AMBER is +0.0111 A worse than a random move of its own size, fold CI [+0.0062, +0.0171]; a validity step, not an accuracy step</a:t>
+              <a:t>• physics as a relaxer: AMBER costs +0.0207 A against the built chain (2.16 x MDE) and is +0.0111 A worse than a random move of its own size (fold CI [+0.0062, +0.0171], Type-M zone: sign measured, size an upper bound); a validity step on 124 of 126</a:t>
+            </a:r>
+          </a:p>
+          <a:p>
+            <a:pPr>
+              <a:spcAft>
+                <a:spcPts val="300"/>
+              </a:spcAft>
+            </a:pPr>
+            <a:r>
+              <a:rPr sz="1250" b="0">
+                <a:solidFill>
+                  <a:srgbClr val="ECECF0"/>
+                </a:solidFill>
+                <a:latin typeface="Calibri"/>
+              </a:rPr>
+              <a:t>• physics as a steric reject filter (1e4 kcal/mol, point cloud): +0.228 A worse than the shipped top-75, median +0.003 (tail-carried; Type-M)</a:t>
             </a:r>
           </a:p>
           <a:p>

--- a/vqe_research_overview.pptx
+++ b/vqe_research_overview.pptx
@@ -2336,13 +2336,164 @@
           </a:p>
           <a:p>
             <a:r>
-              <a:t>PENDING. This slide waits for its build step.</a:t>
+              <a:t>Direction B was: use a large pretrained folding model as the distance prior. Step one asked whether such a model can run here. The answer is no, on three independent grounds. The checkpoints are not on disk and total 8.45 gigabytes. The code needs two packages that are absent, and one of them wants Python 3.9 or lower; this box runs 3.13 on a CPU. And the model needs at least 8.76 gigabytes resident against 4.4 gigabytes of headroom; even at half precision everywhere it is 7.4. Two feasible-scale checks are pending: the contact head alone as a prior input, and an 8-million-parameter language model against the 650-million one. A third asks whether the targets where the pipeline beats a sequence-only predictor form a set I can recognise without the native. The pipeline wins there by 0.56 angstroms, 89 targets to 37. If those checks are null, B is replaced by a paper. The paper says what a force field's Pauli spectrum does and does not predict. Chain geometry fixes which residues a distance can depend on; that is an exact theorem. That fixes the energy's Pauli spectrum, once the raw force field's clash spike is conditioned away. The spectrum times the circuit's own kernel predicts the measured gradient variance with no free parameter: the median ratio is 0.997 over 104 cells. This sprint added the algebra and the product-circuit result. The paper will not claim an advantage, and it will not call a small gradient a plateau.</a:t>
             </a:r>
           </a:p>
           <a:p/>
           <a:p>
             <a:r>
+              <a:t>ALSO (not spoken):</a:t>
+            </a:r>
+          </a:p>
+          <a:p>
+            <a:r>
+              <a:t>B1 verdict: "NO" (`s26/results/b1_feasibility.json`, L13). The one part of a large pretrained model this box already consumes is the ESM-2 650M embedding and its contact head, already 13 of the shipped prior's 183 input columns; its S7 selection value (a document-only -0.288 A whose per-target artefact is lost, L11) is not on this slide and is re-measured by C2's noesm and pca32 rungs. B3 arms, built chains, persisted: pipeline 3.2148, sequence-only torsion predictor 3.7705, constant helix 4.0648; torsion predictor minus pipeline +0.5557 (median +0.2314, SE 0.1318, MDE 0.3694, 37W/89L); the characterisability test (nested ridge against a permutation null) is pending in `s26/results/p_b3.json`. Replacement claims and their artefacts: C1 locality theorem (`s13/results/qarch_locality_geom.json`); C2 raw AMBER's delta-spike spectrum (`s13/results/walsh_xval.json`); C4 spectrum x kernel predicts the gradient variance, median measured/predicted 0.9969 over 104 cells (`s13/results/geo_pauli.json`); C5 the kernel is flat in Pauli weight at depth &gt;= 3 (`s13/results/geo_kernel.json`); C7 the width sweep, slopes -0.649 / -0.252 / -0.047 / -0.311 / -0.243 (`s25/results/q_plateau.json`); C8 the DLA is the full so(2^n) from depth 2 at n = 7, dim 8,128 (`s26/results/q_dla.json`, slide 6); C9 ADAPT-grown circuits at alpha = 1 are product circuits (`s26/results/q_dla.json` adapt sets, `s26/results/q_var.json` slopes; slide 8); C10 the optimiser trains and the readout cannot tell, 0.902 nats, 0.24 x MDE (`s25/results/q_gibbs.json`, `q_alpha.json`); C11 the set-equality theorem, 2,592 cells, 0 violations (`s25/results/q_verify.json`); C12 the deployed Gibbs target is a product state, KL 7.2e-17 ideal, 5.4e-05 on 1A13 (`s26/results/probe/1A13.json`). Venue statement: every number is noiseless exact simulation; a submission would add a noise model, width beyond n = 13, a 2-design control, seeds and error bars on every variance.</a:t>
+            </a:r>
+          </a:p>
+          <a:p/>
+          <a:p>
+            <a:r>
               <a:t>SOURCES (not spoken; token = value &lt;- artefact path [basis]):</a:t>
+            </a:r>
+          </a:p>
+          <a:p>
+            <a:r>
+              <a:t>ARM_MEAN = 3.21477 &lt;- bench_results/baseline_tuning126.json :: science/rmsd_arm/mean [built_chain]</a:t>
+            </a:r>
+          </a:p>
+          <a:p>
+            <a:r>
+              <a:t>B1_DOWNLOAD_GB = 8.45 &lt;- s26/results/b1_feasibility.json :: .../download_bytes_http_head/total_GB</a:t>
+            </a:r>
+          </a:p>
+          <a:p>
+            <a:r>
+              <a:t>B1_FP16_GB = 7.4 &lt;- s26/results/b1_feasibility.json :: .../ram_fp16_GB_parameters_only/total</a:t>
+            </a:r>
+          </a:p>
+          <a:p>
+            <a:r>
+              <a:t>B1_HEADROOM_GB = 4.4 &lt;- s26/LEDGER.md L13 (governor_state 00:19: 64.8% of 16.75 GB used, ceiling 93%) (LEDGER)</a:t>
+            </a:r>
+          </a:p>
+          <a:p>
+            <a:r>
+              <a:t>B1_RESIDENT_GB = 8.76 &lt;- s26/results/b1_feasibility.json :: measured_2026-09-13/c_size_and_ram/ram_as_fair_esm_loads_it_GB/total_resident_minimum</a:t>
+            </a:r>
+          </a:p>
+          <a:p>
+            <a:r>
+              <a:t>B1_VERDICT = NO &lt;- s26/results/b1_feasibility.json :: verdict</a:t>
+            </a:r>
+          </a:p>
+          <a:p>
+            <a:r>
+              <a:t>B3_TORS_L = 89 &lt;- same rows, targets where the pipeline wins (DERIVED)</a:t>
+            </a:r>
+          </a:p>
+          <a:p>
+            <a:r>
+              <a:t>B3_TORS_MINUS_ARM = 0.555693 &lt;- s13/cache/tors_rows.npz['a_pepPos'][*]/rmsd_build minus bench_results/cache/1fc9f2dcf489e2fb/&lt;pdb&gt;.json :: rmsd_arm (paired mean) [built_chain] (DERIVED)</a:t>
+            </a:r>
+          </a:p>
+          <a:p>
+            <a:r>
+              <a:t>B3_TORS_MINUS_ARM_MDE = 0.369361 &lt;- same rows, 2.8016 x SE (DERIVED)</a:t>
+            </a:r>
+          </a:p>
+          <a:p>
+            <a:r>
+              <a:t>B3_TORS_MINUS_ARM_MEDIAN = 0.231395 &lt;- same rows, paired median [built_chain] (DERIVED)</a:t>
+            </a:r>
+          </a:p>
+          <a:p>
+            <a:r>
+              <a:t>B3_TORS_MINUS_ARM_SE = 0.131839 &lt;- same rows, SE of the paired mean (DERIVED)</a:t>
+            </a:r>
+          </a:p>
+          <a:p>
+            <a:r>
+              <a:t>B3_TORS_W = 37 &lt;- same rows, targets where the torsion predictor beats the pipeline (DERIVED)</a:t>
+            </a:r>
+          </a:p>
+          <a:p>
+            <a:r>
+              <a:t>DLA_SO128 = 8128 &lt;- s26/results/q_dla.json :: results/fixed/n7_L3/dim_so</a:t>
+            </a:r>
+          </a:p>
+          <a:p>
+            <a:r>
+              <a:t>HELIX = 4.06475 &lt;- s12/results/s14_ladder.json :: rows/L0_constant_helix/mean [built_chain]</a:t>
+            </a:r>
+          </a:p>
+          <a:p>
+            <a:r>
+              <a:t>PAULI_N_CELLS = 104 &lt;- s13/results/geo_pauli.json :: len(cells)</a:t>
+            </a:r>
+          </a:p>
+          <a:p>
+            <a:r>
+              <a:t>PAULI_RATIO_LEGACY = 0.996949 &lt;- s13/results/geo_pauli.json :: cells[*]/legacy/ratio_meas_over_pred_exact (median) (DERIVED)</a:t>
+            </a:r>
+          </a:p>
+          <a:p>
+            <a:r>
+              <a:t>PROD_KL_1A13 = 5.43789e-05 &lt;- s26/results/probe/1A13.json :: product_diagnostics/zrank/kl_gibbs_to_product</a:t>
+            </a:r>
+          </a:p>
+          <a:p>
+            <a:r>
+              <a:t>PROD_KL_IDEAL = 7.23403e-17 &lt;- s26/results/probe/1A13.json :: product_diagnostics/ideal_ladder/kl_gibbs_to_product</a:t>
+            </a:r>
+          </a:p>
+          <a:p>
+            <a:r>
+              <a:t>Q_CELLS = 2592 &lt;- s25/results/q_verify.json :: results/n_cells</a:t>
+            </a:r>
+          </a:p>
+          <a:p>
+            <a:r>
+              <a:t>Q_CIRC_VS_GIBBS_X = 0.239914 &lt;- s25/results/q_alpha.json :: .../'circuit - exact Boltzmann @T=0.3'/eff_over_mde</a:t>
+            </a:r>
+          </a:p>
+          <a:p>
+            <a:r>
+              <a:t>Q_KL_NATS = 0.901916 &lt;- s25/results/q_gibbs.json :: results/divergence_ladder/[T=0.3]/ladder/'50 Adam steps (DEPLOYED)'/kl_nats</a:t>
+            </a:r>
+          </a:p>
+          <a:p>
+            <a:r>
+              <a:t>Q_VIOLATIONS = 0 &lt;- s25/results/q_verify.json :: results/'SUBSET-hood violations  &lt;- THE THEOREM'</a:t>
+            </a:r>
+          </a:p>
+          <a:p>
+            <a:r>
+              <a:t>SLOPE_A01_T0 = -0.0471589 &lt;- s25/results/q_plateau.json :: results/cvar_alpha01_T0/log2_slope_per_qubit</a:t>
+            </a:r>
+          </a:p>
+          <a:p>
+            <a:r>
+              <a:t>SLOPE_A025_T0 = -0.252201 &lt;- s25/results/q_plateau.json :: results/cvar_alpha025_T0/log2_slope_per_qubit</a:t>
+            </a:r>
+          </a:p>
+          <a:p>
+            <a:r>
+              <a:t>SLOPE_A025_T03 = -0.242884 &lt;- s25/results/q_plateau.json :: results/deployed_a025_T03/log2_slope_per_qubit</a:t>
+            </a:r>
+          </a:p>
+          <a:p>
+            <a:r>
+              <a:t>SLOPE_A1_T03 = -0.310535 &lt;- s25/results/q_plateau.json :: results/deployed_a1_T03/log2_slope_per_qubit</a:t>
+            </a:r>
+          </a:p>
+          <a:p>
+            <a:r>
+              <a:t>SLOPE_LIN = -0.649187 &lt;- s25/results/q_plateau.json :: results/linear_alpha1_T0/log2_slope_per_qubit</a:t>
+            </a:r>
+          </a:p>
+          <a:p>
+            <a:r>
+              <a:t>TORS = 3.77046 &lt;- s13/results/tors_eval.json :: reports/a_pepPos/build/mean [built_chain]</a:t>
             </a:r>
           </a:p>
         </p:txBody>
@@ -9683,7 +9834,7 @@
                 </a:solidFill>
                 <a:latin typeface="Calibri"/>
               </a:rPr>
-              <a:t>Direction B: a learned folding model as the prior</a:t>
+              <a:t>Direction B: a learned folding model as the prior, and its replacement</a:t>
             </a:r>
           </a:p>
         </p:txBody>
@@ -9752,7 +9903,7 @@
                 </a:solidFill>
                 <a:latin typeface="Calibri"/>
               </a:rPr>
-              <a:t>9 / 11    PENDING: s26/PROPOSAL_B.md and s26/PROPOSAL_B_REPLACEMENT.md</a:t>
+              <a:t>9 / 11    from s26/PROPOSAL_B.md (lane P, DRAFT; B1 final) and s26/PROPOSAL_B_REPLACEMENT.md (lane Q); the A2 and A4 figures are on slides 6 and 8</a:t>
             </a:r>
           </a:p>
         </p:txBody>
@@ -9765,8 +9916,8 @@
         </p:nvSpPr>
         <p:spPr>
           <a:xfrm>
-            <a:off x="731520" y="2011680"/>
-            <a:ext cx="10698480" cy="2743200"/>
+            <a:off x="548640" y="1280160"/>
+            <a:ext cx="5577840" cy="5120640"/>
           </a:xfrm>
           <a:prstGeom prst="rect">
             <a:avLst/>
@@ -9781,33 +9932,376 @@
           <a:p>
             <a:pPr>
               <a:spcAft>
-                <a:spcPts val="400"/>
-              </a:spcAft>
-            </a:pPr>
-            <a:r>
-              <a:rPr sz="2000" b="0">
+                <a:spcPts val="300"/>
+              </a:spcAft>
+            </a:pPr>
+            <a:r>
+              <a:rPr sz="1150" b="1">
                 <a:solidFill>
                   <a:srgbClr val="F2A93B"/>
                 </a:solidFill>
                 <a:latin typeface="Calibri"/>
               </a:rPr>
-              <a:t>PENDING. This slide is filled from s26/PROPOSAL_B.md and s26/PROPOSAL_B_REPLACEMENT.md when it lands.</a:t>
-            </a:r>
-          </a:p>
-          <a:p>
-            <a:pPr>
-              <a:spcAft>
-                <a:spcPts val="400"/>
-              </a:spcAft>
-            </a:pPr>
-            <a:r>
-              <a:rPr sz="1600" b="0">
+              <a:t>What the proposal says</a:t>
+            </a:r>
+          </a:p>
+          <a:p>
+            <a:pPr>
+              <a:spcAft>
+                <a:spcPts val="300"/>
+              </a:spcAft>
+            </a:pPr>
+            <a:r>
+              <a:rPr sz="1150" b="0">
                 <a:solidFill>
                   <a:srgbClr val="ECECF0"/>
                 </a:solidFill>
                 <a:latin typeface="Calibri"/>
               </a:rPr>
-              <a:t>Until then nothing on it is claimed.</a:t>
+              <a:t>• Replace or augment the shipped distance prior with the output of a large pretrained folding model, because the prior's accuracy is the only steep lever the record measured.</a:t>
+            </a:r>
+          </a:p>
+          <a:p>
+            <a:pPr>
+              <a:spcAft>
+                <a:spcPts val="300"/>
+              </a:spcAft>
+            </a:pPr>
+            <a:r>
+              <a:rPr sz="1150" b="1">
+                <a:solidFill>
+                  <a:srgbClr val="F2A93B"/>
+                </a:solidFill>
+                <a:latin typeface="Calibri"/>
+              </a:rPr>
+              <a:t>B1, final: the folding model cannot run on this machine</a:t>
+            </a:r>
+          </a:p>
+          <a:p>
+            <a:pPr>
+              <a:spcAft>
+                <a:spcPts val="300"/>
+              </a:spcAft>
+            </a:pPr>
+            <a:r>
+              <a:rPr sz="1150" b="0">
+                <a:solidFill>
+                  <a:srgbClr val="ECECF0"/>
+                </a:solidFill>
+                <a:latin typeface="Calibri"/>
+              </a:rPr>
+              <a:t>• no checkpoint on disk; 8.45 GB to download</a:t>
+            </a:r>
+          </a:p>
+          <a:p>
+            <a:pPr>
+              <a:spcAft>
+                <a:spcPts val="300"/>
+              </a:spcAft>
+            </a:pPr>
+            <a:r>
+              <a:rPr sz="1150" b="0">
+                <a:solidFill>
+                  <a:srgbClr val="ECECF0"/>
+                </a:solidFill>
+                <a:latin typeface="Calibri"/>
+              </a:rPr>
+              <a:t>• openfold and omegaconf absent; openfold needs nvcc and Python &lt;= 3.9; this box is Python 3.13, CPU-only torch</a:t>
+            </a:r>
+          </a:p>
+          <a:p>
+            <a:pPr>
+              <a:spcAft>
+                <a:spcPts val="300"/>
+              </a:spcAft>
+            </a:pPr>
+            <a:r>
+              <a:rPr sz="1150" b="0">
+                <a:solidFill>
+                  <a:srgbClr val="ECECF0"/>
+                </a:solidFill>
+                <a:latin typeface="Calibri"/>
+              </a:rPr>
+              <a:t>• 8.76 GB resident as fair-esm loads it (fp16 LM, fp32 trunk) against 4.4 GB of headroom; fp16 everywhere is still 7.4 GB</a:t>
+            </a:r>
+          </a:p>
+          <a:p>
+            <a:pPr>
+              <a:spcAft>
+                <a:spcPts val="300"/>
+              </a:spcAft>
+            </a:pPr>
+            <a:r>
+              <a:rPr sz="1150" b="1">
+                <a:solidFill>
+                  <a:srgbClr val="F2A93B"/>
+                </a:solidFill>
+                <a:latin typeface="Calibri"/>
+              </a:rPr>
+              <a:t>B2, pending: the feasible-scale ladder</a:t>
+            </a:r>
+          </a:p>
+          <a:p>
+            <a:pPr>
+              <a:spcAft>
+                <a:spcPts val="300"/>
+              </a:spcAft>
+            </a:pPr>
+            <a:r>
+              <a:rPr sz="1150" b="0">
+                <a:solidFill>
+                  <a:srgbClr val="ECECF0"/>
+                </a:solidFill>
+                <a:latin typeface="Calibri"/>
+              </a:rPr>
+              <a:t>• the ESM-2 contact head alone as a prior input; the 8M language model against the 650M (rungs conly and esm8m of the C2 ladder)</a:t>
+            </a:r>
+          </a:p>
+          <a:p>
+            <a:pPr>
+              <a:spcAft>
+                <a:spcPts val="300"/>
+              </a:spcAft>
+            </a:pPr>
+            <a:r>
+              <a:rPr sz="1150" b="1">
+                <a:solidFill>
+                  <a:srgbClr val="F2A93B"/>
+                </a:solidFill>
+                <a:latin typeface="Calibri"/>
+              </a:rPr>
+              <a:t>B3, pending: where the pipeline beats sequence-only, and is that set recognisable native-free?</a:t>
+            </a:r>
+          </a:p>
+          <a:p>
+            <a:pPr>
+              <a:spcAft>
+                <a:spcPts val="300"/>
+              </a:spcAft>
+            </a:pPr>
+            <a:r>
+              <a:rPr sz="1150" b="0">
+                <a:solidFill>
+                  <a:srgbClr val="ECECF0"/>
+                </a:solidFill>
+                <a:latin typeface="Calibri"/>
+              </a:rPr>
+              <a:t>• built chains: pipeline 3.2148, sequence-only torsion predictor 3.7705, constant helix 4.0648 A; torsion minus pipeline +0.5557 (SE 0.1318, MDE 0.3694, 37W/89L); the classifier test is pending</a:t>
+            </a:r>
+          </a:p>
+          <a:p>
+            <a:pPr>
+              <a:spcAft>
+                <a:spcPts val="300"/>
+              </a:spcAft>
+            </a:pPr>
+            <a:r>
+              <a:rPr sz="1150" b="1">
+                <a:solidFill>
+                  <a:srgbClr val="ECECF0"/>
+                </a:solidFill>
+                <a:latin typeface="Calibri"/>
+              </a:rPr>
+              <a:t>• Verdict: PENDING B2/B3. If null: REPLACE with the trainability paper (right).</a:t>
+            </a:r>
+          </a:p>
+        </p:txBody>
+      </p:sp>
+      <p:sp>
+        <p:nvSpPr>
+          <p:cNvPr id="6" name="TextBox 5"/>
+          <p:cNvSpPr txBox="1"/>
+          <p:nvPr/>
+        </p:nvSpPr>
+        <p:spPr>
+          <a:xfrm>
+            <a:off x="6355080" y="1280160"/>
+            <a:ext cx="5440680" cy="5120640"/>
+          </a:xfrm>
+          <a:prstGeom prst="rect">
+            <a:avLst/>
+          </a:prstGeom>
+          <a:noFill/>
+        </p:spPr>
+        <p:txBody>
+          <a:bodyPr wrap="square">
+            <a:spAutoFit/>
+          </a:bodyPr>
+          <a:lstStyle/>
+          <a:p>
+            <a:pPr>
+              <a:spcAft>
+                <a:spcPts val="300"/>
+              </a:spcAft>
+            </a:pPr>
+            <a:r>
+              <a:rPr sz="1150" b="1">
+                <a:solidFill>
+                  <a:srgbClr val="F2A93B"/>
+                </a:solidFill>
+                <a:latin typeface="Calibri"/>
+              </a:rPr>
+              <a:t>The replacement: publish the trainability result</a:t>
+            </a:r>
+          </a:p>
+          <a:p>
+            <a:pPr>
+              <a:spcAft>
+                <a:spcPts val="300"/>
+              </a:spcAft>
+            </a:pPr>
+            <a:r>
+              <a:rPr sz="1150" b="0">
+                <a:solidFill>
+                  <a:srgbClr val="ECECF0"/>
+                </a:solidFill>
+                <a:latin typeface="Calibri"/>
+              </a:rPr>
+              <a:t>• chain geometry fixes which residues a distance term can depend on (exact theorem); that fixes the energy's Pauli spectrum once raw AMBER's clash spike is conditioned away</a:t>
+            </a:r>
+          </a:p>
+          <a:p>
+            <a:pPr>
+              <a:spcAft>
+                <a:spcPts val="300"/>
+              </a:spcAft>
+            </a:pPr>
+            <a:r>
+              <a:rPr sz="1150" b="0">
+                <a:solidFill>
+                  <a:srgbClr val="ECECF0"/>
+                </a:solidFill>
+                <a:latin typeface="Calibri"/>
+              </a:rPr>
+              <a:t>• the spectrum times the circuit's own kernel predicts the measured gradient variance with no free parameter: median measured/predicted 0.997 over 104 cells</a:t>
+            </a:r>
+          </a:p>
+          <a:p>
+            <a:pPr>
+              <a:spcAft>
+                <a:spcPts val="300"/>
+              </a:spcAft>
+            </a:pPr>
+            <a:r>
+              <a:rPr sz="1150" b="0">
+                <a:solidFill>
+                  <a:srgbClr val="ECECF0"/>
+                </a:solidFill>
+                <a:latin typeface="Calibri"/>
+              </a:rPr>
+              <a:t>• at depth &gt;= 3 the kernel is flat in Pauli weight: the force field's locality is not what limits training; the width is</a:t>
+            </a:r>
+          </a:p>
+          <a:p>
+            <a:pPr>
+              <a:spcAft>
+                <a:spcPts val="300"/>
+              </a:spcAft>
+            </a:pPr>
+            <a:r>
+              <a:rPr sz="1150" b="0">
+                <a:solidFill>
+                  <a:srgbClr val="ECECF0"/>
+                </a:solidFill>
+                <a:latin typeface="Calibri"/>
+              </a:rPr>
+              <a:t>• the Lie algebra is the full so(2^n) from depth 2 (dim 8,128 at n = 7): nothing algebraic protects the ansatz at scale; n = 4..13 at depth 3 is the shallow regime</a:t>
+            </a:r>
+          </a:p>
+          <a:p>
+            <a:pPr>
+              <a:spcAft>
+                <a:spcPts val="300"/>
+              </a:spcAft>
+            </a:pPr>
+            <a:r>
+              <a:rPr sz="1150" b="0">
+                <a:solidFill>
+                  <a:srgbClr val="ECECF0"/>
+                </a:solidFill>
+                <a:latin typeface="Calibri"/>
+              </a:rPr>
+              <a:t>• the deployed Gibbs target is a product state (KL to its product of marginals 5.4e-05 on 1A13); an ADAPT-grown circuit on it grows no entanglement, so its gradients do not decay because there is nothing to train</a:t>
+            </a:r>
+          </a:p>
+          <a:p>
+            <a:pPr>
+              <a:spcAft>
+                <a:spcPts val="300"/>
+              </a:spcAft>
+            </a:pPr>
+            <a:r>
+              <a:rPr sz="1150" b="0">
+                <a:solidFill>
+                  <a:srgbClr val="ECECF0"/>
+                </a:solidFill>
+                <a:latin typeface="Calibri"/>
+              </a:rPr>
+              <a:t>• the optimiser trains (78% to 89% of the gap) and the readout cannot tell (0.24 x MDE); the tail is a subset of the classical prefix (2,592 cells, 0 violations)</a:t>
+            </a:r>
+          </a:p>
+          <a:p>
+            <a:pPr>
+              <a:spcAft>
+                <a:spcPts val="300"/>
+              </a:spcAft>
+            </a:pPr>
+            <a:r>
+              <a:rPr sz="1150" b="1">
+                <a:solidFill>
+                  <a:srgbClr val="F2A93B"/>
+                </a:solidFill>
+                <a:latin typeface="Calibri"/>
+              </a:rPr>
+              <a:t>Two claims the paper will not make</a:t>
+            </a:r>
+          </a:p>
+          <a:p>
+            <a:pPr>
+              <a:spcAft>
+                <a:spcPts val="300"/>
+              </a:spcAft>
+            </a:pPr>
+            <a:r>
+              <a:rPr sz="1150" b="0">
+                <a:solidFill>
+                  <a:srgbClr val="ECECF0"/>
+                </a:solidFill>
+                <a:latin typeface="Calibri"/>
+              </a:rPr>
+              <a:t>• a quantum advantage (7 qubits, exact simulation, selection classical by theorem, a product-state target)</a:t>
+            </a:r>
+          </a:p>
+          <a:p>
+            <a:pPr>
+              <a:spcAft>
+                <a:spcPts val="300"/>
+              </a:spcAft>
+            </a:pPr>
+            <a:r>
+              <a:rPr sz="1150" b="0">
+                <a:solidFill>
+                  <a:srgbClr val="ECECF0"/>
+                </a:solidFill>
+                <a:latin typeface="Calibri"/>
+              </a:rPr>
+              <a:t>• a barren plateau from a small gradient; 'no plateau' is said only as 'at n &lt;= 13, depth 3, this ansatz'</a:t>
+            </a:r>
+          </a:p>
+          <a:p>
+            <a:pPr>
+              <a:spcAft>
+                <a:spcPts val="300"/>
+              </a:spcAft>
+            </a:pPr>
+            <a:r>
+              <a:rPr sz="1150" b="0">
+                <a:solidFill>
+                  <a:srgbClr val="A8A8B6"/>
+                </a:solidFill>
+                <a:latin typeface="Calibri"/>
+              </a:rPr>
+              <a:t>• Venue: noiseless exact simulation throughout; a submission adds a noise model, width beyond 13, a 2-design control, error bars</a:t>
             </a:r>
           </a:p>
         </p:txBody>

--- a/vqe_research_overview.pptx
+++ b/vqe_research_overview.pptx
@@ -2255,13 +2255,179 @@
           </a:p>
           <a:p>
             <a:r>
-              <a:t>PENDING. This slide waits for `s26/PROPOSAL_A.md`.</a:t>
+              <a:t>PENDING: this slide is a placeholder until lane Q's proposal file lands; every fact on it is measured. Direction A was: replace the fixed ansatz with ADAPT-VQE. Two things are already known. First, the algebra. The fixed ansatz generates the full so(128) at seven qubits from depth two, so ADAPT cannot add expressivity the fixed circuit lacks; the Tang minimal pool generates only 2,080 dimensions of it. Second, the target. At alpha equal to one, the state the optimiser is asked to reach is a product state: the divergence between the Gibbs state and the product of its marginals is 5.4e-05 nats on a real target. A seven-parameter layer of single-qubit rotations reaches it to 5.4e-05 nats; the deployed 21-parameter circuit stops at 0.903. So an ADAPT-grown circuit on this Hamiltonian selects 1 to 3 distinct operators and repeats one single-qubit rotation: it is a product circuit. Its gradient variance does not decay with width, and it is 1.6 to 370 times the fixed ansatz's. That is not trainability; there is nothing to train. The one non-trivial grown family, alpha 0.25 with the two-local pool, decays at -0.302 per qubit against the fixed -0.243; both are far from the minus one of a two-design, and no interval on their difference is on disk. The endpoint experiment is running and I expect a null, because the set-equality theorem bounds every readout by the classical prefix.</a:t>
             </a:r>
           </a:p>
           <a:p/>
           <a:p>
             <a:r>
+              <a:t>ALSO (not spoken):</a:t>
+            </a:r>
+          </a:p>
+          <a:p>
+            <a:r>
+              <a:t>PENDING: the wording and verdict come from `s26/PROPOSAL_A.md` (lane Q) when it exists; A1 (fixed vs ADAPT-grown, built chain primary) was at 33 of 126 targets at 19:20 (`s26/STATUS.md`). A2 (L27, Adversary L45 STANDS): dim(DLA) at n = 7 is 7 at depth 1, 8,128 at depth 2 and 8,128 at depth 3 against dim so(128) = 8,128; pool V 2,080, pool L2 8,128; ADAPT-selected sets at alpha = 1 stay abelian (dim 7), at alpha = 0.25 with pool L2 reach 1,025; symbolic closure equals the dense SVD rank on 12/12 cells. A4 (L35, Adversary L47 STANDS WITH CAVEAT): matched-P slopes, log2 Var per qubit, grown V / L2: -0.079 / +0.006 (alpha 1, T 0), +0.035 / -0.008 (alpha 1, T 0.3), -0.246 / -0.302 (alpha 0.25, T 0.3) against the fixed -0.649 / -0.311 / -0.243; grown/fixed variance ratio 1.63 to 370 over 39 matched rows; the alpha = 0.25 L2 family grows 4 to 21 distinct 2-local strings; S25's n = 7 rows reproduce at relative deviation 0.0000. Per L47 the product-circuit reading rests on `s26/results/q_dla.json` (adapt sets), not on `q_var.json`. The product-state target: KL(Gibbs || product of marginals) 7.2e-17 on the ideal ladder and 5.4e-05 on 1A13 (`s26/results/probe/1A13.json`). What A gives Proposal A: no width-scaling argument (L35); on this diagonal, nearly target-independent Hamiltonian the honest form of direction A is ADAPT as a diagnostic, or a Hamiltonian that is not diagonal, which this project does not have.</a:t>
+            </a:r>
+          </a:p>
+          <a:p/>
+          <a:p>
+            <a:r>
               <a:t>SOURCES (not spoken; token = value &lt;- artefact path [basis]):</a:t>
+            </a:r>
+          </a:p>
+          <a:p>
+            <a:r>
+              <a:t>A4_A1_DISTINCT_MAX = 3 &lt;- s26/results/q_var.json :: results/grown/[alpha=1 cells]/rows[P_matched]/n_distinct_ops (max) (DERIVED)</a:t>
+            </a:r>
+          </a:p>
+          <a:p>
+            <a:r>
+              <a:t>A4_A1_DISTINCT_MIN = 1 &lt;- s26/results/q_var.json :: results/grown/[alpha=1 cells]/rows[P_matched]/n_distinct_ops (min) (DERIVED)</a:t>
+            </a:r>
+          </a:p>
+          <a:p>
+            <a:r>
+              <a:t>A4_FIXED_A025_T03 = -0.242884 &lt;- s26/results/q_var.json :: results/fixed/deployed_a025_T03/log2_slope_per_qubit</a:t>
+            </a:r>
+          </a:p>
+          <a:p>
+            <a:r>
+              <a:t>A4_L2_A025_DISTINCT_MAX = 21 &lt;- s26/results/q_var.json :: results/grown/'L2:adam_best:deployed_a025_T03'/rows[P_matched]/n_distinct_ops (max) (DERIVED)</a:t>
+            </a:r>
+          </a:p>
+          <a:p>
+            <a:r>
+              <a:t>A4_L2_A025_DISTINCT_MIN = 4 &lt;- s26/results/q_var.json :: results/grown/'L2:adam_best:deployed_a025_T03'/rows[P_matched]/n_distinct_ops (min) (DERIVED)</a:t>
+            </a:r>
+          </a:p>
+          <a:p>
+            <a:r>
+              <a:t>A4_L2_A025_T03 = -0.302361 &lt;- s26/results/q_var.json :: results/grown/'L2:adam_best:deployed_a025_T03'/rows[P_matched] (DERIVED)</a:t>
+            </a:r>
+          </a:p>
+          <a:p>
+            <a:r>
+              <a:t>A4_L2_A1_T03 = -0.00752101 &lt;- s26/results/q_var.json :: results/grown/'L2:adam_best:deployed_a1_T03'/rows[P_matched] (DERIVED)</a:t>
+            </a:r>
+          </a:p>
+          <a:p>
+            <a:r>
+              <a:t>A4_L2_LIN = 0.00620042 &lt;- s26/results/q_var.json :: results/grown/'L2:adam_best:linear_alpha1_T0'/rows[P_matched] (DERIVED)</a:t>
+            </a:r>
+          </a:p>
+          <a:p>
+            <a:r>
+              <a:t>A4_N_MATCHED = 39 &lt;- s26/results/q_var.json :: number of matched rows (DERIVED)</a:t>
+            </a:r>
+          </a:p>
+          <a:p>
+            <a:r>
+              <a:t>A4_RATIO_MAX = 370.47 &lt;- s26/results/q_var.json :: the same, max (DERIVED)</a:t>
+            </a:r>
+          </a:p>
+          <a:p>
+            <a:r>
+              <a:t>A4_RATIO_MIN = 1.62806 &lt;- s26/results/q_var.json :: grown var_g0 / fixed var_g0 at matched (cell, n), min over the matched rows (DERIVED)</a:t>
+            </a:r>
+          </a:p>
+          <a:p>
+            <a:r>
+              <a:t>A4_REPRO_WORST_REL = 0 &lt;- s26/results/q_var.json :: results/reproduction/worst_rel</a:t>
+            </a:r>
+          </a:p>
+          <a:p>
+            <a:r>
+              <a:t>A4_V_A025_T03 = -0.245975 &lt;- s26/results/q_var.json :: results/grown/'V:adam_best:deployed_a025_T03'/rows[P_matched] (DERIVED)</a:t>
+            </a:r>
+          </a:p>
+          <a:p>
+            <a:r>
+              <a:t>A4_V_A1_T03 = 0.0346107 &lt;- s26/results/q_var.json :: results/grown/'V:adam_best:deployed_a1_T03'/rows[P_matched] (DERIVED)</a:t>
+            </a:r>
+          </a:p>
+          <a:p>
+            <a:r>
+              <a:t>A4_V_LIN = -0.0792065 &lt;- s26/results/q_var.json :: results/grown/'V:adam_best:linear_alpha1_T0'/rows[P_matched] (log2 slope) (DERIVED)</a:t>
+            </a:r>
+          </a:p>
+          <a:p>
+            <a:r>
+              <a:t>ADAPT_A025_L2_DIM = 1025 &lt;- s26/results/q_dla.json :: results/adapt_sets/[alpha=0.25, pool L2]/ladder[-1]/dim (max) (DERIVED)</a:t>
+            </a:r>
+          </a:p>
+          <a:p>
+            <a:r>
+              <a:t>ADAPT_A1_DIM = 7 &lt;- s26/results/q_dla.json :: results/adapt_sets/[alpha=1]/ladder[-1]/dim (max over pools and optimisers) (DERIVED)</a:t>
+            </a:r>
+          </a:p>
+          <a:p>
+            <a:r>
+              <a:t>DLA_N7_L1 = 7 &lt;- s26/results/q_dla.json :: results/fixed/n7_L1/dim</a:t>
+            </a:r>
+          </a:p>
+          <a:p>
+            <a:r>
+              <a:t>DLA_N7_L2 = 8128 &lt;- s26/results/q_dla.json :: results/fixed/n7_L2/dim</a:t>
+            </a:r>
+          </a:p>
+          <a:p>
+            <a:r>
+              <a:t>DLA_N7_L3 = 8128 &lt;- s26/results/q_dla.json :: results/fixed/n7_L3/dim</a:t>
+            </a:r>
+          </a:p>
+          <a:p>
+            <a:r>
+              <a:t>DLA_NUMERIC_AGREE = 12/12 &lt;- s26/results/q_dla.json :: results/numeric/*/agree (DERIVED)</a:t>
+            </a:r>
+          </a:p>
+          <a:p>
+            <a:r>
+              <a:t>DLA_POOL_L2_N7 = 8128 &lt;- s26/results/q_dla.json :: results/pools/L2_n7/dim</a:t>
+            </a:r>
+          </a:p>
+          <a:p>
+            <a:r>
+              <a:t>DLA_POOL_V_N7 = 2080 &lt;- s26/results/q_dla.json :: results/pools/V_n7/dim</a:t>
+            </a:r>
+          </a:p>
+          <a:p>
+            <a:r>
+              <a:t>DLA_SO128 = 8128 &lt;- s26/results/q_dla.json :: results/fixed/n7_L3/dim_so</a:t>
+            </a:r>
+          </a:p>
+          <a:p>
+            <a:r>
+              <a:t>PROD_KL_1A13 = 5.43789e-05 &lt;- s26/results/probe/1A13.json :: product_diagnostics/zrank/kl_gibbs_to_product</a:t>
+            </a:r>
+          </a:p>
+          <a:p>
+            <a:r>
+              <a:t>PROD_KL_FIXED = 0.903049 &lt;- s26/results/probe/1A13.json :: arms/fixed_zrank_it50/kl_to_gibbs</a:t>
+            </a:r>
+          </a:p>
+          <a:p>
+            <a:r>
+              <a:t>PROD_KL_IDEAL = 7.23403e-17 &lt;- s26/results/probe/1A13.json :: product_diagnostics/ideal_ladder/kl_gibbs_to_product</a:t>
+            </a:r>
+          </a:p>
+          <a:p>
+            <a:r>
+              <a:t>PROD_KL_RY7 = 5.43621e-05 &lt;- s26/results/probe/1A13.json :: arms/adaptV_lbfgs_zrank_P7/kl_to_gibbs</a:t>
+            </a:r>
+          </a:p>
+          <a:p>
+            <a:r>
+              <a:t>SLOPE_A025_T03 = -0.242884 &lt;- s25/results/q_plateau.json :: results/deployed_a025_T03/log2_slope_per_qubit</a:t>
+            </a:r>
+          </a:p>
+          <a:p>
+            <a:r>
+              <a:t>SLOPE_A1_T03 = -0.310535 &lt;- s25/results/q_plateau.json :: results/deployed_a1_T03/log2_slope_per_qubit</a:t>
+            </a:r>
+          </a:p>
+          <a:p>
+            <a:r>
+              <a:t>SLOPE_LIN = -0.649187 &lt;- s25/results/q_plateau.json :: results/linear_alpha1_T0/log2_slope_per_qubit</a:t>
             </a:r>
           </a:p>
         </p:txBody>
@@ -9650,7 +9816,7 @@
                 </a:solidFill>
                 <a:latin typeface="Calibri"/>
               </a:rPr>
-              <a:t>Direction A: ADAPT-VQE on this Hamiltonian</a:t>
+              <a:t>Direction A: ADAPT-VQE on this Hamiltonian (PENDING)</a:t>
             </a:r>
           </a:p>
         </p:txBody>
@@ -9719,21 +9885,88 @@
                 </a:solidFill>
                 <a:latin typeface="Calibri"/>
               </a:rPr>
-              <a:t>8 / 11    PENDING: s26/PROPOSAL_A.md</a:t>
-            </a:r>
-          </a:p>
-        </p:txBody>
-      </p:sp>
-      <p:sp>
-        <p:nvSpPr>
-          <p:cNvPr id="5" name="TextBox 4"/>
+              <a:t>8 / 11    PENDING: wording and verdict from s26/PROPOSAL_A.md when lane Q posts it; the facts shown are measured (A2 L27, A4 L35; Adversary L45, L47)</a:t>
+            </a:r>
+          </a:p>
+        </p:txBody>
+      </p:sp>
+      <p:sp>
+        <p:nvSpPr>
+          <p:cNvPr id="5" name="Rectangle 4"/>
+          <p:cNvSpPr/>
+          <p:nvPr/>
+        </p:nvSpPr>
+        <p:spPr>
+          <a:xfrm>
+            <a:off x="411480" y="1234439"/>
+            <a:ext cx="6675120" cy="2812048"/>
+          </a:xfrm>
+          <a:prstGeom prst="rect">
+            <a:avLst/>
+          </a:prstGeom>
+          <a:solidFill>
+            <a:srgbClr val="FFFFFF"/>
+          </a:solidFill>
+          <a:ln>
+            <a:noFill/>
+          </a:ln>
+        </p:spPr>
+        <p:style>
+          <a:lnRef idx="1">
+            <a:schemeClr val="accent1"/>
+          </a:lnRef>
+          <a:fillRef idx="3">
+            <a:schemeClr val="accent1"/>
+          </a:fillRef>
+          <a:effectRef idx="2">
+            <a:schemeClr val="accent1"/>
+          </a:effectRef>
+          <a:fontRef idx="minor">
+            <a:schemeClr val="lt1"/>
+          </a:fontRef>
+        </p:style>
+        <p:txBody>
+          <a:bodyPr rtlCol="0" anchor="ctr"/>
+          <a:lstStyle/>
+          <a:p>
+            <a:pPr algn="ctr"/>
+          </a:p>
+        </p:txBody>
+      </p:sp>
+      <p:pic>
+        <p:nvPicPr>
+          <p:cNvPr id="6" name="Picture 5" descr="a4_variance_slopes.png"/>
+          <p:cNvPicPr>
+            <a:picLocks noChangeAspect="1"/>
+          </p:cNvPicPr>
+          <p:nvPr/>
+        </p:nvPicPr>
+        <p:blipFill>
+          <a:blip r:embed="rId2"/>
+          <a:stretch>
+            <a:fillRect/>
+          </a:stretch>
+        </p:blipFill>
+        <p:spPr>
+          <a:xfrm>
+            <a:off x="457200" y="1280160"/>
+            <a:ext cx="6583680" cy="2720608"/>
+          </a:xfrm>
+          <a:prstGeom prst="rect">
+            <a:avLst/>
+          </a:prstGeom>
+        </p:spPr>
+      </p:pic>
+      <p:sp>
+        <p:nvSpPr>
+          <p:cNvPr id="7" name="TextBox 6"/>
           <p:cNvSpPr txBox="1"/>
           <p:nvPr/>
         </p:nvSpPr>
         <p:spPr>
           <a:xfrm>
-            <a:off x="731520" y="2011680"/>
-            <a:ext cx="10698480" cy="2743200"/>
+            <a:off x="502920" y="4114800"/>
+            <a:ext cx="6492240" cy="2286000"/>
           </a:xfrm>
           <a:prstGeom prst="rect">
             <a:avLst/>
@@ -9748,33 +9981,184 @@
           <a:p>
             <a:pPr>
               <a:spcAft>
-                <a:spcPts val="400"/>
-              </a:spcAft>
-            </a:pPr>
-            <a:r>
-              <a:rPr sz="2000" b="0">
+                <a:spcPts val="300"/>
+              </a:spcAft>
+            </a:pPr>
+            <a:r>
+              <a:rPr sz="1100" b="0">
+                <a:solidFill>
+                  <a:srgbClr val="ECECF0"/>
+                </a:solidFill>
+                <a:latin typeface="Calibri"/>
+              </a:rPr>
+              <a:t>• A4 (lane Q's figure, s26/results/q_var.json): grown circuits at alpha = 1 hold 1 to 3 distinct operators (product circuits, per the adapt sets of q_dla.json); their variance does not decay with n (slopes -0.079 / +0.006 at T = 0, +0.035 / -0.008 at T = 0.3) and is 1.6 to 370 x the fixed ansatz's at matched n. A large gradient from a product circuit is not trainability.</a:t>
+            </a:r>
+          </a:p>
+          <a:p>
+            <a:pPr>
+              <a:spcAft>
+                <a:spcPts val="300"/>
+              </a:spcAft>
+            </a:pPr>
+            <a:r>
+              <a:rPr sz="1100" b="0">
+                <a:solidFill>
+                  <a:srgbClr val="ECECF0"/>
+                </a:solidFill>
+                <a:latin typeface="Calibri"/>
+              </a:rPr>
+              <a:t>• the one non-trivial grown family (alpha 0.25, pool L2, 4 to 21 distinct 2-local strings) decays at -0.302 per qubit vs the fixed -0.243; both far from a 2-design's -1; no CI on the difference is on disk (L47)</a:t>
+            </a:r>
+          </a:p>
+        </p:txBody>
+      </p:sp>
+      <p:sp>
+        <p:nvSpPr>
+          <p:cNvPr id="8" name="TextBox 7"/>
+          <p:cNvSpPr txBox="1"/>
+          <p:nvPr/>
+        </p:nvSpPr>
+        <p:spPr>
+          <a:xfrm>
+            <a:off x="7269480" y="1280160"/>
+            <a:ext cx="4526280" cy="5120640"/>
+          </a:xfrm>
+          <a:prstGeom prst="rect">
+            <a:avLst/>
+          </a:prstGeom>
+          <a:noFill/>
+        </p:spPr>
+        <p:txBody>
+          <a:bodyPr wrap="square">
+            <a:spAutoFit/>
+          </a:bodyPr>
+          <a:lstStyle/>
+          <a:p>
+            <a:pPr>
+              <a:spcAft>
+                <a:spcPts val="300"/>
+              </a:spcAft>
+            </a:pPr>
+            <a:r>
+              <a:rPr sz="1150" b="1">
                 <a:solidFill>
                   <a:srgbClr val="F2A93B"/>
                 </a:solidFill>
                 <a:latin typeface="Calibri"/>
               </a:rPr>
-              <a:t>PENDING. This slide is filled from s26/PROPOSAL_A.md when it lands.</a:t>
-            </a:r>
-          </a:p>
-          <a:p>
-            <a:pPr>
-              <a:spcAft>
-                <a:spcPts val="400"/>
-              </a:spcAft>
-            </a:pPr>
-            <a:r>
-              <a:rPr sz="1600" b="0">
+              <a:t>What the proposal says</a:t>
+            </a:r>
+          </a:p>
+          <a:p>
+            <a:pPr>
+              <a:spcAft>
+                <a:spcPts val="300"/>
+              </a:spcAft>
+            </a:pPr>
+            <a:r>
+              <a:rPr sz="1150" b="0">
                 <a:solidFill>
                   <a:srgbClr val="ECECF0"/>
                 </a:solidFill>
                 <a:latin typeface="Calibri"/>
               </a:rPr>
-              <a:t>Until then nothing on it is claimed.</a:t>
+              <a:t>• replace the fixed RY/CNOT ansatz with an adaptively grown one (qubit-ADAPT pools V and L2)</a:t>
+            </a:r>
+          </a:p>
+          <a:p>
+            <a:pPr>
+              <a:spcAft>
+                <a:spcPts val="300"/>
+              </a:spcAft>
+            </a:pPr>
+            <a:r>
+              <a:rPr sz="1150" b="1">
+                <a:solidFill>
+                  <a:srgbClr val="F2A93B"/>
+                </a:solidFill>
+                <a:latin typeface="Calibri"/>
+              </a:rPr>
+              <a:t>A2, final: the algebra offers nothing to grow into</a:t>
+            </a:r>
+          </a:p>
+          <a:p>
+            <a:pPr>
+              <a:spcAft>
+                <a:spcPts val="300"/>
+              </a:spcAft>
+            </a:pPr>
+            <a:r>
+              <a:rPr sz="1150" b="0">
+                <a:solidFill>
+                  <a:srgbClr val="ECECF0"/>
+                </a:solidFill>
+                <a:latin typeface="Calibri"/>
+              </a:rPr>
+              <a:t>• dim(DLA) at n = 7: 7 at depth 1 (abelian), 8,128 from depth 2 = dim so(128) = 8,128; pool V generates 2,080, pool L2 8,128; ADAPT-selected sets: dim 7 at alpha = 1, 1,025 at alpha = 0.25 (L2)</a:t>
+            </a:r>
+          </a:p>
+          <a:p>
+            <a:pPr>
+              <a:spcAft>
+                <a:spcPts val="300"/>
+              </a:spcAft>
+            </a:pPr>
+            <a:r>
+              <a:rPr sz="1150" b="1">
+                <a:solidFill>
+                  <a:srgbClr val="F2A93B"/>
+                </a:solidFill>
+                <a:latin typeface="Calibri"/>
+              </a:rPr>
+              <a:t>The target is a product state</a:t>
+            </a:r>
+          </a:p>
+          <a:p>
+            <a:pPr>
+              <a:spcAft>
+                <a:spcPts val="300"/>
+              </a:spcAft>
+            </a:pPr>
+            <a:r>
+              <a:rPr sz="1150" b="0">
+                <a:solidFill>
+                  <a:srgbClr val="ECECF0"/>
+                </a:solidFill>
+                <a:latin typeface="Calibri"/>
+              </a:rPr>
+              <a:t>• KL(Gibbs || product of its marginals) = 7.2e-17 on the ideal ladder, 5.4e-05 on 1A13; a 7-parameter RY layer reaches the Gibbs state to 5.4e-05 nats, the deployed 21-parameter circuit stops at 0.903</a:t>
+            </a:r>
+          </a:p>
+          <a:p>
+            <a:pPr>
+              <a:spcAft>
+                <a:spcPts val="300"/>
+              </a:spcAft>
+            </a:pPr>
+            <a:r>
+              <a:rPr sz="1150" b="0">
+                <a:solidFill>
+                  <a:srgbClr val="ECECF0"/>
+                </a:solidFill>
+                <a:latin typeface="Calibri"/>
+              </a:rPr>
+              <a:t>• A1, endpoint: running (fixed vs ADAPT-grown, built chain primary); expected null by the set-equality theorem</a:t>
+            </a:r>
+          </a:p>
+          <a:p>
+            <a:pPr>
+              <a:spcAft>
+                <a:spcPts val="300"/>
+              </a:spcAft>
+            </a:pPr>
+            <a:r>
+              <a:rPr sz="1150" b="1">
+                <a:solidFill>
+                  <a:srgbClr val="ECECF0"/>
+                </a:solidFill>
+                <a:latin typeface="Calibri"/>
+              </a:rPr>
+              <a:t>• Verdict: PENDING s26/PROPOSAL_A.md. Nothing here is a width-scaling argument for ADAPT on this Hamiltonian (L35).</a:t>
             </a:r>
           </a:p>
         </p:txBody>

--- a/vqe_research_overview.pptx
+++ b/vqe_research_overview.pptx
@@ -1000,12 +1000,12 @@
           </a:p>
           <a:p>
             <a:r>
-              <a:t>CORPUS_FRAGMENTS = 6003 &lt;- same (LEDGER)</a:t>
-            </a:r>
-          </a:p>
-          <a:p>
-            <a:r>
-              <a:t>CORPUS_PEPTIDES = 787 &lt;- s26/results/p_probe_esm.json (ledger L11: 787 peptides + 6,003 fragments = 6,790 unique training sequences) (LEDGER)</a:t>
+              <a:t>CORPUS_FRAGMENTS = 6003 &lt;- s26/results/p_probe_esm.json :: n_fragments</a:t>
+            </a:r>
+          </a:p>
+          <a:p>
+            <a:r>
+              <a:t>CORPUS_PEPTIDES = 787 &lt;- s26/results/p_probe_esm.json :: n_peptides</a:t>
             </a:r>
           </a:p>
           <a:p>
@@ -1187,12 +1187,12 @@
           </a:p>
           <a:p>
             <a:r>
-              <a:t>CORPUS_FRAGMENTS = 6003 &lt;- same (LEDGER)</a:t>
-            </a:r>
-          </a:p>
-          <a:p>
-            <a:r>
-              <a:t>CORPUS_PEPTIDES = 787 &lt;- s26/results/p_probe_esm.json (ledger L11: 787 peptides + 6,003 fragments = 6,790 unique training sequences) (LEDGER)</a:t>
+              <a:t>CORPUS_FRAGMENTS = 6003 &lt;- s26/results/p_probe_esm.json :: n_fragments</a:t>
+            </a:r>
+          </a:p>
+          <a:p>
+            <a:r>
+              <a:t>CORPUS_PEPTIDES = 787 &lt;- s26/results/p_probe_esm.json :: n_peptides</a:t>
             </a:r>
           </a:p>
           <a:p>

--- a/vqe_research_overview.pptx
+++ b/vqe_research_overview.pptx
@@ -887,13 +887,18 @@
           </a:p>
           <a:p>
             <a:r>
-              <a:t>DRAFT (until the coordinator's verdict entry in `s26/LEDGER.md`): if asked "which would you do first?", the evidence favours direction C in its learn-the-prior form as the accuracy study, because the prior is the only lever the record measured as steep (-2.15 A per unit, `s24/results/priorladder.json`) and every selection, ranking, physics and search lever is closed by measurement; paired with direction A as a scientific study rather than an accuracy study, because on this diagonal Hamiltonian an ADAPT-grown circuit is a product circuit (`s26/results/q_var.json`, L35) and the set-equality theorem bounds any readout by the classical prefix. Direction B as stated cannot be measured on this machine (`s26/results/b1_feasibility.json`).</a:t>
+              <a:t>DRAFT (until the coordinator's entry on all three verdicts; A is REPLACE by L68 / L69, B and C are pending lane P): if asked "which would you do first?", the evidence favours direction C in its learn-the-prior form as the accuracy study, because the prior is the only lever the record measured as steep (-2.15 A per unit, `s24/results/priorladder.json`) and every selection, ranking, physics and search lever is closed by measurement; paired with the trainability paper as the publication, because on this diagonal Hamiltonian the optimum is a product state and an adaptive ansatz confirms it (A1 null at -0.36 x MDE, `s26/results/a1_stats.json`; product circuits, `s26/results/q_dla.json`). Direction A as an accuracy proposal is replaced (L68, L69); direction B as stated cannot be measured on this machine (`s26/results/b1_feasibility.json`).</a:t>
             </a:r>
           </a:p>
           <a:p/>
           <a:p>
             <a:r>
               <a:t>SOURCES (not spoken; token = value &lt;- artefact path [basis]):</a:t>
+            </a:r>
+          </a:p>
+          <a:p>
+            <a:r>
+              <a:t>A1_V_X = -0.364319 &lt;- s26/results/a1_stats.json :: contrasts/'rmsd_q_synth:adaptV_adam_best_zrank_P21-fixed_zrank_it50'/effect_over_mde</a:t>
             </a:r>
           </a:p>
           <a:p>
@@ -2255,7 +2260,7 @@
           </a:p>
           <a:p>
             <a:r>
-              <a:t>PENDING: this slide is a placeholder until lane Q's proposal file lands; every fact on it is measured. Direction A was: replace the fixed ansatz with ADAPT-VQE. Two things are already known. First, the algebra. The fixed ansatz generates the full so(128) at seven qubits from depth two, so ADAPT cannot add expressivity the fixed circuit lacks; the Tang minimal pool generates only 2,080 dimensions of it. Second, the target. At alpha equal to one, the state the optimiser is asked to reach is a product state: the divergence between the Gibbs state and the product of its marginals is 5.4e-05 nats on a real target. A seven-parameter layer of single-qubit rotations reaches it to 5.4e-05 nats; the deployed 21-parameter circuit stops at 0.903. So an ADAPT-grown circuit on this Hamiltonian selects 1 to 3 distinct operators and repeats one single-qubit rotation: it is a product circuit. Its gradient variance does not decay with width, and it is 1.6 to 370 times the fixed ansatz's. That is not trainability; there is nothing to train. The one non-trivial grown family, alpha 0.25 with the two-local pool, decays at -0.302 per qubit against the fixed -0.243; both are far from the minus one of a two-design, and no interval on their difference is on disk. The endpoint experiment is running and I expect a null, because the set-equality theorem bounds every readout by the classical prefix.</a:t>
+              <a:t>We tested letting the circuit grow itself. qubit-ADAPT-VQE starts from one layer of single-qubit rotations and adds, one at a time, whichever operator would lower the objective fastest. We ran it on all 126 development peptides with the deployed objective, seed and readout, and compared the built chains pairwise. The answer is no change: -0.014 to -0.022 angstroms, a quarter to a third of what the comparison can resolve, with fold-clustered intervals straddling zero. All 12 variants point the same way, but they are one observation, not twelve, and none clears its bar; the resolution is 0.06 angstroms. Why? The energy is the same rank ladder on every peptide, and its optimum at the deployed setting is a product state, within 7.9e-04 nats of the product of its marginals on all 126 targets. Seven rotations represent it to 1.5e-04 nats. Offered entangling operators on the 78 targets there, ADAPT's growth stops by its own gradient test on every one, and the operators it adds first lower the objective by at most 1.2e-04. There is nothing to entangle. The deployed 21-parameter circuit stops 0.90 nats short of that optimum, and using the optimum itself moves the structure by +0.0088 angstroms, a tenth of the resolution. Its Lie algebra is already the full real algebra from depth two: shallowness, not structure. So Proposal A is replaced. The adaptive circuit is a correct, tested tool; it confirmed the diagnosis instead of curing it. What we publish is on the next slide.</a:t>
             </a:r>
           </a:p>
           <a:p/>
@@ -2266,7 +2271,7 @@
           </a:p>
           <a:p>
             <a:r>
-              <a:t>PENDING: the wording and verdict come from `s26/PROPOSAL_A.md` (lane Q) when it exists; A1 (fixed vs ADAPT-grown, built chain primary) was at 33 of 126 targets at 19:20 (`s26/STATUS.md`). A2 (L27, Adversary L45 STANDS): dim(DLA) at n = 7 is 7 at depth 1, 8,128 at depth 2 and 8,128 at depth 3 against dim so(128) = 8,128; pool V 2,080, pool L2 8,128; ADAPT-selected sets at alpha = 1 stay abelian (dim 7), at alpha = 0.25 with pool L2 reach 1,025; symbolic closure equals the dense SVD rank on 12/12 cells. A4 (L35, Adversary L47 STANDS WITH CAVEAT): matched-P slopes, log2 Var per qubit, grown V / L2: -0.079 / +0.006 (alpha 1, T 0), +0.035 / -0.008 (alpha 1, T 0.3), -0.246 / -0.302 (alpha 0.25, T 0.3) against the fixed -0.649 / -0.311 / -0.243; grown/fixed variance ratio 1.63 to 370 over 39 matched rows; the alpha = 0.25 L2 family grows 4 to 21 distinct 2-local strings; S25's n = 7 rows reproduce at relative deviation 0.0000. Per L47 the product-circuit reading rests on `s26/results/q_dla.json` (adapt sets), not on `q_var.json`. The product-state target: KL(Gibbs || product of marginals) 7.2e-17 on the ideal ladder and 5.4e-05 on 1A13 (`s26/results/probe/1A13.json`). What A gives Proposal A: no width-scaling argument (L35); on this diagonal, nearly target-independent Hamiltonian the honest form of direction A is ADAPT as a diagnostic, or a Hamiltonian that is not diagonal, which this project does not have.</a:t>
+              <a:t>Verdict REPLACE (`s26/PROPOSAL_A.md`, lane Q; L68; accepted by the coordinator in L69, subject to the Adversary's check of L68): the mechanism is absent, not weak. A1 basis: built chain, `rmsd_q_synth` (the production projection of the weighted average over the 128 candidates) on both sides; the deployed selector's arm is 3.2280 A on that basis against the production top-75 arm 3.2148 A, and the whole quantum synthesis is worth +0.0133 A (0.26 x MDE) against the classical arm, so the resolution is about four times the component's own footprint. Primaries (`s26/results/a1_stats.json`): ADAPT 2-local pool minus fixed -0.0138 (SE 0.0210, MDE 0.0588, -0.23 x, fold CI [-0.0705, +0.0442], 58W/68L, 3/5 folds); ADAPT Tang pool minus fixed -0.0222 (SE 0.0217, MDE 0.0608, -0.36 x, fold CI [-0.0854, +0.0424], 61W/65L). All 12 ADAPT arms (two pools, two optimisers, 7 / 14 / 21 parameters) are between -0.0245 and -0.0128 A at 0.21 to 0.40 x MDE; on the selection readout -0.0478 to -0.0385 A at up to 0.47 x MDE with 45 to 59 exact ties (the shape of S25's headline: a direction the instrument cannot size). The twelve arms are one observation, not twelve: their per-target delta vectors correlate at 0.955 on average (min 0.919; Adversary L70 caveat 1). The 21 parameters are a budget: the Adam primaries realise 21 (repeats of one rotation merge), L-BFGS 7 to 21 (L70 caveat 2). Controls: the exact Gibbs state in place of the circuit +0.0088 (0.11 x) overall, -0.0271 on the 78 alpha = 1 targets where it is the optimum and +0.0671 on the 48 alpha = 0.25 targets where it is not (L70 caveat 3); the matched-entropy random Hamiltonian +0.0337 (0.34 x, fold CI [+0.0122, +0.0581], 5/5 folds). Product-state facts from the 126 per-target records (`s26/results/a1/*.json`, no native): KL(Gibbs || product of marginals) mean 1.4e-04, max 7.9e-04; on the 78 alpha = 1 targets the fixed circuit's KL to Gibbs is 0.9027 (max 0.984; S25's 0.902 reproduced) and the 7-parameter RY layer's 1.5e-04 (max 7.9e-04). Growth under L-BFGS at alpha = 1: stopped by the eps = 1e-3 gradient criterion on 156 of 156 (pool, target) cells; the number of operators added before the stop is 0 on 18 (pool V) and 10 (pool L2) of the 78 targets and at most 11; the free-energy change they produce is a decrease of 1.2e-04 at most (median -9.4e-06). This is the artefact's form of the proposal's "declines them on all 78 targets": the growth is inert, not absent. The A4 figure (slide 8) is lane Q's; the product-circuit reading rests on the adapt sets of `s26/results/q_dla.json` (L47). Slide 9 carries what is published in A's place.</a:t>
             </a:r>
           </a:p>
           <a:p/>
@@ -2277,157 +2282,277 @@
           </a:p>
           <a:p>
             <a:r>
-              <a:t>A4_A1_DISTINCT_MAX = 3 &lt;- s26/results/q_var.json :: results/grown/[alpha=1 cells]/rows[P_matched]/n_distinct_ops (max) (DERIVED)</a:t>
-            </a:r>
-          </a:p>
-          <a:p>
-            <a:r>
-              <a:t>A4_A1_DISTINCT_MIN = 1 &lt;- s26/results/q_var.json :: results/grown/[alpha=1 cells]/rows[P_matched]/n_distinct_ops (min) (DERIVED)</a:t>
-            </a:r>
-          </a:p>
-          <a:p>
-            <a:r>
-              <a:t>A4_FIXED_A025_T03 = -0.242884 &lt;- s26/results/q_var.json :: results/fixed/deployed_a025_T03/log2_slope_per_qubit</a:t>
-            </a:r>
-          </a:p>
-          <a:p>
-            <a:r>
-              <a:t>A4_L2_A025_DISTINCT_MAX = 21 &lt;- s26/results/q_var.json :: results/grown/'L2:adam_best:deployed_a025_T03'/rows[P_matched]/n_distinct_ops (max) (DERIVED)</a:t>
-            </a:r>
-          </a:p>
-          <a:p>
-            <a:r>
-              <a:t>A4_L2_A025_DISTINCT_MIN = 4 &lt;- s26/results/q_var.json :: results/grown/'L2:adam_best:deployed_a025_T03'/rows[P_matched]/n_distinct_ops (min) (DERIVED)</a:t>
-            </a:r>
-          </a:p>
-          <a:p>
-            <a:r>
-              <a:t>A4_L2_A025_T03 = -0.302361 &lt;- s26/results/q_var.json :: results/grown/'L2:adam_best:deployed_a025_T03'/rows[P_matched] (DERIVED)</a:t>
-            </a:r>
-          </a:p>
-          <a:p>
-            <a:r>
-              <a:t>A4_L2_A1_T03 = -0.00752101 &lt;- s26/results/q_var.json :: results/grown/'L2:adam_best:deployed_a1_T03'/rows[P_matched] (DERIVED)</a:t>
-            </a:r>
-          </a:p>
-          <a:p>
-            <a:r>
-              <a:t>A4_L2_LIN = 0.00620042 &lt;- s26/results/q_var.json :: results/grown/'L2:adam_best:linear_alpha1_T0'/rows[P_matched] (DERIVED)</a:t>
-            </a:r>
-          </a:p>
-          <a:p>
-            <a:r>
-              <a:t>A4_N_MATCHED = 39 &lt;- s26/results/q_var.json :: number of matched rows (DERIVED)</a:t>
-            </a:r>
-          </a:p>
-          <a:p>
-            <a:r>
-              <a:t>A4_RATIO_MAX = 370.47 &lt;- s26/results/q_var.json :: the same, max (DERIVED)</a:t>
-            </a:r>
-          </a:p>
-          <a:p>
-            <a:r>
-              <a:t>A4_RATIO_MIN = 1.62806 &lt;- s26/results/q_var.json :: grown var_g0 / fixed var_g0 at matched (cell, n), min over the matched rows (DERIVED)</a:t>
-            </a:r>
-          </a:p>
-          <a:p>
-            <a:r>
-              <a:t>A4_REPRO_WORST_REL = 0 &lt;- s26/results/q_var.json :: results/reproduction/worst_rel</a:t>
-            </a:r>
-          </a:p>
-          <a:p>
-            <a:r>
-              <a:t>A4_V_A025_T03 = -0.245975 &lt;- s26/results/q_var.json :: results/grown/'V:adam_best:deployed_a025_T03'/rows[P_matched] (DERIVED)</a:t>
-            </a:r>
-          </a:p>
-          <a:p>
-            <a:r>
-              <a:t>A4_V_A1_T03 = 0.0346107 &lt;- s26/results/q_var.json :: results/grown/'V:adam_best:deployed_a1_T03'/rows[P_matched] (DERIVED)</a:t>
-            </a:r>
-          </a:p>
-          <a:p>
-            <a:r>
-              <a:t>A4_V_LIN = -0.0792065 &lt;- s26/results/q_var.json :: results/grown/'V:adam_best:linear_alpha1_T0'/rows[P_matched] (log2 slope) (DERIVED)</a:t>
-            </a:r>
-          </a:p>
-          <a:p>
-            <a:r>
-              <a:t>ADAPT_A025_L2_DIM = 1025 &lt;- s26/results/q_dla.json :: results/adapt_sets/[alpha=0.25, pool L2]/ladder[-1]/dim (max) (DERIVED)</a:t>
-            </a:r>
-          </a:p>
-          <a:p>
-            <a:r>
-              <a:t>ADAPT_A1_DIM = 7 &lt;- s26/results/q_dla.json :: results/adapt_sets/[alpha=1]/ladder[-1]/dim (max over pools and optimisers) (DERIVED)</a:t>
-            </a:r>
-          </a:p>
-          <a:p>
-            <a:r>
-              <a:t>DLA_N7_L1 = 7 &lt;- s26/results/q_dla.json :: results/fixed/n7_L1/dim</a:t>
-            </a:r>
-          </a:p>
-          <a:p>
-            <a:r>
-              <a:t>DLA_N7_L2 = 8128 &lt;- s26/results/q_dla.json :: results/fixed/n7_L2/dim</a:t>
-            </a:r>
-          </a:p>
-          <a:p>
-            <a:r>
-              <a:t>DLA_N7_L3 = 8128 &lt;- s26/results/q_dla.json :: results/fixed/n7_L3/dim</a:t>
-            </a:r>
-          </a:p>
-          <a:p>
-            <a:r>
-              <a:t>DLA_NUMERIC_AGREE = 12/12 &lt;- s26/results/q_dla.json :: results/numeric/*/agree (DERIVED)</a:t>
-            </a:r>
-          </a:p>
-          <a:p>
-            <a:r>
-              <a:t>DLA_POOL_L2_N7 = 8128 &lt;- s26/results/q_dla.json :: results/pools/L2_n7/dim</a:t>
-            </a:r>
-          </a:p>
-          <a:p>
-            <a:r>
-              <a:t>DLA_POOL_V_N7 = 2080 &lt;- s26/results/q_dla.json :: results/pools/V_n7/dim</a:t>
-            </a:r>
-          </a:p>
-          <a:p>
-            <a:r>
-              <a:t>DLA_SO128 = 8128 &lt;- s26/results/q_dla.json :: results/fixed/n7_L3/dim_so</a:t>
-            </a:r>
-          </a:p>
-          <a:p>
-            <a:r>
-              <a:t>PROD_KL_1A13 = 5.43789e-05 &lt;- s26/results/probe/1A13.json :: product_diagnostics/zrank/kl_gibbs_to_product</a:t>
-            </a:r>
-          </a:p>
-          <a:p>
-            <a:r>
-              <a:t>PROD_KL_FIXED = 0.903049 &lt;- s26/results/probe/1A13.json :: arms/fixed_zrank_it50/kl_to_gibbs</a:t>
-            </a:r>
-          </a:p>
-          <a:p>
-            <a:r>
-              <a:t>PROD_KL_IDEAL = 7.23403e-17 &lt;- s26/results/probe/1A13.json :: product_diagnostics/ideal_ladder/kl_gibbs_to_product</a:t>
-            </a:r>
-          </a:p>
-          <a:p>
-            <a:r>
-              <a:t>PROD_KL_RY7 = 5.43621e-05 &lt;- s26/results/probe/1A13.json :: arms/adaptV_lbfgs_zrank_P7/kl_to_gibbs</a:t>
-            </a:r>
-          </a:p>
-          <a:p>
-            <a:r>
-              <a:t>SLOPE_A025_T03 = -0.242884 &lt;- s25/results/q_plateau.json :: results/deployed_a025_T03/log2_slope_per_qubit</a:t>
-            </a:r>
-          </a:p>
-          <a:p>
-            <a:r>
-              <a:t>SLOPE_A1_T03 = -0.310535 &lt;- s25/results/q_plateau.json :: results/deployed_a1_T03/log2_slope_per_qubit</a:t>
-            </a:r>
-          </a:p>
-          <a:p>
-            <a:r>
-              <a:t>SLOPE_LIN = -0.649187 &lt;- s25/results/q_plateau.json :: results/linear_alpha1_T0/log2_slope_per_qubit</a:t>
+              <a:t>A1_ARMS_EFF_MAX = -0.0127684 &lt;- s26/results/a1_stats.json :: max effect over the 12 ADAPT arms (built chain) (DERIVED)</a:t>
+            </a:r>
+          </a:p>
+          <a:p>
+            <a:r>
+              <a:t>A1_ARMS_EFF_MIN = -0.0244505 &lt;- s26/results/a1_stats.json :: min effect over the 12 ADAPT arms (built chain) (DERIVED)</a:t>
+            </a:r>
+          </a:p>
+          <a:p>
+            <a:r>
+              <a:t>A1_ARMS_X_MAX = 0.398582 &lt;- s26/results/a1_stats.json :: max |effect/MDE| over the 12 ADAPT arms (DERIVED)</a:t>
+            </a:r>
+          </a:p>
+          <a:p>
+            <a:r>
+              <a:t>A1_ARMS_X_MIN = 0.207095 &lt;- s26/results/a1_stats.json :: min |effect/MDE| over the 12 ADAPT arms (DERIVED)</a:t>
+            </a:r>
+          </a:p>
+          <a:p>
+            <a:r>
+              <a:t>A1_ARM_CORR_MEAN = 0.955235 &lt;- s26/results/a1/*.json :: label/arms/adapt*/rmsd_q_synth minus fixed, per-target delta vectors: mean pairwise correlation over the 12 arms (DERIVED)</a:t>
+            </a:r>
+          </a:p>
+          <a:p>
+            <a:r>
+              <a:t>A1_ARM_CORR_MIN = 0.918699 &lt;- s26/results/a1/*.json :: the same, min pairwise correlation (DERIVED)</a:t>
+            </a:r>
+          </a:p>
+          <a:p>
+            <a:r>
+              <a:t>A1_FIXED_MEAN = 3.22805 &lt;- s26/results/a1_stats.json :: means/fixed_zrank_it50/rmsd_q_synth [built_chain (rmsd_q_synth)]</a:t>
+            </a:r>
+          </a:p>
+          <a:p>
+            <a:r>
+              <a:t>A1_GIBBS_ALPHA025 = 0.067115 &lt;- s26/results/a1/*.json :: the same over the 48 alpha = 0.25 targets (the Gibbs state is not the CVaR optimum there) [built_chain (rmsd_q_synth)] (DERIVED)</a:t>
+            </a:r>
+          </a:p>
+          <a:p>
+            <a:r>
+              <a:t>A1_GIBBS_ALPHA1 = -0.0270548 &lt;- s26/results/a1/*.json :: label/arms/gibbs_T minus fixed_zrank_it50, rmsd_q_synth, mean over the 78 alpha = 1 targets [built_chain (rmsd_q_synth)] (DERIVED)</a:t>
+            </a:r>
+          </a:p>
+          <a:p>
+            <a:r>
+              <a:t>A1_GIBBS_EFFECT = 0.00881939 &lt;- s26/results/a1_stats.json :: contrasts/'rmsd_q_synth:gibbs_T-fixed_zrank_it50'/effect [built_chain (rmsd_q_synth)]</a:t>
+            </a:r>
+          </a:p>
+          <a:p>
+            <a:r>
+              <a:t>A1_GIBBS_X = 0.108017 &lt;- s26/results/a1_stats.json :: contrasts/'rmsd_q_synth:gibbs_T-fixed_zrank_it50'/effect_over_mde</a:t>
+            </a:r>
+          </a:p>
+          <a:p>
+            <a:r>
+              <a:t>A1_KL_FIXED_MAX = 0.983553 &lt;- s26/results/a1/*.json :: arms/fixed_zrank_it50/kl_to_gibbs (max over the 78) (DERIVED)</a:t>
+            </a:r>
+          </a:p>
+          <a:p>
+            <a:r>
+              <a:t>A1_KL_FIXED_MEAN = 0.902729 &lt;- s26/results/a1/*.json :: arms/fixed_zrank_it50/kl_to_gibbs (mean over the 78 alpha = 1 targets) (DERIVED)</a:t>
+            </a:r>
+          </a:p>
+          <a:p>
+            <a:r>
+              <a:t>A1_KL_PRODUCT_MAX = 0.000790053 &lt;- s26/results/a1/*.json :: product_diagnostics/zrank/kl_gibbs_to_product (max over 126) (DERIVED)</a:t>
+            </a:r>
+          </a:p>
+          <a:p>
+            <a:r>
+              <a:t>A1_KL_PRODUCT_MEAN = 0.000139901 &lt;- s26/results/a1/*.json :: product_diagnostics/zrank/kl_gibbs_to_product (mean over 126) (DERIVED)</a:t>
+            </a:r>
+          </a:p>
+          <a:p>
+            <a:r>
+              <a:t>A1_KL_RY7_MAX = 0.000792776 &lt;- s26/results/a1/*.json :: arms/adaptV_lbfgs_zrank_P7/kl_to_gibbs (max over the 78) (DERIVED)</a:t>
+            </a:r>
+          </a:p>
+          <a:p>
+            <a:r>
+              <a:t>A1_KL_RY7_MEAN = 0.000151694 &lt;- s26/results/a1/*.json :: arms/adaptV_lbfgs_zrank_P7/kl_to_gibbs (mean over the 78) (DERIVED)</a:t>
+            </a:r>
+          </a:p>
+          <a:p>
+            <a:r>
+              <a:t>A1_L2_CI = [-0.0705134071560539, 0.044153798708205086] &lt;- s26/results/a1_stats.json :: contrasts/'rmsd_q_synth:adaptL2_adam_best_zrank_P21-fixed_zrank_it50'/ci95_fold</a:t>
+            </a:r>
+          </a:p>
+          <a:p>
+            <a:r>
+              <a:t>A1_L2_EFFECT = -0.013804 &lt;- s26/results/a1_stats.json :: contrasts/'rmsd_q_synth:adaptL2_adam_best_zrank_P21-fixed_zrank_it50'/effect [built_chain (rmsd_q_synth: the production projection of the weighted average, both sides)]</a:t>
+            </a:r>
+          </a:p>
+          <a:p>
+            <a:r>
+              <a:t>A1_L2_FOLDS = 3 &lt;- s26/results/a1_stats.json :: contrasts/'rmsd_q_synth:adaptL2_adam_best_zrank_P21-fixed_zrank_it50'/folds_same_sign</a:t>
+            </a:r>
+          </a:p>
+          <a:p>
+            <a:r>
+              <a:t>A1_L2_L = 68 &lt;- s26/results/a1_stats.json :: contrasts/'rmsd_q_synth:adaptL2_adam_best_zrank_P21-fixed_zrank_it50'/n_worse</a:t>
+            </a:r>
+          </a:p>
+          <a:p>
+            <a:r>
+              <a:t>A1_L2_MDE = 0.0587997 &lt;- s26/results/a1_stats.json :: contrasts/'rmsd_q_synth:adaptL2_adam_best_zrank_P21-fixed_zrank_it50'/mde</a:t>
+            </a:r>
+          </a:p>
+          <a:p>
+            <a:r>
+              <a:t>A1_L2_SE = 0.0209879 &lt;- s26/results/a1_stats.json :: contrasts/'rmsd_q_synth:adaptL2_adam_best_zrank_P21-fixed_zrank_it50'/se</a:t>
+            </a:r>
+          </a:p>
+          <a:p>
+            <a:r>
+              <a:t>A1_L2_W = 58 &lt;- s26/results/a1_stats.json :: contrasts/'rmsd_q_synth:adaptL2_adam_best_zrank_P21-fixed_zrank_it50'/n_better</a:t>
+            </a:r>
+          </a:p>
+          <a:p>
+            <a:r>
+              <a:t>A1_L2_X = -0.234763 &lt;- s26/results/a1_stats.json :: contrasts/'rmsd_q_synth:adaptL2_adam_best_zrank_P21-fixed_zrank_it50'/effect_over_mde</a:t>
+            </a:r>
+          </a:p>
+          <a:p>
+            <a:r>
+              <a:t>A1_LBFGS_DF_ABSMAX = 0.000123282 &lt;- s26/results/a1/*.json :: adapt/{V,L2}_lbfgs_zrank/trace: |F(final) - F(P = 7)|, max over 2 x 78 (DERIVED)</a:t>
+            </a:r>
+          </a:p>
+          <a:p>
+            <a:r>
+              <a:t>A1_LBFGS_DF_MEDIAN = -9.44504e-06 &lt;- s26/results/a1/*.json :: the same, median (DERIVED)</a:t>
+            </a:r>
+          </a:p>
+          <a:p>
+            <a:r>
+              <a:t>A1_LBFGS_MAX_OPS = 11 &lt;- s26/results/a1/*.json :: adapt/{V,L2}_lbfgs_zrank/sequence length (max over 2 x 78) (DERIVED)</a:t>
+            </a:r>
+          </a:p>
+          <a:p>
+            <a:r>
+              <a:t>A1_LBFGS_STOP_EPS = 156 &lt;- s26/results/a1/*.json :: adapt/{V,L2}_lbfgs_zrank/stopped == 'eps' (count over 2 x 78) (DERIVED)</a:t>
+            </a:r>
+          </a:p>
+          <a:p>
+            <a:r>
+              <a:t>A1_LBFGS_ZERO_OPS_L2 = 10 &lt;- s26/results/a1/*.json :: adapt/L2_lbfgs_zrank/sequence empty (count over 78) (DERIVED)</a:t>
+            </a:r>
+          </a:p>
+          <a:p>
+            <a:r>
+              <a:t>A1_LBFGS_ZERO_OPS_V = 18 &lt;- s26/results/a1/*.json :: adapt/V_lbfgs_zrank/sequence empty (count over 78) (DERIVED)</a:t>
+            </a:r>
+          </a:p>
+          <a:p>
+            <a:r>
+              <a:t>A1_N = 126 &lt;- s26/results/a1_stats.json :: n</a:t>
+            </a:r>
+          </a:p>
+          <a:p>
+            <a:r>
+              <a:t>A1_N_ALPHA025 = 48 &lt;- s26/results/a1/*.json :: alpha == 0.25 (count) (DERIVED)</a:t>
+            </a:r>
+          </a:p>
+          <a:p>
+            <a:r>
+              <a:t>A1_N_ALPHA1 = 78 &lt;- s26/results/a1/*.json :: alpha == 1.0 (count) (DERIVED)</a:t>
+            </a:r>
+          </a:p>
+          <a:p>
+            <a:r>
+              <a:t>A1_N_ARMS = 12 &lt;- s26/results/a1_stats.json :: contrasts/'rmsd_q_synth:adapt*' (count) (DERIVED)</a:t>
+            </a:r>
+          </a:p>
+          <a:p>
+            <a:r>
+              <a:t>A1_N_RECORDS = 126 &lt;- s26/results/a1/&lt;pdb&gt;.json (count) (DERIVED)</a:t>
+            </a:r>
+          </a:p>
+          <a:p>
+            <a:r>
+              <a:t>A1_P21_ADAM_MIN = 21 &lt;- s26/results/a1/*.json :: arms/adapt*_adam_best_zrank_P21/P_actual (min) (DERIVED)</a:t>
+            </a:r>
+          </a:p>
+          <a:p>
+            <a:r>
+              <a:t>A1_P21_LBFGS_MAX = 21 &lt;- s26/results/a1/*.json :: arms/adapt*_lbfgs_zrank_P21/P_actual (max) (DERIVED)</a:t>
+            </a:r>
+          </a:p>
+          <a:p>
+            <a:r>
+              <a:t>A1_P21_LBFGS_MIN = 7 &lt;- s26/results/a1/*.json :: arms/adapt*_lbfgs_zrank_P21/P_actual (min) (DERIVED)</a:t>
+            </a:r>
+          </a:p>
+          <a:p>
+            <a:r>
+              <a:t>A1_RANDH_CI = [0.01224294278123844, 0.05814894455848459] &lt;- s26/results/a1_stats.json :: contrasts/'rmsd_q_synth:randH_adaptL2-fixed_zrank_it50'/ci95_fold</a:t>
+            </a:r>
+          </a:p>
+          <a:p>
+            <a:r>
+              <a:t>A1_RANDH_EFFECT = 0.0337001 &lt;- s26/results/a1_stats.json :: contrasts/'rmsd_q_synth:randH_adaptL2-fixed_zrank_it50'/effect [built_chain (rmsd_q_synth)]</a:t>
+            </a:r>
+          </a:p>
+          <a:p>
+            <a:r>
+              <a:t>A1_RANDH_X = 0.343232 &lt;- s26/results/a1_stats.json :: contrasts/'rmsd_q_synth:randH_adaptL2-fixed_zrank_it50'/effect_over_mde</a:t>
+            </a:r>
+          </a:p>
+          <a:p>
+            <a:r>
+              <a:t>A1_SEL_EFF_MAX = -0.0384868 &lt;- s26/results/a1_stats.json :: max effect over the 12 ADAPT arms (selection basis) [s8_selection] (DERIVED)</a:t>
+            </a:r>
+          </a:p>
+          <a:p>
+            <a:r>
+              <a:t>A1_SEL_EFF_MIN = -0.0478116 &lt;- s26/results/a1_stats.json :: min effect over the 12 ADAPT arms (selection basis) [s8_selection] (DERIVED)</a:t>
+            </a:r>
+          </a:p>
+          <a:p>
+            <a:r>
+              <a:t>A1_SEL_X_MAX = 0.473801 &lt;- s26/results/a1_stats.json :: max |effect/MDE| over the 12 ADAPT arms (selection) (DERIVED)</a:t>
+            </a:r>
+          </a:p>
+          <a:p>
+            <a:r>
+              <a:t>A1_V_CI = [-0.08536809287906452, 0.04242081658590607] &lt;- s26/results/a1_stats.json :: contrasts/'rmsd_q_synth:adaptV_adam_best_zrank_P21-fixed_zrank_it50'/ci95_fold</a:t>
+            </a:r>
+          </a:p>
+          <a:p>
+            <a:r>
+              <a:t>A1_V_EFFECT = -0.0221533 &lt;- s26/results/a1_stats.json :: contrasts/'rmsd_q_synth:adaptV_adam_best_zrank_P21-fixed_zrank_it50'/effect [built_chain (rmsd_q_synth: the production projection of the weighted average, both sides)]</a:t>
+            </a:r>
+          </a:p>
+          <a:p>
+            <a:r>
+              <a:t>A1_V_L = 65 &lt;- s26/results/a1_stats.json :: contrasts/'rmsd_q_synth:adaptV_adam_best_zrank_P21-fixed_zrank_it50'/n_worse</a:t>
+            </a:r>
+          </a:p>
+          <a:p>
+            <a:r>
+              <a:t>A1_V_MDE = 0.0608073 &lt;- s26/results/a1_stats.json :: contrasts/'rmsd_q_synth:adaptV_adam_best_zrank_P21-fixed_zrank_it50'/mde</a:t>
+            </a:r>
+          </a:p>
+          <a:p>
+            <a:r>
+              <a:t>A1_V_SE = 0.0217045 &lt;- s26/results/a1_stats.json :: contrasts/'rmsd_q_synth:adaptV_adam_best_zrank_P21-fixed_zrank_it50'/se</a:t>
+            </a:r>
+          </a:p>
+          <a:p>
+            <a:r>
+              <a:t>A1_V_W = 61 &lt;- s26/results/a1_stats.json :: contrasts/'rmsd_q_synth:adaptV_adam_best_zrank_P21-fixed_zrank_it50'/n_better</a:t>
+            </a:r>
+          </a:p>
+          <a:p>
+            <a:r>
+              <a:t>A1_V_X = -0.364319 &lt;- s26/results/a1_stats.json :: contrasts/'rmsd_q_synth:adaptV_adam_best_zrank_P21-fixed_zrank_it50'/effect_over_mde</a:t>
+            </a:r>
+          </a:p>
+          <a:p>
+            <a:r>
+              <a:t>ARM_MEAN = 3.21477 &lt;- bench_results/baseline_tuning126.json :: science/rmsd_arm/mean [built_chain]</a:t>
+            </a:r>
+          </a:p>
+          <a:p>
+            <a:r>
+              <a:t>QSYNTH_VS_ARM = 0.0132835 &lt;- s26/results/q_mde_reference.json :: contrasts/'rmsd_q_synth-rmsd_arm'/effect [built_chain]</a:t>
+            </a:r>
+          </a:p>
+          <a:p>
+            <a:r>
+              <a:t>QSYNTH_VS_ARM_X = 0.261493 &lt;- s26/results/q_mde_reference.json :: contrasts/'rmsd_q_synth-rmsd_arm'/effect_over_mde</a:t>
             </a:r>
           </a:p>
         </p:txBody>
@@ -2502,7 +2627,7 @@
           </a:p>
           <a:p>
             <a:r>
-              <a:t>Direction B was: use a large pretrained folding model as the distance prior. Step one asked whether such a model can run here. The answer is no, on three independent grounds. The checkpoints are not on disk and total 8.45 gigabytes. The code needs two packages that are absent, and one of them wants Python 3.9 or lower; this box runs 3.13 on a CPU. And the model needs at least 8.76 gigabytes resident against 4.4 gigabytes of headroom; even at half precision everywhere it is 7.4. Two feasible-scale checks are pending: the contact head alone as a prior input, and an 8-million-parameter language model against the 650-million one. A third asks whether the targets where the pipeline beats a sequence-only predictor form a set I can recognise without the native. The pipeline wins there by 0.56 angstroms, 89 targets to 37. If those checks are null, B is replaced by a paper. The paper says what a force field's Pauli spectrum does and does not predict. Chain geometry fixes which residues a distance can depend on; that is an exact theorem. That fixes the energy's Pauli spectrum, once the raw force field's clash spike is conditioned away. The spectrum times the circuit's own kernel predicts the measured gradient variance with no free parameter: the median ratio is 0.997 over 104 cells. This sprint added the algebra and the product-circuit result. The paper will not claim an advantage, and it will not call a small gradient a plateau.</a:t>
+              <a:t>Direction B was: use a large pretrained folding model as the distance prior. Step one asked whether such a model can run here. The answer is no, on three independent grounds. The checkpoints are not on disk and total 8.45 gigabytes. The code needs two packages that are absent, and one of them wants Python 3.9 or lower; this box runs 3.13 on a CPU. And the model needs at least 8.76 gigabytes resident against 4.4 gigabytes of headroom; even at half precision everywhere it is 7.4. Two feasible-scale checks are pending: the contact head alone, and an 8-million-parameter language model against the 650-million one. A third asks whether the targets where the pipeline beats a sequence-only predictor are recognisable without the native. The pipeline wins there by 0.56 angstroms, 89 targets to 37. If those checks are null, B is replaced by the same paper that replaces A. The paper says what a force field's Pauli spectrum does and does not predict. Chain geometry fixes which residues a distance can depend on; that is an exact theorem. That fixes the energy's Pauli spectrum, once the raw force field's clash spike is conditioned away. The spectrum times the circuit's own kernel predicts the measured gradient variance with no free parameter: the median ratio is 0.997 over 104 cells. This sprint added the algebra, the product-state target and the ADAPT null. The paper will not claim an advantage, and it will not call a small gradient a plateau.</a:t>
             </a:r>
           </a:p>
           <a:p/>
@@ -9816,7 +9941,7 @@
                 </a:solidFill>
                 <a:latin typeface="Calibri"/>
               </a:rPr>
-              <a:t>Direction A: ADAPT-VQE on this Hamiltonian (PENDING)</a:t>
+              <a:t>Direction A: let the circuit grow (qubit-ADAPT-VQE). Verdict: REPLACE</a:t>
             </a:r>
           </a:p>
         </p:txBody>
@@ -9885,7 +10010,7 @@
                 </a:solidFill>
                 <a:latin typeface="Calibri"/>
               </a:rPr>
-              <a:t>8 / 11    PENDING: wording and verdict from s26/PROPOSAL_A.md when lane Q posts it; the facts shown are measured (A2 L27, A4 L35; Adversary L45, L47)</a:t>
+              <a:t>8 / 11    from s26/PROPOSAL_A.md (lane Q; L68, accepted L69); A1 basis: built chain, rmsd_q_synth on both sides; A4 figure: lane Q, s26/results/q_var.json</a:t>
             </a:r>
           </a:p>
         </p:txBody>
@@ -9899,7 +10024,7 @@
         <p:spPr>
           <a:xfrm>
             <a:off x="411480" y="1234439"/>
-            <a:ext cx="6675120" cy="2812048"/>
+            <a:ext cx="6397871" cy="2697480"/>
           </a:xfrm>
           <a:prstGeom prst="rect">
             <a:avLst/>
@@ -9950,7 +10075,7 @@
         <p:spPr>
           <a:xfrm>
             <a:off x="457200" y="1280160"/>
-            <a:ext cx="6583680" cy="2720608"/>
+            <a:ext cx="6306431" cy="2606040"/>
           </a:xfrm>
           <a:prstGeom prst="rect">
             <a:avLst/>
@@ -9965,8 +10090,8 @@
         </p:nvSpPr>
         <p:spPr>
           <a:xfrm>
-            <a:off x="502920" y="4114800"/>
-            <a:ext cx="6492240" cy="2286000"/>
+            <a:off x="502920" y="3977639"/>
+            <a:ext cx="6263640" cy="2423160"/>
           </a:xfrm>
           <a:prstGeom prst="rect">
             <a:avLst/>
@@ -9981,7 +10106,23 @@
           <a:p>
             <a:pPr>
               <a:spcAft>
-                <a:spcPts val="300"/>
+                <a:spcPts val="200"/>
+              </a:spcAft>
+            </a:pPr>
+            <a:r>
+              <a:rPr sz="1100" b="1">
+                <a:solidFill>
+                  <a:srgbClr val="F2A93B"/>
+                </a:solidFill>
+                <a:latin typeface="Calibri"/>
+              </a:rPr>
+              <a:t>A1, the endpoint: ADAPT under the same 21-parameter budget (realised 21 by the Adam primaries, 7 to 21 by L-BFGS) vs the deployed fixed circuit, paired on 126 targets</a:t>
+            </a:r>
+          </a:p>
+          <a:p>
+            <a:pPr>
+              <a:spcAft>
+                <a:spcPts val="200"/>
               </a:spcAft>
             </a:pPr>
             <a:r>
@@ -9991,13 +10132,13 @@
                 </a:solidFill>
                 <a:latin typeface="Calibri"/>
               </a:rPr>
-              <a:t>• A4 (lane Q's figure, s26/results/q_var.json): grown circuits at alpha = 1 hold 1 to 3 distinct operators (product circuits, per the adapt sets of q_dla.json); their variance does not decay with n (slopes -0.079 / +0.006 at T = 0, +0.035 / -0.008 at T = 0.3) and is 1.6 to 370 x the fixed ansatz's at matched n. A large gradient from a product circuit is not trainability.</a:t>
-            </a:r>
-          </a:p>
-          <a:p>
-            <a:pPr>
-              <a:spcAft>
-                <a:spcPts val="300"/>
+              <a:t>• 2-local pool: -0.0138 A, SE 0.0210, MDE 0.0588, -0.23 x MDE, fold CI [-0.071, +0.044], 58W/68L</a:t>
+            </a:r>
+          </a:p>
+          <a:p>
+            <a:pPr>
+              <a:spcAft>
+                <a:spcPts val="200"/>
               </a:spcAft>
             </a:pPr>
             <a:r>
@@ -10007,7 +10148,39 @@
                 </a:solidFill>
                 <a:latin typeface="Calibri"/>
               </a:rPr>
-              <a:t>• the one non-trivial grown family (alpha 0.25, pool L2, 4 to 21 distinct 2-local strings) decays at -0.302 per qubit vs the fixed -0.243; both far from a 2-design's -1; no CI on the difference is on disk (L47)</a:t>
+              <a:t>• Tang pool: -0.0222 A, SE 0.0217, MDE 0.0608, -0.36 x MDE, fold CI [-0.085, +0.042], 61W/65L</a:t>
+            </a:r>
+          </a:p>
+          <a:p>
+            <a:pPr>
+              <a:spcAft>
+                <a:spcPts val="200"/>
+              </a:spcAft>
+            </a:pPr>
+            <a:r>
+              <a:rPr sz="1100" b="0">
+                <a:solidFill>
+                  <a:srgbClr val="ECECF0"/>
+                </a:solidFill>
+                <a:latin typeface="Calibri"/>
+              </a:rPr>
+              <a:t>• NOT MEASURED: null at the registered threshold, resolution 0.06 A; all 12 ADAPT arms between -0.024 and -0.013 A at 0.21 to 0.40 x MDE, but one observation, not twelve (their per-target deltas correlate at 0.955; L70)</a:t>
+            </a:r>
+          </a:p>
+          <a:p>
+            <a:pPr>
+              <a:spcAft>
+                <a:spcPts val="200"/>
+              </a:spcAft>
+            </a:pPr>
+            <a:r>
+              <a:rPr sz="1100" b="0">
+                <a:solidFill>
+                  <a:srgbClr val="ECECF0"/>
+                </a:solidFill>
+                <a:latin typeface="Calibri"/>
+              </a:rPr>
+              <a:t>• the exact Gibbs state in place of the circuit: +0.0088 A (0.11 x) overall; -0.0271 on the 78 alpha = 1 targets where it is the optimum, +0.0671 on the 48 alpha = 0.25 targets where it is not (L70)</a:t>
             </a:r>
           </a:p>
         </p:txBody>
@@ -10020,8 +10193,8 @@
         </p:nvSpPr>
         <p:spPr>
           <a:xfrm>
-            <a:off x="7269480" y="1280160"/>
-            <a:ext cx="4526280" cy="5120640"/>
+            <a:off x="6995160" y="1280160"/>
+            <a:ext cx="4800600" cy="5120640"/>
           </a:xfrm>
           <a:prstGeom prst="rect">
             <a:avLst/>
@@ -10040,7 +10213,7 @@
               </a:spcAft>
             </a:pPr>
             <a:r>
-              <a:rPr sz="1150" b="1">
+              <a:rPr sz="1100" b="1">
                 <a:solidFill>
                   <a:srgbClr val="F2A93B"/>
                 </a:solidFill>
@@ -10056,13 +10229,13 @@
               </a:spcAft>
             </a:pPr>
             <a:r>
-              <a:rPr sz="1150" b="0">
+              <a:rPr sz="1100" b="0">
                 <a:solidFill>
                   <a:srgbClr val="ECECF0"/>
                 </a:solidFill>
                 <a:latin typeface="Calibri"/>
               </a:rPr>
-              <a:t>• replace the fixed RY/CNOT ansatz with an adaptively grown one (qubit-ADAPT pools V and L2)</a:t>
+              <a:t>• grow the ansatz one operator at a time on the same CVaR free energy (qubit-ADAPT, pools V and L2); a problem-shaped circuit should represent the trained state better, and a better state a better structure</a:t>
             </a:r>
           </a:p>
           <a:p>
@@ -10072,13 +10245,13 @@
               </a:spcAft>
             </a:pPr>
             <a:r>
-              <a:rPr sz="1150" b="1">
+              <a:rPr sz="1100" b="1">
                 <a:solidFill>
                   <a:srgbClr val="F2A93B"/>
                 </a:solidFill>
                 <a:latin typeface="Calibri"/>
               </a:rPr>
-              <a:t>A2, final: the algebra offers nothing to grow into</a:t>
+              <a:t>What we learned by letting it grow (the diagnosis)</a:t>
             </a:r>
           </a:p>
           <a:p>
@@ -10088,13 +10261,13 @@
               </a:spcAft>
             </a:pPr>
             <a:r>
-              <a:rPr sz="1150" b="0">
+              <a:rPr sz="1100" b="0">
                 <a:solidFill>
                   <a:srgbClr val="ECECF0"/>
                 </a:solidFill>
                 <a:latin typeface="Calibri"/>
               </a:rPr>
-              <a:t>• dim(DLA) at n = 7: 7 at depth 1 (abelian), 8,128 from depth 2 = dim so(128) = 8,128; pool V generates 2,080, pool L2 8,128; ADAPT-selected sets: dim 7 at alpha = 1, 1,025 at alpha = 0.25 (L2)</a:t>
+              <a:t>• the optimum at alpha = 1 is a product state on every target: KL to the product of its marginals at most 7.9e-04 nats over 126 records; 7 rotations reach it to 1.5e-04 nats; the fixed 21-parameter circuit stops 0.90 nats short</a:t>
             </a:r>
           </a:p>
           <a:p>
@@ -10104,13 +10277,13 @@
               </a:spcAft>
             </a:pPr>
             <a:r>
-              <a:rPr sz="1150" b="1">
-                <a:solidFill>
-                  <a:srgbClr val="F2A93B"/>
-                </a:solidFill>
-                <a:latin typeface="Calibri"/>
-              </a:rPr>
-              <a:t>The target is a product state</a:t>
+              <a:rPr sz="1100" b="0">
+                <a:solidFill>
+                  <a:srgbClr val="ECECF0"/>
+                </a:solidFill>
+                <a:latin typeface="Calibri"/>
+              </a:rPr>
+              <a:t>• offered entangling operators on the 78 alpha = 1 targets, ADAPT's growth halts by its gradient test on all of them; the operators added first (0 on 18 / 10 targets, at most 11) lower the objective by at most 1.2e-04: inert growth</a:t>
             </a:r>
           </a:p>
           <a:p>
@@ -10120,13 +10293,13 @@
               </a:spcAft>
             </a:pPr>
             <a:r>
-              <a:rPr sz="1150" b="0">
+              <a:rPr sz="1100" b="0">
                 <a:solidFill>
                   <a:srgbClr val="ECECF0"/>
                 </a:solidFill>
                 <a:latin typeface="Calibri"/>
               </a:rPr>
-              <a:t>• KL(Gibbs || product of its marginals) = 7.2e-17 on the ideal ladder, 5.4e-05 on 1A13; a 7-parameter RY layer reaches the Gibbs state to 5.4e-05 nats, the deployed 21-parameter circuit stops at 0.903</a:t>
+              <a:t>• the algebra: dim(DLA) = 8,128 = so(128) from depth 2; nothing for an adaptive ansatz to add (A2)</a:t>
             </a:r>
           </a:p>
           <a:p>
@@ -10136,13 +10309,13 @@
               </a:spcAft>
             </a:pPr>
             <a:r>
-              <a:rPr sz="1150" b="0">
+              <a:rPr sz="1100" b="0">
                 <a:solidFill>
                   <a:srgbClr val="ECECF0"/>
                 </a:solidFill>
                 <a:latin typeface="Calibri"/>
               </a:rPr>
-              <a:t>• A1, endpoint: running (fixed vs ADAPT-grown, built chain primary); expected null by the set-equality theorem</a:t>
+              <a:t>• grown circuits at alpha = 1 are product circuits whose variance does not decay (A4, left); at alpha = 0.25 the grown circuit decays at -0.302 vs the fixed -0.243 per qubit</a:t>
             </a:r>
           </a:p>
           <a:p>
@@ -10152,13 +10325,13 @@
               </a:spcAft>
             </a:pPr>
             <a:r>
-              <a:rPr sz="1150" b="1">
+              <a:rPr sz="1100" b="1">
                 <a:solidFill>
                   <a:srgbClr val="ECECF0"/>
                 </a:solidFill>
                 <a:latin typeface="Calibri"/>
               </a:rPr>
-              <a:t>• Verdict: PENDING s26/PROPOSAL_A.md. Nothing here is a width-scaling argument for ADAPT on this Hamiltonian (L35).</a:t>
+              <a:t>• Verdict: REPLACE. The mechanism is absent, not weak: a better ansatz has nothing to be better at, and the readout cannot see the difference between two well-trained states. What replaces it is the trainability paper (slide 9), with A2, A4 and the product-state result as its Sprint 26 additions.</a:t>
             </a:r>
           </a:p>
         </p:txBody>
@@ -10218,7 +10391,7 @@
                 </a:solidFill>
                 <a:latin typeface="Calibri"/>
               </a:rPr>
-              <a:t>Direction B: a learned folding model as the prior, and its replacement</a:t>
+              <a:t>Direction B, and what we publish: the trainability paper</a:t>
             </a:r>
           </a:p>
         </p:txBody>
@@ -10287,7 +10460,7 @@
                 </a:solidFill>
                 <a:latin typeface="Calibri"/>
               </a:rPr>
-              <a:t>9 / 11    from s26/PROPOSAL_B.md (lane P, DRAFT; B1 final) and s26/PROPOSAL_B_REPLACEMENT.md (lane Q); the A2 and A4 figures are on slides 6 and 8</a:t>
+              <a:t>9 / 11    from s26/PROPOSAL_B.md (lane P, DRAFT; B1 final) and s26/PROPOSAL_B_REPLACEMENT.md (lane Q); the paper replaces A (L68, L69) and, if B2/B3 are null, B</a:t>
             </a:r>
           </a:p>
         </p:txBody>
@@ -10525,7 +10698,7 @@
                 </a:solidFill>
                 <a:latin typeface="Calibri"/>
               </a:rPr>
-              <a:t>The replacement: publish the trainability result</a:t>
+              <a:t>What we publish: the trainability paper (in place of A, and of B if B2/B3 are null)</a:t>
             </a:r>
           </a:p>
           <a:p>
@@ -10605,7 +10778,7 @@
                 </a:solidFill>
                 <a:latin typeface="Calibri"/>
               </a:rPr>
-              <a:t>• the deployed Gibbs target is a product state (KL to its product of marginals 5.4e-05 on 1A13); an ADAPT-grown circuit on it grows no entanglement, so its gradients do not decay because there is nothing to train</a:t>
+              <a:t>• Sprint 26 additions (slides 6 and 8): the DLA census; the product-state target (KL to the product of marginals at most 7.9e-04 nats on 126 targets); grown circuits that do not decay because there is nothing to train; the A1 null (-0.022 A at -0.36 x MDE)</a:t>
             </a:r>
           </a:p>
           <a:p>

--- a/vqe_research_overview.pptx
+++ b/vqe_research_overview.pptx
@@ -2260,7 +2260,7 @@
           </a:p>
           <a:p>
             <a:r>
-              <a:t>We tested letting the circuit grow itself. qubit-ADAPT-VQE starts from one layer of single-qubit rotations and adds, one at a time, whichever operator would lower the objective fastest. We ran it on all 126 development peptides with the deployed objective, seed and readout, and compared the built chains pairwise. The answer is no change: -0.014 to -0.022 angstroms, a quarter to a third of what the comparison can resolve, with fold-clustered intervals straddling zero. All 12 variants point the same way, but they are one observation, not twelve, and none clears its bar; the resolution is 0.06 angstroms. Why? The energy is the same rank ladder on every peptide, and its optimum at the deployed setting is a product state, within 7.9e-04 nats of the product of its marginals on all 126 targets. Seven rotations represent it to 1.5e-04 nats. Offered entangling operators on the 78 targets there, ADAPT's growth stops by its own gradient test on every one, and the operators it adds first lower the objective by at most 1.2e-04. There is nothing to entangle. The deployed 21-parameter circuit stops 0.90 nats short of that optimum, and using the optimum itself moves the structure by +0.0088 angstroms, a tenth of the resolution. Its Lie algebra is already the full real algebra from depth two: shallowness, not structure. So Proposal A is replaced. The adaptive circuit is a correct, tested tool; it confirmed the diagnosis instead of curing it. What we publish is on the next slide.</a:t>
+              <a:t>We tested letting the circuit grow itself. qubit-ADAPT-VQE starts from one layer of single-qubit rotations and adds, one at a time, whichever operator would lower the objective fastest. We ran it on all 126 development peptides with the deployed objective, seed and readout, and compared the built chains pairwise. The answer is no change: -0.014 to -0.022 angstroms, a quarter to a third of what the comparison can resolve, with fold-clustered intervals straddling zero. All 12 variants point the same way, but they are one observation, not twelve, and none clears its bar; the resolution is 0.06 angstroms. Why? At the deployed setting the optimum the circuit is asked to reach is a product state: seven single-qubit rotations represent it exactly, to 0.0002 nats. When ADAPT is offered entangling operators it does append them, on 60 to 78 of the 78 targets, but they are inert: together they lower the objective by less than 0.001 nats, their angles stay below 0.02 radians under L-BFGS, and the state remains a product state to 0.0004 nats. The deployed 21-parameter circuit stops 0.90 nats short of that same optimum, and reaching it exactly moves the emitted structure by those 0.014 to 0.022 angstroms, a third of the resolution. Its Lie algebra is already the full real algebra from depth two: shallowness, not structure. So Proposal A is replaced. The adaptive circuit is a correct, tested tool; it confirmed the diagnosis instead of curing it. What we publish is on the next slide.</a:t>
             </a:r>
           </a:p>
           <a:p/>
@@ -2271,7 +2271,7 @@
           </a:p>
           <a:p>
             <a:r>
-              <a:t>Verdict REPLACE (`s26/PROPOSAL_A.md`, lane Q; L68; accepted by the coordinator in L69, subject to the Adversary's check of L68): the mechanism is absent, not weak. A1 basis: built chain, `rmsd_q_synth` (the production projection of the weighted average over the 128 candidates) on both sides; the deployed selector's arm is 3.2280 A on that basis against the production top-75 arm 3.2148 A, and the whole quantum synthesis is worth +0.0133 A (0.26 x MDE) against the classical arm, so the resolution is about four times the component's own footprint. Primaries (`s26/results/a1_stats.json`): ADAPT 2-local pool minus fixed -0.0138 (SE 0.0210, MDE 0.0588, -0.23 x, fold CI [-0.0705, +0.0442], 58W/68L, 3/5 folds); ADAPT Tang pool minus fixed -0.0222 (SE 0.0217, MDE 0.0608, -0.36 x, fold CI [-0.0854, +0.0424], 61W/65L). All 12 ADAPT arms (two pools, two optimisers, 7 / 14 / 21 parameters) are between -0.0245 and -0.0128 A at 0.21 to 0.40 x MDE; on the selection readout -0.0478 to -0.0385 A at up to 0.47 x MDE with 45 to 59 exact ties (the shape of S25's headline: a direction the instrument cannot size). The twelve arms are one observation, not twelve: their per-target delta vectors correlate at 0.955 on average (min 0.919; Adversary L70 caveat 1). The 21 parameters are a budget: the Adam primaries realise 21 (repeats of one rotation merge), L-BFGS 7 to 21 (L70 caveat 2). Controls: the exact Gibbs state in place of the circuit +0.0088 (0.11 x) overall, -0.0271 on the 78 alpha = 1 targets where it is the optimum and +0.0671 on the 48 alpha = 0.25 targets where it is not (L70 caveat 3); the matched-entropy random Hamiltonian +0.0337 (0.34 x, fold CI [+0.0122, +0.0581], 5/5 folds). Product-state facts from the 126 per-target records (`s26/results/a1/*.json`, no native): KL(Gibbs || product of marginals) mean 1.4e-04, max 7.9e-04; on the 78 alpha = 1 targets the fixed circuit's KL to Gibbs is 0.9027 (max 0.984; S25's 0.902 reproduced) and the 7-parameter RY layer's 1.5e-04 (max 7.9e-04). Growth under L-BFGS at alpha = 1: stopped by the eps = 1e-3 gradient criterion on 156 of 156 (pool, target) cells; the number of operators added before the stop is 0 on 18 (pool V) and 10 (pool L2) of the 78 targets and at most 11; the free-energy change they produce is a decrease of 1.2e-04 at most (median -9.4e-06). This is the artefact's form of the proposal's "declines them on all 78 targets": the growth is inert, not absent. The A4 figure (slide 8) is lane Q's; the product-circuit reading rests on the adapt sets of `s26/results/q_dla.json` (L47). Slide 9 carries what is published in A's place.</a:t>
+              <a:t>Verdict REPLACE (`s26/PROPOSAL_A.md`, lane Q; L68; accepted by the coordinator in L69, subject to the Adversary's check of L68): the mechanism is absent, not weak. A1 basis: built chain, `rmsd_q_synth` (the production projection of the weighted average over the 128 candidates) on both sides; the deployed selector's arm is 3.2280 A on that basis against the production top-75 arm 3.2148 A, and the whole quantum synthesis is worth +0.0133 A (0.26 x MDE) against the classical arm, so the resolution is about four times the component's own footprint. Primaries (`s26/results/a1_stats.json`): ADAPT 2-local pool minus fixed -0.0138 (SE 0.0210, MDE 0.0588, -0.23 x, fold CI [-0.0705, +0.0442], 58W/68L, 3/5 folds); ADAPT Tang pool minus fixed -0.0222 (SE 0.0217, MDE 0.0608, -0.36 x, fold CI [-0.0854, +0.0424], 61W/65L). All 12 ADAPT arms (two pools, two optimisers, 7 / 14 / 21 parameters) are between -0.0245 and -0.0128 A at 0.21 to 0.40 x MDE; on the selection readout -0.0478 to -0.0385 A at up to 0.47 x MDE with 45 to 59 exact ties (the shape of S25's headline: a direction the instrument cannot size). The twelve arms are one observation, not twelve: their per-target delta vectors correlate at 0.955 on average (min 0.919; Adversary L70 caveat 1). The 21 parameters are a budget: the Adam primaries realise 21 (repeats of one rotation merge), L-BFGS 7 to 21 (L70 caveat 2). Controls: the exact Gibbs state in place of the circuit +0.0088 (0.11 x) overall, -0.0271 on the 78 alpha = 1 targets where it is the optimum and +0.0671 on the 48 alpha = 0.25 targets where it is not (L70 caveat 3); the matched-entropy random Hamiltonian +0.0337 (0.34 x, fold CI [+0.0122, +0.0581], 5/5 folds). Product-state facts from the 126 per-target records (`s26/results/a1/*.json`, no native): KL(Gibbs || product of marginals) mean 1.4e-04, max 7.9e-04; on the 78 alpha = 1 targets the fixed circuit's KL to Gibbs is 0.9027 (max 0.984; S25's 0.902 reproduced) and the 7-parameter RY layer's 1.5e-04 (max 7.9e-04). Growth at alpha = 1, L75's reconciliation of my L73 flag (the two "no operator selected" sentences of L68 and `s26/PROPOSAL_A.md` are retracted there and corrected by an addendum): the growth halts by the eps = 1e-3 gradient criterion on 156 of 156 (pool, target) cells under L-BFGS and at the 21-parameter cap under Adam, but operators ARE appended, on 60 (pool V) and 68 (pool L2) of the 78 targets under L-BFGS, every one a multi-qubit string, and on 78 of 78 under Adam; they are inert: the free energy moves by at most 1.2e-04 nats under L-BFGS and 8.6e-04 under Adam (median -9.4e-06 under L-BFGS), the appended angles stay at or below 0.018 rad under L-BFGS, and the state stays a product state to KL 4.1e-04 (`s26/results/a1/*.json :: adapt/*/sequence, trace, theta; arms/adapt*_P21/kl_to_product`). The ideal-ladder statements of L27 and L35 (nothing appended at alpha = 1) stand: there E is exactly affine and every pool gradient is exactly zero; on a real target tie-averaging leaves a residual gradient just above eps. The A4 figure (slide 8) is lane Q's; the product-circuit reading rests on the adapt sets of `s26/results/q_dla.json` (L47). Slide 9 carries what is published in A's place.</a:t>
             </a:r>
           </a:p>
           <a:p/>
@@ -2282,6 +2282,21 @@
           </a:p>
           <a:p>
             <a:r>
+              <a:t>A1_APPENDED_ADAM = 78 &lt;- s26/results/a1/*.json :: adapt/{V,L2}_adam_best_zrank/sequence non-empty (count over 78) (DERIVED)</a:t>
+            </a:r>
+          </a:p>
+          <a:p>
+            <a:r>
+              <a:t>A1_APPENDED_L2_LBFGS = 68 &lt;- s26/results/a1/*.json :: adapt/L2_lbfgs_zrank/sequence non-empty (count over 78) (DERIVED)</a:t>
+            </a:r>
+          </a:p>
+          <a:p>
+            <a:r>
+              <a:t>A1_APPENDED_V_LBFGS = 60 &lt;- s26/results/a1/*.json :: adapt/V_lbfgs_zrank/sequence non-empty (count over the 78 alpha = 1 targets) (DERIVED)</a:t>
+            </a:r>
+          </a:p>
+          <a:p>
+            <a:r>
               <a:t>A1_ARMS_EFF_MAX = -0.0127684 &lt;- s26/results/a1_stats.json :: max effect over the 12 ADAPT arms (built chain) (DERIVED)</a:t>
             </a:r>
           </a:p>
@@ -2312,6 +2327,11 @@
           </a:p>
           <a:p>
             <a:r>
+              <a:t>A1_DF_ABSMAX_ALL = 0.000861746 &lt;- s26/results/a1/*.json :: adapt/*_zrank/trace: F(P = 7) - F(final), max over the 78 and the four arms (DERIVED)</a:t>
+            </a:r>
+          </a:p>
+          <a:p>
+            <a:r>
               <a:t>A1_FIXED_MEAN = 3.22805 &lt;- s26/results/a1_stats.json :: means/fixed_zrank_it50/rmsd_q_synth [built_chain (rmsd_q_synth)]</a:t>
             </a:r>
           </a:p>
@@ -2367,6 +2387,11 @@
           </a:p>
           <a:p>
             <a:r>
+              <a:t>A1_KL_TO_PRODUCT_MAX = 0.000407255 &lt;- s26/results/a1/*.json :: arms/adapt*_zrank_P21/kl_to_product, max over the 78 alpha = 1 targets and the four (pool, optimiser) arms (DERIVED)</a:t>
+            </a:r>
+          </a:p>
+          <a:p>
+            <a:r>
               <a:t>A1_L2_CI = [-0.0705134071560539, 0.044153798708205086] &lt;- s26/results/a1_stats.json :: contrasts/'rmsd_q_synth:adaptL2_adam_best_zrank_P21-fixed_zrank_it50'/ci95_fold</a:t>
             </a:r>
           </a:p>
@@ -2407,6 +2432,11 @@
           </a:p>
           <a:p>
             <a:r>
+              <a:t>A1_LBFGS_ANGLE_MAX = 0.01793 &lt;- s26/results/a1/*.json :: adapt/{V,L2}_lbfgs_zrank/theta beyond the first n entries, max |angle| over the 78 (DERIVED)</a:t>
+            </a:r>
+          </a:p>
+          <a:p>
+            <a:r>
               <a:t>A1_LBFGS_DF_ABSMAX = 0.000123282 &lt;- s26/results/a1/*.json :: adapt/{V,L2}_lbfgs_zrank/trace: |F(final) - F(P = 7)|, max over 2 x 78 (DERIVED)</a:t>
             </a:r>
           </a:p>
@@ -2417,22 +2447,7 @@
           </a:p>
           <a:p>
             <a:r>
-              <a:t>A1_LBFGS_MAX_OPS = 11 &lt;- s26/results/a1/*.json :: adapt/{V,L2}_lbfgs_zrank/sequence length (max over 2 x 78) (DERIVED)</a:t>
-            </a:r>
-          </a:p>
-          <a:p>
-            <a:r>
               <a:t>A1_LBFGS_STOP_EPS = 156 &lt;- s26/results/a1/*.json :: adapt/{V,L2}_lbfgs_zrank/stopped == 'eps' (count over 2 x 78) (DERIVED)</a:t>
-            </a:r>
-          </a:p>
-          <a:p>
-            <a:r>
-              <a:t>A1_LBFGS_ZERO_OPS_L2 = 10 &lt;- s26/results/a1/*.json :: adapt/L2_lbfgs_zrank/sequence empty (count over 78) (DERIVED)</a:t>
-            </a:r>
-          </a:p>
-          <a:p>
-            <a:r>
-              <a:t>A1_LBFGS_ZERO_OPS_V = 18 &lt;- s26/results/a1/*.json :: adapt/V_lbfgs_zrank/sequence empty (count over 78) (DERIVED)</a:t>
             </a:r>
           </a:p>
           <a:p>
@@ -10283,7 +10298,7 @@
                 </a:solidFill>
                 <a:latin typeface="Calibri"/>
               </a:rPr>
-              <a:t>• offered entangling operators on the 78 alpha = 1 targets, ADAPT's growth halts by its gradient test on all of them; the operators added first (0 on 18 / 10 targets, at most 11) lower the objective by at most 1.2e-04: inert growth</a:t>
+              <a:t>• offered entangling operators, ADAPT does append them, on 60 to 78 of the 78 alpha = 1 targets, but they are inert: at most 8.6e-04 nats of free energy, angles at or below 0.018 rad under L-BFGS, and the state stays a product state to KL 4.1e-04 (L75)</a:t>
             </a:r>
           </a:p>
           <a:p>
@@ -10778,7 +10793,7 @@
                 </a:solidFill>
                 <a:latin typeface="Calibri"/>
               </a:rPr>
-              <a:t>• Sprint 26 additions (slides 6 and 8): the DLA census; the product-state target (KL to the product of marginals at most 7.9e-04 nats on 126 targets); grown circuits that do not decay because there is nothing to train; the A1 null (-0.022 A at -0.36 x MDE)</a:t>
+              <a:t>• Sprint 26 additions (slides 6 and 8): the DLA census; the product-state target (KL to the product of marginals at most 7.9e-04 nats on 126 targets); grown circuits whose gradients do not decay on the ideal ladder (A4); the A1 null (-0.022 A at -0.36 x MDE) with inert growth on the real targets (L75)</a:t>
             </a:r>
           </a:p>
           <a:p>

--- a/vqe_research_overview.pptx
+++ b/vqe_research_overview.pptx
@@ -634,7 +634,7 @@
           </a:p>
           <a:p>
             <a:r>
-              <a:t>Direction C says: learn a better distance prior, and keep physics honest. The prior bounds the accuracy, so the plan has five parts. C1 reproduced the closures this rests on, to the third decimal. A learned ranker on real features moves from 3.043 to 3.026 angstroms as its training set grows; the same model with a leaked label reaches 2.146. A perfect ranker inside the shipped top-25 returns 2.609 against 3.468 for a random member. So learning a ranker is closed, and the proposal is not that. C2 is a ladder of 11 prior inputs, from no language model to the full 650-million-parameter embedding. Its falsifier was fixed before the first run: a rung must beat the shipped posterior on the built chain by more than its own MDE, with a fold-clustered interval excluding zero on five of five folds. Seven rungs are trained; the evaluations are running. C3 asked whether AMBER relaxation is an accuracy step. It is not. The relaxation moves the chain 0.220 angstroms and costs +0.0207; a random move of exactly the same size costs +0.0096. Physics is worse than noise, and its displacement points slightly away from the native. So refine-with-physics is kept as a validity step only: it brings 125 of 126 chains below a thousand kilocalories per mole, though on two targets it breaks a virtual bond. C4, routers, and C5, a learned common-mode correction, are pre-registered and pending. The verdict on C is pending the ladder.</a:t>
+              <a:t>Our predictor's accuracy is set by its distance prior, and last sprint we measured that moving that prior 2.2% of the way toward the truth would take us under three angstroms. So this sprint we asked whether any input our machine can compute makes the prior better. We retrained it nine ways: without the language model, with only its contact head, with a smaller language model, with more of its embedding, a bigger network, a triangle-update architecture, and a mix with the retrieval pool's own statistics. First, the retrained recipe reproduces the pipeline exactly on all 126 targets, so every difference is real. Second, the language model is worth 0.21 angstroms on the built chain and 0.33 on selection, five folds out of five, and an 8-million-parameter model carries none of that. Third, nothing beats the shipped prior: every other variant lands within 0.12 angstroms of it, below what 126 targets can resolve. Routing the set size on new features failed again. The physics step is worse than a random move of its own size, so it stays as a validity check only: it turns 34 emissions with a sub-2-angstrom heavy-atom overlap into 1, at a price of 0.021 angstroms of accuracy, 1.3% bond strain, and a broken virtual bond on two targets. Our verdict is keep with edits: the prior is the lever, its derivative is steep, its inputs on this machine are flat, and the honest next step is a language model too large for this box.</a:t>
             </a:r>
           </a:p>
           <a:p/>
@@ -645,7 +645,7 @@
           </a:p>
           <a:p>
             <a:r>
-              <a:t>Verdict form (campaign prompt): KEEP AS STATED / KEEP WITH EDITS / REPLACE; lane P's `s26/PROPOSAL_C.md` is DRAFT and its verdict is pending C2 to C5. The C1 learning curve spans 3.0433 (n = 8) to 3.0258 (full) on the weighted-average basis; the leaked label reaches 2.5342 at n = 8. Perfect ranker in the top-25 2.6087, random member 3.4676, distogram argmin 3.4540 (single window). C2 anchor (L56, L57): selection max abs 0.0e+00 and point cloud 7.3e-14 against the production cache; the built chain through the ladder's own path is 3.2126 A, the leaderboard-rebuild basis, so every C2 contrast is paired on that basis and the 0.002 A offset to 3.2148 is a basis difference, not an effect. Rungs with all five fold checkpoints on disk at build time: 7. C3 (L39, L46): AMBER vs built chain +0.0207 [fold CI [+0.0154, +0.0290]], vs random +0.0111 [[+0.0062, +0.0171]] at 1.12 x MDE (Type-M: sign measured, magnitude an upper bound), vs toward-member +0.0385 [[+0.0298, +0.0479]]; ORACLE cosine of the displacement with the true residual -0.049, positive on 36.5% of targets; before relaxation 58.7% of built chains sit above 1e4 kcal/mol; after it 125 of 126 converge (9KAR ends at 1262 kcal/mol) and the virtual CA-CA bond stretches from 3.804 to 3.867 A. The free calibration flag (L53): the distance the relaxation moves a chain predicts its error, Spearman +0.433 partial on n and Rg; never a selector. Stage 2 of C3 repeats the seven contrasts on the best C2 rung when lane P delivers it.</a:t>
+              <a:t>Verdict KEEP WITH EDITS, final (`s26/PROPOSAL_C.md`, commit 0a85323f with addendum 1; coordinator L117; Adversary L120 STANDS). The four edits: (1) C2 "learn a better prior from better inputs" becomes "the prior's inputs are measured out at n = 126": the ESM-2 650M channel is the whole of the channel this instrument can see (+0.208 A built chain, +0.330 A selection, 5/5 folds), and no reduction, expansion, capacity, joint-consistency or pool-histogram variant of it moves the endpoint beyond 0.12 A against MDEs of 0.13 to 0.20 A; the lever that stays open is a larger language model, which does not fit this box (B1). (2) C3 "refine with physics" becomes "keep AMBER as a validity step only". (3) C4 "route the set size and scale" becomes "closed": 12 m* routers on four feature blocks no previous router used, 11 pointing the harmful way, the largest +0.068 A at 0.91 x MDE, none clearing its MDE; 6 s* routers, all with the wrong sign (rho -0.21 to -0.10), costing +0.007 to +0.027 A against s = 1 (`s26/results/p_c4.json`, L110, L115); C5 (predict and subtract the common mode) was RUNNING at the proposal's 02:12 stamp (`s26/PROPOSAL_C.md` addendum 1, correcting a pre-written outcome per L120); at this build `s26/results/p_c5.json` holds 126 checkpointed rows with complete = False, so it is NOT A RESULT; lane P appends a final addendum when the run finishes or at 04:15, and the record's prior for it is a null (S16, S19 L14, S24 L7). The raw rung has 3 of 5 fold models trained and was not evaluated. (4) "The prior's derivative is steep and the prior's inputs are flat": every achievable rung moves at cosine 0.2 to 0.5 to the native's direction (S25 L12). C1 (L26): closures reproduced, 3.0433 to 3.0258 real vs 2.5342 to 2.1460 leaked; 2.6087 vs 3.4676. C2, all nine evaluated rungs, built chain (rebuild basis 3.2126), effect (x MDE, fold CI, folds): noesm +0.208 (1.01 x, [+0.0986, +0.3942], 5/5, WORSE, Type-M); conly +0.122 (0.62 x, [-0.0350, +0.2674]); esm8m +0.242 (1.17 x, [+0.1134, +0.3853], 5/5, WORSE, Type-M); pca32 identity (126 ties); pca32f +0.018 (0.13 x, [-0.0725, +0.0970]); pca128 +0.076 (0.43 x, [-0.0691, +0.2157]); wide +0.032 (0.25 x, [-0.0300, +0.1279]); pairnet +0.041 (0.30 x, [-0.0442, +0.1143]); mix identity (126 ties, lam* = 0 on 5/5 folds); raw: 3 of 5 folds trained, not evaluated. No rung is better than the shipped prior on the built chain (False). C3 (L39, L46, L87, L100; `s26/C3_RESULT.md` addenda 1 to 4): AMBER vs the built chain +0.0207 (fold CI [+0.0154, +0.0290], 2.16 x); vs a random move of its own size +0.0111 ([+0.0062, +0.0171], 1.12 x, Type-M: sign measured, size an upper bound; replication +0.0100); vs a same-size move toward a random pool member +0.0385 ([+0.0298, +0.0479]; replication +0.0414); the toward-member control itself improves the chain, -0.0178, replicated at -0.0207 [-0.0250, -0.0166], a statement about the projection's cost (S16 L27), not about physics; ORACLE cosine -0.049. The validity axis (`s26/results/ph_validity.json`, L100): heavy-atom pairs below 2.0 A 0.444 to 0.008 per target (34 targets to 1); closest pair 2.36 to 2.78 A; bond strain 1.3%, angle strain 2.5%, omega non-planarity 6.6 deg; Ramachandran favoured 0.930 to 0.911; 125 of 126 converge below 1000 kcal/mol (9KAR ends at 1262); a validity step on 124 of 126, on 2BP4 and 9KAR it breaks a virtual bond. Stage 2 reduces to stage 1 because the best C2 rung is the shipped prior (L112, addendum 4). The calibration flag, restated per L123: the pool's own disagreement predicts the emitted chain's error (Spearman +0.452 partial on n and Rg, fold CI [+0.2799, +0.6093]); the relaxation's displacement tracks that disagreement at rho 0.76 and adds nothing given it (`s26/results/a_strain_vs_spread.json`); never a selector.</a:t>
             </a:r>
           </a:p>
           <a:p/>
@@ -656,11 +656,6 @@
           </a:p>
           <a:p>
             <a:r>
-              <a:t>ARM_MEAN = 3.21477 &lt;- bench_results/baseline_tuning126.json :: science/rmsd_arm/mean [built_chain]</a:t>
-            </a:r>
-          </a:p>
-          <a:p>
-            <a:r>
               <a:t>C1_S12_LEAK_FULL = 2.14595 &lt;- s12/results/agg_dec_v2_oracle.json :: mean_raw [point_cloud (weighted average)]</a:t>
             </a:r>
           </a:p>
@@ -686,11 +681,6 @@
           </a:p>
           <a:p>
             <a:r>
-              <a:t>C1_S17_DIST_PICK = 3.454 &lt;- s17/results/inband.json :: rows[*]/cells/25/dist_pick (mean over 126) [single_window] (DERIVED)</a:t>
-            </a:r>
-          </a:p>
-          <a:p>
-            <a:r>
               <a:t>C1_S17_RAND = 3.46759 &lt;- s17/results/inband.json :: rows[*]/cells/25/rand (mean over 126) [single_window] (DERIVED)</a:t>
             </a:r>
           </a:p>
@@ -701,22 +691,152 @@
           </a:p>
           <a:p>
             <a:r>
-              <a:t>C2_ANCHOR_CLOUD_MAXABS = 7.25253e-14 &lt;- s26/results/p_ladder_report_shipped_s0.json :: cloud/maxabs_vs_cache</a:t>
-            </a:r>
-          </a:p>
-          <a:p>
-            <a:r>
-              <a:t>C2_ANCHOR_SEL_MAXABS = 0 &lt;- s26/results/p_ladder_report_shipped_s0.json :: sel/maxabs_vs_cache</a:t>
-            </a:r>
-          </a:p>
-          <a:p>
-            <a:r>
-              <a:t>C2_N_RUNGS = 11 &lt;- s26/PREREG_C2.md / s26/PROPOSAL_C.md: rungs shipped, noesm, conly, pca32, pca32f, pca128, raw, esm8m, wide, pairnet, mix (LEDGER)</a:t>
-            </a:r>
-          </a:p>
-          <a:p>
-            <a:r>
-              <a:t>C2_RUNGS_TRAINED = 7 &lt;- s26/models/p_ladder/&lt;rung&gt;_fold{0..4}_s0.pt (rungs with all five fold checkpoints; L41 lists noesm, conly, pca32, wide, pca32f, pca128, esm8m) (DERIVED)</a:t>
+              <a:t>C2_ANY_BETTER = False &lt;- s26/results/p_ladder_report_*_s0.json :: stats/arm/effect &lt; 0 for any non-identity rung (DERIVED)</a:t>
+            </a:r>
+          </a:p>
+          <a:p>
+            <a:r>
+              <a:t>C2_CONLY_ARM = 0.122273 &lt;- s26/results/p_ladder_report_conly_s0.json :: stats/arm/effect [built_chain (rebuild basis 3.2126, L57)]</a:t>
+            </a:r>
+          </a:p>
+          <a:p>
+            <a:r>
+              <a:t>C2_CONLY_ARM_CI = [-0.0349670129156046, 0.2674009333267108] &lt;- s26/results/p_ladder_report_conly_s0.json :: stats/arm/ci95_fold</a:t>
+            </a:r>
+          </a:p>
+          <a:p>
+            <a:r>
+              <a:t>C2_CONLY_ARM_X = 0.616581 &lt;- s26/results/p_ladder_report_conly_s0.json :: stats/arm/effect_over_mde</a:t>
+            </a:r>
+          </a:p>
+          <a:p>
+            <a:r>
+              <a:t>C2_ESM8M_ARM = 0.241812 &lt;- s26/results/p_ladder_report_esm8m_s0.json :: stats/arm/effect [built_chain (rebuild basis 3.2126, L57)]</a:t>
+            </a:r>
+          </a:p>
+          <a:p>
+            <a:r>
+              <a:t>C2_ESM8M_ARM_CI = [0.11339351234211517, 0.3853393140498519] &lt;- s26/results/p_ladder_report_esm8m_s0.json :: stats/arm/ci95_fold</a:t>
+            </a:r>
+          </a:p>
+          <a:p>
+            <a:r>
+              <a:t>C2_ESM8M_ARM_FOLDS = 5 &lt;- s26/results/p_ladder_report_esm8m_s0.json :: stats/arm/folds_same_sign</a:t>
+            </a:r>
+          </a:p>
+          <a:p>
+            <a:r>
+              <a:t>C2_ESM8M_ARM_X = 1.16581 &lt;- s26/results/p_ladder_report_esm8m_s0.json :: stats/arm/effect_over_mde</a:t>
+            </a:r>
+          </a:p>
+          <a:p>
+            <a:r>
+              <a:t>C2_MIX_ARM_T = 126 &lt;- s26/results/p_ladder_report_mix_s0.json :: stats/arm/n_tied</a:t>
+            </a:r>
+          </a:p>
+          <a:p>
+            <a:r>
+              <a:t>C2_NOESM_ARM = 0.207848 &lt;- s26/results/p_ladder_report_noesm_s0.json :: stats/arm/effect [built_chain (rebuild basis 3.2126, L57)]</a:t>
+            </a:r>
+          </a:p>
+          <a:p>
+            <a:r>
+              <a:t>C2_NOESM_ARM_CI = [0.09855816866912079, 0.39421059397275443] &lt;- s26/results/p_ladder_report_noesm_s0.json :: stats/arm/ci95_fold</a:t>
+            </a:r>
+          </a:p>
+          <a:p>
+            <a:r>
+              <a:t>C2_NOESM_ARM_FOLDS = 5 &lt;- s26/results/p_ladder_report_noesm_s0.json :: stats/arm/folds_same_sign</a:t>
+            </a:r>
+          </a:p>
+          <a:p>
+            <a:r>
+              <a:t>C2_NOESM_ARM_X = 1.01171 &lt;- s26/results/p_ladder_report_noesm_s0.json :: stats/arm/effect_over_mde</a:t>
+            </a:r>
+          </a:p>
+          <a:p>
+            <a:r>
+              <a:t>C2_NOESM_SEL = 0.329877 &lt;- s26/results/p_ladder_report_noesm_s0.json :: stats/sel/effect [s8_selection]</a:t>
+            </a:r>
+          </a:p>
+          <a:p>
+            <a:r>
+              <a:t>C2_NULL_EFF_MAX = 0.122273 &lt;- s26/results/p_ladder_report_*_s0.json :: max stats/arm/effect over the five NOT MEASURED rungs (DERIVED)</a:t>
+            </a:r>
+          </a:p>
+          <a:p>
+            <a:r>
+              <a:t>C2_NULL_MDE_MAX = 0.198308 &lt;- s26/results/p_ladder_report_*_s0.json :: max stats/arm/mde over the five NOT MEASURED rungs (DERIVED)</a:t>
+            </a:r>
+          </a:p>
+          <a:p>
+            <a:r>
+              <a:t>C2_NULL_MDE_MIN = 0.128215 &lt;- s26/results/p_ladder_report_*_s0.json :: min stats/arm/mde over the five NOT MEASURED rungs (DERIVED)</a:t>
+            </a:r>
+          </a:p>
+          <a:p>
+            <a:r>
+              <a:t>C2_PAIRNET_ARM = 0.0407453 &lt;- s26/results/p_ladder_report_pairnet_s0.json :: stats/arm/effect [built_chain (rebuild basis 3.2126, L57)]</a:t>
+            </a:r>
+          </a:p>
+          <a:p>
+            <a:r>
+              <a:t>C2_PAIRNET_ARM_CI = [-0.044154064624855965, 0.11432472346009627] &lt;- s26/results/p_ladder_report_pairnet_s0.json :: stats/arm/ci95_fold</a:t>
+            </a:r>
+          </a:p>
+          <a:p>
+            <a:r>
+              <a:t>C2_PAIRNET_ARM_X = 0.29947 &lt;- s26/results/p_ladder_report_pairnet_s0.json :: stats/arm/effect_over_mde</a:t>
+            </a:r>
+          </a:p>
+          <a:p>
+            <a:r>
+              <a:t>C2_PCA128_ARM = 0.0759011 &lt;- s26/results/p_ladder_report_pca128_s0.json :: stats/arm/effect [built_chain (rebuild basis 3.2126, L57)]</a:t>
+            </a:r>
+          </a:p>
+          <a:p>
+            <a:r>
+              <a:t>C2_PCA128_ARM_CI = [-0.06906497346184996, 0.21570656332564483] &lt;- s26/results/p_ladder_report_pca128_s0.json :: stats/arm/ci95_fold</a:t>
+            </a:r>
+          </a:p>
+          <a:p>
+            <a:r>
+              <a:t>C2_PCA128_ARM_X = 0.430162 &lt;- s26/results/p_ladder_report_pca128_s0.json :: stats/arm/effect_over_mde</a:t>
+            </a:r>
+          </a:p>
+          <a:p>
+            <a:r>
+              <a:t>C2_PCA32F_ARM = 0.0180403 &lt;- s26/results/p_ladder_report_pca32f_s0.json :: stats/arm/effect [built_chain (rebuild basis 3.2126, L57)]</a:t>
+            </a:r>
+          </a:p>
+          <a:p>
+            <a:r>
+              <a:t>C2_PCA32F_ARM_CI = [-0.07253148114094085, 0.09698364149707508] &lt;- s26/results/p_ladder_report_pca32f_s0.json :: stats/arm/ci95_fold</a:t>
+            </a:r>
+          </a:p>
+          <a:p>
+            <a:r>
+              <a:t>C2_PCA32F_ARM_X = 0.131152 &lt;- s26/results/p_ladder_report_pca32f_s0.json :: stats/arm/effect_over_mde</a:t>
+            </a:r>
+          </a:p>
+          <a:p>
+            <a:r>
+              <a:t>C2_PCA32_ARM_T = 126 &lt;- s26/results/p_ladder_report_pca32_s0.json :: stats/arm/n_tied</a:t>
+            </a:r>
+          </a:p>
+          <a:p>
+            <a:r>
+              <a:t>C2_WIDE_ARM = 0.0317484 &lt;- s26/results/p_ladder_report_wide_s0.json :: stats/arm/effect [built_chain (rebuild basis 3.2126, L57)]</a:t>
+            </a:r>
+          </a:p>
+          <a:p>
+            <a:r>
+              <a:t>C2_WIDE_ARM_CI = [-0.030001159437642966, 0.12789757478045266] &lt;- s26/results/p_ladder_report_wide_s0.json :: stats/arm/ci95_fold</a:t>
+            </a:r>
+          </a:p>
+          <a:p>
+            <a:r>
+              <a:t>C2_WIDE_ARM_X = 0.247618 &lt;- s26/results/p_ladder_report_wide_s0.json :: stats/arm/effect_over_mde</a:t>
             </a:r>
           </a:p>
           <a:p>
@@ -741,6 +861,11 @@
           </a:p>
           <a:p>
             <a:r>
+              <a:t>C3_AMBER_VS_NONE_X = 2.15642 &lt;- s26/results/ph_c3_stage1.json :: summary/'stage1 AMBER (relaxed) minus do-nothing (built chain)'/effect_over_mde</a:t>
+            </a:r>
+          </a:p>
+          <a:p>
+            <a:r>
               <a:t>C3_AMBER_VS_RANDOM = 0.0110805 &lt;- s26/results/ph_c3_stage1.json :: summary/'stage1 AMBER minus matched-magnitude RANDOM (16 draws)'/effect [relaxed minus displaced built_chain]</a:t>
             </a:r>
           </a:p>
@@ -756,37 +881,17 @@
           </a:p>
           <a:p>
             <a:r>
-              <a:t>C3_BOND_AFTER = 3.86655 &lt;- s26/results/ph_c3_nativefree.json :: summary/amb_bond_mean/mean</a:t>
-            </a:r>
-          </a:p>
-          <a:p>
-            <a:r>
-              <a:t>C3_BOND_BEFORE = 3.80395 &lt;- s26/results/ph_c3_nativefree.json :: summary/ca_bond_mean/mean</a:t>
-            </a:r>
-          </a:p>
-          <a:p>
-            <a:r>
               <a:t>C3_COS = -0.0490645 &lt;- s26/results/ph_c3_stage1.json :: rows[*]/cos_amber (mean) (DERIVED)</a:t>
             </a:r>
           </a:p>
           <a:p>
             <a:r>
-              <a:t>C3_COS_FRAC_POS = 0.365079 &lt;- s26/results/ph_c3_stage1.json :: summary/frac_cos_amber_positive</a:t>
-            </a:r>
-          </a:p>
-          <a:p>
-            <a:r>
               <a:t>C3_E1_MAX = 1262.41 &lt;- s26/results/ph_c3_nativefree.json :: summary/e1_max</a:t>
             </a:r>
           </a:p>
           <a:p>
             <a:r>
-              <a:t>C3_FRAC_E0_OVER_1E4 = 0.587302 &lt;- s26/results/ph_c3_nativefree.json :: summary/frac_e0_over_1e4</a:t>
-            </a:r>
-          </a:p>
-          <a:p>
-            <a:r>
-              <a:t>C3_MAG = 0.219778 &lt;- s26/results/ph_c3_nativefree.json :: summary/mag_sup/mean</a:t>
+              <a:t>C3_MEMBER_VS_NONE = -0.0178189 &lt;- s26/results/ph_c3_stage1.json :: summary/'stage1 TOWARD-MEMBER minus do-nothing'/effect [displaced built_chain minus built_chain]</a:t>
             </a:r>
           </a:p>
           <a:p>
@@ -796,12 +901,157 @@
           </a:p>
           <a:p>
             <a:r>
-              <a:t>C3_RANDOM_VS_NONE = 0.00961423 &lt;- s26/results/ph_c3_stage1.json :: summary/'stage1 RANDOM minus do-nothing'/effect [displaced built_chain minus built_chain]</a:t>
-            </a:r>
-          </a:p>
-          <a:p>
-            <a:r>
-              <a:t>STRAIN_RHO_MOVED = 0.432567 &lt;- s26/results/ph_strain.json :: summary/partial_n_rg/moved/rho</a:t>
+              <a:t>C3_REP_AMBER_VS_MEMBER = 0.041383 &lt;- s26/results/ph_c3_stage1_rep.json :: summary/'stage1-REP AMBER minus matched-magnitude TOWARD-MEMBER (16 draws)'/effect [relaxed minus displaced built_chain]</a:t>
+            </a:r>
+          </a:p>
+          <a:p>
+            <a:r>
+              <a:t>C3_REP_AMBER_VS_RANDOM = 0.009961 &lt;- s26/results/ph_c3_stage1_rep.json :: summary/'stage1-REP AMBER minus matched-magnitude RANDOM (16 draws)'/effect [relaxed minus displaced built_chain]</a:t>
+            </a:r>
+          </a:p>
+          <a:p>
+            <a:r>
+              <a:t>C3_REP_MEMBER_VS_NONE = -0.0206883 &lt;- s26/results/ph_c3_stage1_rep.json :: summary/'stage1-REP TOWARD-MEMBER minus do-nothing'/effect [displaced built_chain minus built_chain]</a:t>
+            </a:r>
+          </a:p>
+          <a:p>
+            <a:r>
+              <a:t>C3_REP_MEMBER_VS_NONE_CI = [-0.024979669558754674, -0.016596443287953653] &lt;- s26/results/ph_c3_stage1_rep.json :: .../ci95_fold</a:t>
+            </a:r>
+          </a:p>
+          <a:p>
+            <a:r>
+              <a:t>C4_M_HARMFUL = 11 &lt;- s26/results/p_c4.json :: m_router/*/*/stats/effect &gt; 0 (count) (DERIVED)</a:t>
+            </a:r>
+          </a:p>
+          <a:p>
+            <a:r>
+              <a:t>C4_M_MAX_EFF = 0.0684452 &lt;- s26/results/p_c4.json :: max m_router/*/*/stats/effect [point_cloud] (DERIVED)</a:t>
+            </a:r>
+          </a:p>
+          <a:p>
+            <a:r>
+              <a:t>C4_M_MAX_X = 0.907725 &lt;- s26/results/p_c4.json :: max m_router/*/*/stats/effect_over_mde (DERIVED)</a:t>
+            </a:r>
+          </a:p>
+          <a:p>
+            <a:r>
+              <a:t>C4_N_M_ROUTERS = 12 &lt;- s26/results/p_c4.json :: m_router/*/* (count) (DERIVED)</a:t>
+            </a:r>
+          </a:p>
+          <a:p>
+            <a:r>
+              <a:t>C4_N_S_ROUTERS = 6 &lt;- s26/results/p_c4.json :: s_router/* (count) (DERIVED)</a:t>
+            </a:r>
+          </a:p>
+          <a:p>
+            <a:r>
+              <a:t>C4_S_EFF_MAX = 0.0269996 &lt;- s26/results/p_c4.json :: max s_router/*/stats/effect [point_cloud] (DERIVED)</a:t>
+            </a:r>
+          </a:p>
+          <a:p>
+            <a:r>
+              <a:t>C4_S_EFF_MIN = 0.00662325 &lt;- s26/results/p_c4.json :: min s_router/*/stats/effect [point_cloud] (DERIVED)</a:t>
+            </a:r>
+          </a:p>
+          <a:p>
+            <a:r>
+              <a:t>C4_S_RHO_MAX = -0.0958432 &lt;- s26/results/p_c4.json :: max s_router/*/rho_pred_vs_sstar (DERIVED)</a:t>
+            </a:r>
+          </a:p>
+          <a:p>
+            <a:r>
+              <a:t>C4_S_RHO_MIN = -0.209142 &lt;- s26/results/p_c4.json :: min s_router/*/rho_pred_vs_sstar (DERIVED)</a:t>
+            </a:r>
+          </a:p>
+          <a:p>
+            <a:r>
+              <a:t>C5_COMPLETE = False &lt;- s26/results/p_c5.json :: complete (absent or false = not a result) (DERIVED)</a:t>
+            </a:r>
+          </a:p>
+          <a:p>
+            <a:r>
+              <a:t>C5_N_ROWS = 126 &lt;- s26/results/p_c5.json :: rows (count of checkpointed targets at build time) (DERIVED)</a:t>
+            </a:r>
+          </a:p>
+          <a:p>
+            <a:r>
+              <a:t>PRIOR_GAMMA_FOR_3A = 0.0224874 &lt;- s24/results/priorladder.json :: linear interpolation on the first rung [point_cloud] (DERIVED)</a:t>
+            </a:r>
+          </a:p>
+          <a:p>
+            <a:r>
+              <a:t>RAW_FOLDS_TRAINED = 3 &lt;- s26/models/p_ladder/raw_fold*_s0.pt (count at build time) (DERIVED)</a:t>
+            </a:r>
+          </a:p>
+          <a:p>
+            <a:r>
+              <a:t>RHO_MOVED_SPREAD = 0.756172 &lt;- s26/results/a_strain_vs_spread.json :: summary/rho_moved_spread</a:t>
+            </a:r>
+          </a:p>
+          <a:p>
+            <a:r>
+              <a:t>SPREAD_RHO_PARTIAL = 0.452214 &lt;- s26/results/a_strain_vs_spread.json :: summary/partial_n_rg/spread_mean/rho</a:t>
+            </a:r>
+          </a:p>
+          <a:p>
+            <a:r>
+              <a:t>SPREAD_RHO_PARTIAL_CI = [0.2799322731165941, 0.6093385774329712] &lt;- s26/results/a_strain_vs_spread.json :: summary/partial_n_rg/spread_mean/ci_fold</a:t>
+            </a:r>
+          </a:p>
+          <a:p>
+            <a:r>
+              <a:t>VAL_ANGLE_STRAIN_AFTER = 0.0245666 &lt;- s26/results/ph_validity.json :: summary/angle_strain/after/mean</a:t>
+            </a:r>
+          </a:p>
+          <a:p>
+            <a:r>
+              <a:t>VAL_BOND_STRAIN_AFTER = 0.012953 &lt;- s26/results/ph_validity.json :: summary/bond_strain/after/mean</a:t>
+            </a:r>
+          </a:p>
+          <a:p>
+            <a:r>
+              <a:t>VAL_CLASH_AFTER = 0.00793651 &lt;- s26/results/ph_validity.json :: summary/n_clash_2A/after/mean</a:t>
+            </a:r>
+          </a:p>
+          <a:p>
+            <a:r>
+              <a:t>VAL_CLASH_BEFORE = 0.444444 &lt;- s26/results/ph_validity.json :: summary/n_clash_2A/before/mean</a:t>
+            </a:r>
+          </a:p>
+          <a:p>
+            <a:r>
+              <a:t>VAL_CLASH_TARGETS_AFTER = 1 &lt;- s26/results/ph_validity.json :: summary/targets_any_clash_2A_after</a:t>
+            </a:r>
+          </a:p>
+          <a:p>
+            <a:r>
+              <a:t>VAL_CLASH_TARGETS_BEFORE = 34 &lt;- s26/results/ph_validity.json :: summary/targets_any_clash_2A_before</a:t>
+            </a:r>
+          </a:p>
+          <a:p>
+            <a:r>
+              <a:t>VAL_MINHEAVY_AFTER = 2.78462 &lt;- s26/results/ph_validity.json :: summary/min_heavy/after/mean</a:t>
+            </a:r>
+          </a:p>
+          <a:p>
+            <a:r>
+              <a:t>VAL_MINHEAVY_BEFORE = 2.36293 &lt;- s26/results/ph_validity.json :: summary/min_heavy/before/mean</a:t>
+            </a:r>
+          </a:p>
+          <a:p>
+            <a:r>
+              <a:t>VAL_OMEGA_DEV_AFTER = 6.61198 &lt;- s26/results/ph_validity.json :: summary/omega_dev/after/mean</a:t>
+            </a:r>
+          </a:p>
+          <a:p>
+            <a:r>
+              <a:t>VAL_RAMA_AFTER = 0.911412 &lt;- s26/results/ph_validity.json :: summary/rama_favoured/after/mean</a:t>
+            </a:r>
+          </a:p>
+          <a:p>
+            <a:r>
+              <a:t>VAL_RAMA_BEFORE = 0.930231 &lt;- s26/results/ph_validity.json :: summary/rama_favoured/before/mean</a:t>
             </a:r>
           </a:p>
         </p:txBody>
@@ -887,7 +1137,7 @@
           </a:p>
           <a:p>
             <a:r>
-              <a:t>DRAFT (until the coordinator's entry on all three verdicts; A is REPLACE by L68 / L69, B and C are pending lane P): if asked "which would you do first?", the evidence favours direction C in its learn-the-prior form as the accuracy study, because the prior is the only lever the record measured as steep (-2.15 A per unit, `s24/results/priorladder.json`) and every selection, ranking, physics and search lever is closed by measurement; paired with the trainability paper as the publication, because on this diagonal Hamiltonian the optimum is a product state and an adaptive ansatz confirms it (A1 null at -0.36 x MDE, `s26/results/a1_stats.json`; product circuits, `s26/results/q_dla.json`). Direction A as an accuracy proposal is replaced (L68, L69); direction B as stated cannot be measured on this machine (`s26/results/b1_feasibility.json`).</a:t>
+              <a:t>The line for "which would you do first?", verbatim from the coordinator's ruling (ledger L117, 2026-09-14 02:02; verdicts A REPLACE, B REPLACE, C KEEP WITH EDITS): "If I could do one thing next, I would publish the trainability work first. Every figure in it already exists as a measured artefact, it needs no new machine, and it is the one part of this project whose result is exact and complete. The only open accuracy lever is the distance prior, and the honest next step there is a larger language model than this laptop can hold, so that comes second and needs a bigger machine. I would not spend more time on the circuit for accuracy: we now know why it cannot matter here." ("positive" reads "exact" per the coordinator's L122, accepting the Adversary's L120 caveats.) Why this order (L117, as amended by L122): the paper's inputs are all in hand; its S26 additions are Adversary-checked (A2, L45; A4 with L119's bootstrap intervals, L47; the product-state fact, L70), while its S13 inputs (the locality theorem, `s13/results/qarch_locality_geom.json`; the Pauli-spectrum prediction, `s13/results/walsh_predict.json`, `geo_pauli.json`) are cited from their artefacts without an S26 re-check, and the S13 Pauli mean weights 2.236 / 3.015 stay off every slide; the prior lever is real (-2.15 A per unit gamma, `s24/results/priorladder.json`) but every input this machine can compute is measured flat (nine rungs, none beats the shipped prior, `s26/results/p_ladder_report_*_s0.json`), so it is a resourcing decision; the circuit is closed as an accuracy lever by three independent facts (the product-state optimum, the inert ADAPT growth and the A1 null at -0.36 x MDE, `s26/results/a1_stats.json`; the full DLA, `s26/results/q_dla.json`; the set-equality theorem, `s25/results/q_verify.json`).</a:t>
             </a:r>
           </a:p>
           <a:p/>
@@ -1954,7 +2204,7 @@
           </a:p>
           <a:p>
             <a:r>
-              <a:t>Seven-configuration suite, point-cloud basis (`s25/results/phys_suite.json`): distogram 3.058, AMBER+distogram 3.132, Legacy+distogram 3.215, all three 3.253, random-75 3.425, Legacy+AMBER 3.674, Legacy 3.755, AMBER 3.880. The same rows on the built chain (`results/summary/leaderboard.json`): 3.219, 3.310, 3.373, 3.422, 3.825, 3.884, 4.102; the ranking is unchanged. Fold CIs: Legacy vs random [+0.2375, +0.4158], AMBER vs random [+0.3284, +0.5356]. Torsion-space ceiling 1.594 (ORACLE, k = 4); distance geometry from the true distances 0.611 (ORACLE); best window in the whole library 1.313 (ORACLE). AMBER relaxation (L39, Adversary L46): vs the built chain +0.0207 [fold CI [+0.0154, +0.0290]], 2.16 x MDE; vs a move of the same size toward a random pool member +0.0385 [[+0.0298, +0.0479]]; vs a random move of the same size +0.0111 [[+0.0062, +0.0171]], 5/5 folds, 1.12 x MDE (Type-M zone: sign measured, magnitude an upper bound). A validity step on 124 of 126; on 2BP4 and 9KAR the relaxation breaks a virtual CA-CA bond and 9KAR does not converge. Physics as a steric reject filter at 1e4 kcal/mol (L43, L54, point cloud): +0.228 A worse than the shipped top-75 (median +0.003: near zero on the median target, the harm is tail-carried; Type-M) and +0.167 vs rejecting the same count at random. A free calibration flag, not a lever (L53): how far the relaxation moves the chain predicts its error, Spearman +0.433 partial on n and Rg, fold CI [+0.2472, +0.5876]; quartile means [+2.2861, +2.9364, +3.7583, +3.9226] A.</a:t>
+              <a:t>Seven-configuration suite, point-cloud basis (`s25/results/phys_suite.json`): distogram 3.058, AMBER+distogram 3.132, Legacy+distogram 3.215, all three 3.253, random-75 3.425, Legacy+AMBER 3.674, Legacy 3.755, AMBER 3.880. The same rows on the built chain (`results/summary/leaderboard.json`): 3.219, 3.310, 3.373, 3.422, 3.825, 3.884, 4.102; the ranking is unchanged. Fold CIs: Legacy vs random [+0.2375, +0.4158], AMBER vs random [+0.3284, +0.5356]. Torsion-space ceiling 1.594 (ORACLE, k = 4); distance geometry from the true distances 0.611 (ORACLE); best window in the whole library 1.313 (ORACLE). AMBER relaxation (L39, Adversary L46): vs the built chain +0.0207 [fold CI [+0.0154, +0.0290]], 2.16 x MDE; vs a move of the same size toward a random pool member +0.0385 [[+0.0298, +0.0479]]; vs a random move of the same size +0.0111 [[+0.0062, +0.0171]], 5/5 folds, 1.12 x MDE (Type-M zone: sign measured, magnitude an upper bound). A validity step on 124 of 126; on 2BP4 and 9KAR the relaxation breaks a virtual CA-CA bond and 9KAR does not converge. Physics as a steric reject filter at 1e4 kcal/mol (L43, L54, point cloud): +0.228 A worse than the shipped top-75 (median +0.003: near zero on the median target, the harm is tail-carried; Type-M) and +0.167 vs rejecting the same count at random. A free calibration flag, not a lever, restated per L121 / L123: the pool's own disagreement (the shipped top-75's pairwise CA-RMSD spread, native-free, available before any relaxation runs) predicts the emitted chain's error at Spearman +0.452 partial on n and Rg, fold CI [+0.2799, +0.6093], 5/5 folds; the relaxation's displacement tracks that disagreement at rho 0.76 and adds nothing given it (+0.082, iid CI [-0.1030, +0.2587], permutation p 0.39; `s26/results/a_strain_vs_spread.json`). L53's quartile means by the displacement, [+2.2861, +2.9364, +3.7583, +3.9226] A, stand as a presentable form of the phenomenon; L53's "first native-free quantity above 0.4" and "how far the relaxation moves the chain predicts its error" are retracted (L123).</a:t>
             </a:r>
           </a:p>
           <a:p/>
@@ -2085,6 +2335,21 @@
           </a:p>
           <a:p>
             <a:r>
+              <a:t>MOVED_GIVEN_SPREAD = 0.0816828 &lt;- s26/results/a_strain_vs_spread.json :: summary/partial_n_rg_spread/moved/rho</a:t>
+            </a:r>
+          </a:p>
+          <a:p>
+            <a:r>
+              <a:t>MOVED_GIVEN_SPREAD_CI = [-0.10304666054419345, 0.25871978017672176] &lt;- s26/results/a_strain_vs_spread.json :: summary/partial_n_rg_spread/moved/ci_iid</a:t>
+            </a:r>
+          </a:p>
+          <a:p>
+            <a:r>
+              <a:t>MOVED_GIVEN_SPREAD_P = 0.3895 &lt;- s26/results/a_strain_vs_spread.json :: summary/partial_n_rg_spread/moved/perm_p</a:t>
+            </a:r>
+          </a:p>
+          <a:p>
+            <a:r>
               <a:t>POOL_BEST = 1.71082 &lt;- bench_results/baseline_tuning126.json :: science/pool_best/mean [single_window]</a:t>
             </a:r>
           </a:p>
@@ -2120,17 +2385,27 @@
           </a:p>
           <a:p>
             <a:r>
+              <a:t>RHO_MOVED_SPREAD = 0.756172 &lt;- s26/results/a_strain_vs_spread.json :: summary/rho_moved_spread</a:t>
+            </a:r>
+          </a:p>
+          <a:p>
+            <a:r>
+              <a:t>SPREAD_FOLDS = 5 &lt;- s26/results/a_strain_vs_spread.json :: summary/partial_n_rg/spread_mean/folds_same_sign</a:t>
+            </a:r>
+          </a:p>
+          <a:p>
+            <a:r>
+              <a:t>SPREAD_RHO_PARTIAL = 0.452214 &lt;- s26/results/a_strain_vs_spread.json :: summary/partial_n_rg/spread_mean/rho</a:t>
+            </a:r>
+          </a:p>
+          <a:p>
+            <a:r>
+              <a:t>SPREAD_RHO_PARTIAL_CI = [0.2799322731165941, 0.6093385774329712] &lt;- s26/results/a_strain_vs_spread.json :: summary/partial_n_rg/spread_mean/ci_fold</a:t>
+            </a:r>
+          </a:p>
+          <a:p>
+            <a:r>
               <a:t>STRAIN_QUARTILE_MEANS = [2.286050405639703, 2.936410873698196, 3.758273630199497, 3.92256307751297] &lt;- s26/results/ph_strain.json :: rows[*]/{moved, rmsd_arm}: mean rmsd_arm by quartile of moved (32/32/32/30) [built_chain] (DERIVED)</a:t>
-            </a:r>
-          </a:p>
-          <a:p>
-            <a:r>
-              <a:t>STRAIN_RHO_MOVED = 0.432567 &lt;- s26/results/ph_strain.json :: summary/partial_n_rg/moved/rho</a:t>
-            </a:r>
-          </a:p>
-          <a:p>
-            <a:r>
-              <a:t>STRAIN_RHO_MOVED_CI = [0.24715403137333128, 0.587580518912838] &lt;- s26/results/ph_strain.json :: summary/partial_n_rg/moved/ci95_fold</a:t>
             </a:r>
           </a:p>
           <a:p>
@@ -2271,7 +2546,7 @@
           </a:p>
           <a:p>
             <a:r>
-              <a:t>Verdict REPLACE (`s26/PROPOSAL_A.md`, lane Q; L68; accepted by the coordinator in L69, subject to the Adversary's check of L68): the mechanism is absent, not weak. A1 basis: built chain, `rmsd_q_synth` (the production projection of the weighted average over the 128 candidates) on both sides; the deployed selector's arm is 3.2280 A on that basis against the production top-75 arm 3.2148 A, and the whole quantum synthesis is worth +0.0133 A (0.26 x MDE) against the classical arm, so the resolution is about four times the component's own footprint. Primaries (`s26/results/a1_stats.json`): ADAPT 2-local pool minus fixed -0.0138 (SE 0.0210, MDE 0.0588, -0.23 x, fold CI [-0.0705, +0.0442], 58W/68L, 3/5 folds); ADAPT Tang pool minus fixed -0.0222 (SE 0.0217, MDE 0.0608, -0.36 x, fold CI [-0.0854, +0.0424], 61W/65L). All 12 ADAPT arms (two pools, two optimisers, 7 / 14 / 21 parameters) are between -0.0245 and -0.0128 A at 0.21 to 0.40 x MDE; on the selection readout -0.0478 to -0.0385 A at up to 0.47 x MDE with 45 to 59 exact ties (the shape of S25's headline: a direction the instrument cannot size). The twelve arms are one observation, not twelve: their per-target delta vectors correlate at 0.955 on average (min 0.919; Adversary L70 caveat 1). The 21 parameters are a budget: the Adam primaries realise 21 (repeats of one rotation merge), L-BFGS 7 to 21 (L70 caveat 2). Controls: the exact Gibbs state in place of the circuit +0.0088 (0.11 x) overall, -0.0271 on the 78 alpha = 1 targets where it is the optimum and +0.0671 on the 48 alpha = 0.25 targets where it is not (L70 caveat 3); the matched-entropy random Hamiltonian +0.0337 (0.34 x, fold CI [+0.0122, +0.0581], 5/5 folds). Product-state facts from the 126 per-target records (`s26/results/a1/*.json`, no native): KL(Gibbs || product of marginals) mean 1.4e-04, max 7.9e-04; on the 78 alpha = 1 targets the fixed circuit's KL to Gibbs is 0.9027 (max 0.984; S25's 0.902 reproduced) and the 7-parameter RY layer's 1.5e-04 (max 7.9e-04). Growth at alpha = 1, L75's reconciliation of my L73 flag (the two "no operator selected" sentences of L68 and `s26/PROPOSAL_A.md` are retracted there and corrected by an addendum): the growth halts by the eps = 1e-3 gradient criterion on 156 of 156 (pool, target) cells under L-BFGS and at the 21-parameter cap under Adam, but operators ARE appended, on 60 (pool V) and 68 (pool L2) of the 78 targets under L-BFGS, every one a multi-qubit string, and on 78 of 78 under Adam; they are inert: the free energy moves by at most 1.2e-04 nats under L-BFGS and 8.6e-04 under Adam (median -9.4e-06 under L-BFGS), the appended angles stay at or below 0.018 rad under L-BFGS, and the state stays a product state to KL 4.1e-04 (`s26/results/a1/*.json :: adapt/*/sequence, trace, theta; arms/adapt*_P21/kl_to_product`). The ideal-ladder statements of L27 and L35 (nothing appended at alpha = 1) stand: there E is exactly affine and every pool gradient is exactly zero; on a real target tie-averaging leaves a residual gradient just above eps. The A4 figure (slide 8) is lane Q's; the product-circuit reading rests on the adapt sets of `s26/results/q_dla.json` (L47). Slide 9 carries what is published in A's place.</a:t>
+              <a:t>Verdict REPLACE (`s26/PROPOSAL_A.md`, lane Q; L68; accepted by the coordinator in L69, subject to the Adversary's check of L68): the mechanism is absent, not weak. A1 basis: built chain, `rmsd_q_synth` (the production projection of the weighted average over the 128 candidates) on both sides; the deployed selector's arm is 3.2280 A on that basis against the production top-75 arm 3.2148 A, and the whole quantum synthesis is worth +0.0133 A (0.26 x MDE) against the classical arm, so the resolution is about four times the component's own footprint. Primaries (`s26/results/a1_stats.json`): ADAPT 2-local pool minus fixed -0.0138 (SE 0.0210, MDE 0.0588, -0.23 x, fold CI [-0.0705, +0.0442], 58W/68L, 3/5 folds); ADAPT Tang pool minus fixed -0.0222 (SE 0.0217, MDE 0.0608, -0.36 x, fold CI [-0.0854, +0.0424], 61W/65L). All 12 ADAPT arms (two pools, two optimisers, 7 / 14 / 21 parameters) are between -0.0245 and -0.0128 A at 0.21 to 0.40 x MDE; on the selection readout -0.0478 to -0.0385 A at up to 0.47 x MDE with 45 to 59 exact ties (the shape of S25's headline: a direction the instrument cannot size). The twelve arms are one observation, not twelve: their per-target delta vectors correlate at 0.955 on average (min 0.919; Adversary L70 caveat 1). The 21 parameters are a budget: the Adam primaries realise 21 (repeats of one rotation merge), L-BFGS 7 to 21 (L70 caveat 2). Controls: the exact Gibbs state in place of the circuit +0.0088 (0.11 x) overall, -0.0271 on the 78 alpha = 1 targets where it is the optimum and +0.0671 on the 48 alpha = 0.25 targets where it is not (L70 caveat 3); the matched-entropy random Hamiltonian +0.0337 (0.34 x, fold CI [+0.0122, +0.0581], 5/5 folds). Product-state facts from the 126 per-target records (`s26/results/a1/*.json`, no native): KL(Gibbs || product of marginals) mean 1.4e-04, max 7.9e-04; on the 78 alpha = 1 targets the fixed circuit's KL to Gibbs is 0.9027 (max 0.984; S25's 0.902 reproduced) and the 7-parameter RY layer's 1.5e-04 (max 7.9e-04). Growth at alpha = 1, L75's reconciliation of my L73 flag (the two "no operator selected" sentences of L68 and `s26/PROPOSAL_A.md` are retracted there and corrected by an addendum): the growth halts by the eps = 1e-3 gradient criterion on 156 of 156 (pool, target) cells under L-BFGS and at the 21-parameter cap under Adam, but operators ARE appended, on 60 (pool V) and 68 (pool L2) of the 78 targets under L-BFGS, every one a multi-qubit string, and on 78 of 78 under Adam; they are inert: the free energy moves by at most 1.2e-04 nats under L-BFGS and 8.6e-04 under Adam (median -9.4e-06 under L-BFGS), the appended angles stay at or below 0.018 rad under L-BFGS, and the state stays a product state to KL 4.1e-04 (`s26/results/a1/*.json :: adapt/*/sequence, trace, theta; arms/adapt*_P21/kl_to_product`). The ideal-ladder statements of L27 and L35 (nothing appended at alpha = 1) stand: there E is exactly affine and every pool gradient is exactly zero; on a real target tie-averaging leaves a residual gradient just above eps. The A4 figure (slide 8) is lane Q's; the product-circuit reading rests on the adapt sets of `s26/results/q_dla.json` (L47). Slide 9 carries what is published in A's place. L119's bootstrap (`s26/results/q_var_boot.json`, every q_var.json row reproduced at relative 0.0000): the alpha = 0.25 grown-L2 minus fixed slope difference is -0.056, 95% CI [-0.1824, +0.0866] (includes zero, so "decays like the fixed ansatz" now carries a stored interval); the alpha = 1 grown minus fixed differences are +0.23 to +0.72 with every interval excluding zero ("no decay" is measured, not read); the A4 figure on this slide carries those intervals as error bars. A3 (L125, `s26/results/a3_stats.json`, `a3_property.json`): a target-dependent Hamiltonian (the raw standardised score at a per-target temperature matched to the deployed entropy) makes the trained states target-dependent, 124 of 126 distinct against 40 under the deployed rank ladder, and the readout does not notice: +0.0034 A on the built chain, 0.04 x MDE, fold CI [-0.0446, +0.0337].</a:t>
             </a:r>
           </a:p>
           <a:p/>
@@ -2553,6 +2828,61 @@
           <a:p>
             <a:r>
               <a:t>A1_V_X = -0.364319 &lt;- s26/results/a1_stats.json :: contrasts/'rmsd_q_synth:adaptV_adam_best_zrank_P21-fixed_zrank_it50'/effect_over_mde</a:t>
+            </a:r>
+          </a:p>
+          <a:p>
+            <a:r>
+              <a:t>A3_DISTINCT_N = 126 &lt;- s26/results/a3_property.json :: distinct_states/fixed_zraw_Tmatch_it50/*/n_targets (sum) (DERIVED)</a:t>
+            </a:r>
+          </a:p>
+          <a:p>
+            <a:r>
+              <a:t>A3_DISTINCT_TMATCH = 124 &lt;- s26/results/a3_property.json :: distinct_states/fixed_zraw_Tmatch_it50/*/n_distinct (sum over the two cells) (DERIVED)</a:t>
+            </a:r>
+          </a:p>
+          <a:p>
+            <a:r>
+              <a:t>A3_DISTINCT_ZRANK = 40 &lt;- s26/results/a3_property.json :: distinct_states/fixed_zrank_it50/*/n_distinct (sum) (DERIVED)</a:t>
+            </a:r>
+          </a:p>
+          <a:p>
+            <a:r>
+              <a:t>A3_TMATCH_CI = [-0.044567720544638006, 0.033712074154716665] &lt;- s26/results/a3_stats.json :: .../ci95_fold</a:t>
+            </a:r>
+          </a:p>
+          <a:p>
+            <a:r>
+              <a:t>A3_TMATCH_EFFECT = 0.00337521 &lt;- s26/results/a3_stats.json :: contrasts/'rmsd_q_synth:fixed_zraw_Tmatch_it50-fixed_zrank_it50'/effect [built_chain (rmsd_q_synth)]</a:t>
+            </a:r>
+          </a:p>
+          <a:p>
+            <a:r>
+              <a:t>A3_TMATCH_X = 0.0441629 &lt;- s26/results/a3_stats.json :: .../'rmsd_q_synth:fixed_zraw_Tmatch_it50-fixed_zrank_it50'/effect_over_mde</a:t>
+            </a:r>
+          </a:p>
+          <a:p>
+            <a:r>
+              <a:t>A4_BOOT_A1_DIFF_HI = 0.722014 &lt;- s26/results/q_var_boot.json :: the same, ci95[1] (max) (DERIVED)</a:t>
+            </a:r>
+          </a:p>
+          <a:p>
+            <a:r>
+              <a:t>A4_BOOT_A1_DIFF_LO = 0.231548 &lt;- s26/results/q_var_boot.json :: results/ci/{linear_alpha1_T0,deployed_a1_T03}/{grown_V,grown_L2}/diff_vs_fixed/ci95[0] (min) (DERIVED)</a:t>
+            </a:r>
+          </a:p>
+          <a:p>
+            <a:r>
+              <a:t>A4_BOOT_L2_A025_DIFF = -0.0563583 &lt;- s26/results/q_var_boot.json :: results/ci/deployed_a025_T03/grown_L2/diff_vs_fixed/point</a:t>
+            </a:r>
+          </a:p>
+          <a:p>
+            <a:r>
+              <a:t>A4_BOOT_L2_A025_DIFF_CI = [-0.18238797531641576, 0.08659155386171181] &lt;- s26/results/q_var_boot.json :: results/ci/deployed_a025_T03/grown_L2/diff_vs_fixed/ci95</a:t>
+            </a:r>
+          </a:p>
+          <a:p>
+            <a:r>
+              <a:t>A4_BOOT_REPRO = 0 &lt;- s26/results/q_var_boot.json :: results/repro_worst_rel</a:t>
             </a:r>
           </a:p>
           <a:p>
@@ -2642,7 +2972,7 @@
           </a:p>
           <a:p>
             <a:r>
-              <a:t>Direction B was: use a large pretrained folding model as the distance prior. Step one asked whether such a model can run here. The answer is no, on three independent grounds. The checkpoints are not on disk and total 8.45 gigabytes. The code needs two packages that are absent, and one of them wants Python 3.9 or lower; this box runs 3.13 on a CPU. And the model needs at least 8.76 gigabytes resident against 4.4 gigabytes of headroom; even at half precision everywhere it is 7.4. Two feasible-scale checks are pending: the contact head alone, and an 8-million-parameter language model against the 650-million one. A third asks whether the targets where the pipeline beats a sequence-only predictor are recognisable without the native. The pipeline wins there by 0.56 angstroms, 89 targets to 37. If those checks are null, B is replaced by the same paper that replaces A. The paper says what a force field's Pauli spectrum does and does not predict. Chain geometry fixes which residues a distance can depend on; that is an exact theorem. That fixes the energy's Pauli spectrum, once the raw force field's clash spike is conditioned away. The spectrum times the circuit's own kernel predicts the measured gradient variance with no free parameter: the median ratio is 0.997 over 104 cells. This sprint added the algebra, the product-state target and the ADAPT null. The paper will not claim an advantage, and it will not call a small gradient a plateau.</a:t>
+              <a:t>Proposal B wanted to swap our distance prior for a large pretrained folding model. We measured whether that can even run here: it cannot. ESMFold needs about 8.8 gigabytes resident and a GPU-era dependency chain, and this machine had 4.4 gigabytes of headroom and no CUDA. So we measured the part of that idea that does fit. Our prior already reads a 650-million-parameter protein language model; removing it costs 0.21 angstroms on the built chain and 0.33 on selection, five folds out of five. An 8-million-parameter model loses all of that, and two thirds of the selection value sits in the model's contact head. We also asked whether we could tell, without the answer, which targets the pipeline beats a sequence-only predictor on, to route between them. We cannot: a classifier is at chance, and the only predictable thing is how much a constant helix loses, set by how strand-like the retrieved pool is. Our verdict is replace. The replacement is the trainability paper, and it is what we publish: chain geometry fixes which residues a distance can depend on, an exact theorem; that fixes the energy's Pauli spectrum once the raw force field's clash spike is conditioned away; and the spectrum times the circuit's own kernel predicts the measured gradient variance with no free parameter, a median ratio of 0.997 over 104 cells. This sprint added the algebra, the product-state target and the ADAPT null. The one untested input, a larger language model, needs a larger machine.</a:t>
             </a:r>
           </a:p>
           <a:p/>
@@ -2653,7 +2983,7 @@
           </a:p>
           <a:p>
             <a:r>
-              <a:t>B1 verdict: "NO" (`s26/results/b1_feasibility.json`, L13). The one part of a large pretrained model this box already consumes is the ESM-2 650M embedding and its contact head, already 13 of the shipped prior's 183 input columns; its S7 selection value (a document-only -0.288 A whose per-target artefact is lost, L11) is not on this slide and is re-measured by C2's noesm and pca32 rungs. B3 arms, built chains, persisted: pipeline 3.2148, sequence-only torsion predictor 3.7705, constant helix 4.0648; torsion predictor minus pipeline +0.5557 (median +0.2314, SE 0.1318, MDE 0.3694, 37W/89L); the characterisability test (nested ridge against a permutation null) is pending in `s26/results/p_b3.json`. Replacement claims and their artefacts: C1 locality theorem (`s13/results/qarch_locality_geom.json`); C2 raw AMBER's delta-spike spectrum (`s13/results/walsh_xval.json`); C4 spectrum x kernel predicts the gradient variance, median measured/predicted 0.9969 over 104 cells (`s13/results/geo_pauli.json`); C5 the kernel is flat in Pauli weight at depth &gt;= 3 (`s13/results/geo_kernel.json`); C7 the width sweep, slopes -0.649 / -0.252 / -0.047 / -0.311 / -0.243 (`s25/results/q_plateau.json`); C8 the DLA is the full so(2^n) from depth 2 at n = 7, dim 8,128 (`s26/results/q_dla.json`, slide 6); C9 ADAPT-grown circuits at alpha = 1 are product circuits (`s26/results/q_dla.json` adapt sets, `s26/results/q_var.json` slopes; slide 8); C10 the optimiser trains and the readout cannot tell, 0.902 nats, 0.24 x MDE (`s25/results/q_gibbs.json`, `q_alpha.json`); C11 the set-equality theorem, 2,592 cells, 0 violations (`s25/results/q_verify.json`); C12 the deployed Gibbs target is a product state, KL 7.2e-17 ideal, 5.4e-05 on 1A13 (`s26/results/probe/1A13.json`). Venue statement: every number is noiseless exact simulation; a submission would add a noise model, width beyond n = 13, a 2-design control, seeds and error bars on every variance.</a:t>
+              <a:t>Verdict REPLACE, final (`s26/PROPOSAL_B.md`, commit a88ea259; coordinator L117; Adversary L120 STANDS). B1 (L13): "NO"; 8.45 GB of checkpoints not on disk; openfold and omegaconf absent, Python 3.13 vs &lt;= 3.9; 8.76 GB resident against 4.4 GB, fp16 everywhere 7.4. B2, the feasible-scale ladder (L62, L63, L99/L101; every rung through one path, built chain on the rebuild basis 3.2126, L57): noesm +0.208 A (SE 0.073, MDE 0.205, 1.01 x, fold CI [+0.0986, +0.3942], 5/5, 47W/79L; selection +0.330 at 1.27 x, fold CI [+0.2122, +0.4475]); conly +0.122 (0.62 x, fold CI [-0.0350, +0.2674], 4/5; selection +0.112 at 0.42 x); esm8m +0.242 (1.17 x, fold CI [+0.1134, +0.3853], 5/5; selection +0.225 at 0.88 x); the retrained shipped recipe (pca32) is the identity on 126 of 126. Isolations: the contact head alone (conly minus noesm) -0.218 on selection (L63: 1.00x MDE, fold CI [-0.374, -0.037], 4/5) and -0.086 on the built chain; the 8M model minus no ESM +0.034 on the built chain (L99: 0.15x MDE). B3 (L106, L107, `s26/results/p_b3.json`): sign classifier balanced accuracy 0.522 against the sequence-only predictor (permutation null 95th percentile 0.578) and 0.557 against the constant helix (null 0.566); the SIZE of the gain over the helix is partly predictable, held-out R2 0.40, squared-error reduction -1.19 x MDE, fold CI [-1.4948, -0.6998], carried by the pool's strand content (Pearson -0.638 between the top-75 strand fraction and arm minus helix); on the ORACLE stratum FAIL18 the sequence-only predictor wins by +0.463 A and nothing native-free locates it. The two-minute script above is lane P's, with the numbers read from the artefacts. The trainability paper (`s26/PROPOSAL_B_REPLACEMENT.md`, lane Q): C1 locality theorem (`s13/results/qarch_locality_geom.json`); C2 raw AMBER's delta-spike spectrum (`s13/results/walsh_xval.json`); C4 spectrum x kernel, median measured/predicted 0.9969 over 104 cells (`s13/results/geo_pauli.json`); C5 the kernel flat in Pauli weight at depth &gt;= 3 (`s13/results/geo_kernel.json`); C7 the width sweep, slopes -0.649 / -0.252 / -0.047 / -0.311 / -0.243 (`s25/results/q_plateau.json`); C8 the DLA, dim 8,128 = so(128) from depth 2 at n = 7 (`s26/results/q_dla.json`, slide 6); C9 the grown circuits (`s26/results/q_var.json`, slide 8); C10 the optimiser trains and the readout cannot tell, 0.902 nats, 0.24 x MDE (`s25/results/q_gibbs.json`, `q_alpha.json`); C11 the set-equality theorem, 2,592 cells, 0 violations (`s25/results/q_verify.json`); C12 the product-state target, KL to the product of marginals at most 7.9e-04 on 126 targets and the A1 null -0.0222 A at -0.36 x MDE (`s26/results/a1/*.json`, `a1_stats.json`, slide 8). Venue statement: every number is noiseless exact simulation; a submission would add a noise model, width beyond n = 13, a 2-design control, seeds and error bars on every variance. Scope of the checking (L120, L122): the S26 additions are Adversary-checked (A2 L45; A4 L47 with the L119 intervals, the alpha = 0.25 grown minus fixed slope difference -0.056, 95% CI [-0.1824, +0.0866], and the alpha = 1 grown minus fixed differences +0.23 to +0.72 with every interval excluding zero; the product-state fact L70); the S13 inputs (C1, C2, C4, C5 above) are cited from their artefacts without an S26 re-check, and the S13 Pauli mean weights 2.236 / 3.015 are not on any slide. The lost S7 ESM number (-0.288 A, L11) is not on the slide; its re-measurement is C2_NOESM_SEL.</a:t>
             </a:r>
           </a:p>
           <a:p/>
@@ -2664,7 +2994,42 @@
           </a:p>
           <a:p>
             <a:r>
-              <a:t>ARM_MEAN = 3.21477 &lt;- bench_results/baseline_tuning126.json :: science/rmsd_arm/mean [built_chain]</a:t>
+              <a:t>A1_KL_PRODUCT_MAX = 0.000790053 &lt;- s26/results/a1/*.json :: product_diagnostics/zrank/kl_gibbs_to_product (max over 126) (DERIVED)</a:t>
+            </a:r>
+          </a:p>
+          <a:p>
+            <a:r>
+              <a:t>A1_N_RECORDS = 126 &lt;- s26/results/a1/&lt;pdb&gt;.json (count) (DERIVED)</a:t>
+            </a:r>
+          </a:p>
+          <a:p>
+            <a:r>
+              <a:t>A1_V_EFFECT = -0.0221533 &lt;- s26/results/a1_stats.json :: contrasts/'rmsd_q_synth:adaptV_adam_best_zrank_P21-fixed_zrank_it50'/effect [built_chain (rmsd_q_synth: the production projection of the weighted average, both sides)]</a:t>
+            </a:r>
+          </a:p>
+          <a:p>
+            <a:r>
+              <a:t>A1_V_X = -0.364319 &lt;- s26/results/a1_stats.json :: contrasts/'rmsd_q_synth:adaptV_adam_best_zrank_P21-fixed_zrank_it50'/effect_over_mde</a:t>
+            </a:r>
+          </a:p>
+          <a:p>
+            <a:r>
+              <a:t>A4_BOOT_A1_DIFF_HI = 0.722014 &lt;- s26/results/q_var_boot.json :: the same, ci95[1] (max) (DERIVED)</a:t>
+            </a:r>
+          </a:p>
+          <a:p>
+            <a:r>
+              <a:t>A4_BOOT_A1_DIFF_LO = 0.231548 &lt;- s26/results/q_var_boot.json :: results/ci/{linear_alpha1_T0,deployed_a1_T03}/{grown_V,grown_L2}/diff_vs_fixed/ci95[0] (min) (DERIVED)</a:t>
+            </a:r>
+          </a:p>
+          <a:p>
+            <a:r>
+              <a:t>A4_BOOT_L2_A025_DIFF = -0.0563583 &lt;- s26/results/q_var_boot.json :: results/ci/deployed_a025_T03/grown_L2/diff_vs_fixed/point</a:t>
+            </a:r>
+          </a:p>
+          <a:p>
+            <a:r>
+              <a:t>A4_BOOT_L2_A025_DIFF_CI = [-0.18238797531641576, 0.08659155386171181] &lt;- s26/results/q_var_boot.json :: results/ci/deployed_a025_T03/grown_L2/diff_vs_fixed/ci95</a:t>
             </a:r>
           </a:p>
           <a:p>
@@ -2694,32 +3059,187 @@
           </a:p>
           <a:p>
             <a:r>
-              <a:t>B3_TORS_L = 89 &lt;- same rows, targets where the pipeline wins (DERIVED)</a:t>
-            </a:r>
-          </a:p>
-          <a:p>
-            <a:r>
-              <a:t>B3_TORS_MINUS_ARM = 0.555693 &lt;- s13/cache/tors_rows.npz['a_pepPos'][*]/rmsd_build minus bench_results/cache/1fc9f2dcf489e2fb/&lt;pdb&gt;.json :: rmsd_arm (paired mean) [built_chain] (DERIVED)</a:t>
-            </a:r>
-          </a:p>
-          <a:p>
-            <a:r>
-              <a:t>B3_TORS_MINUS_ARM_MDE = 0.369361 &lt;- same rows, 2.8016 x SE (DERIVED)</a:t>
-            </a:r>
-          </a:p>
-          <a:p>
-            <a:r>
-              <a:t>B3_TORS_MINUS_ARM_MEDIAN = 0.231395 &lt;- same rows, paired median [built_chain] (DERIVED)</a:t>
-            </a:r>
-          </a:p>
-          <a:p>
-            <a:r>
-              <a:t>B3_TORS_MINUS_ARM_SE = 0.131839 &lt;- same rows, SE of the paired mean (DERIVED)</a:t>
-            </a:r>
-          </a:p>
-          <a:p>
-            <a:r>
-              <a:t>B3_TORS_W = 37 &lt;- same rows, targets where the torsion predictor beats the pipeline (DERIVED)</a:t>
+              <a:t>B2_CONLY_MINUS_NOESM_ARM = -0.0855745 &lt;- the same on rows[*]/arm [built_chain (rebuild basis)] (DERIVED)</a:t>
+            </a:r>
+          </a:p>
+          <a:p>
+            <a:r>
+              <a:t>B2_CONLY_MINUS_NOESM_SEL = -0.218274 &lt;- s26/results/p_ladder_conly_s0.json and p_ladder_noesm_s0.json :: rows[*]/sel (paired mean difference) [s8_selection] (DERIVED)</a:t>
+            </a:r>
+          </a:p>
+          <a:p>
+            <a:r>
+              <a:t>B2_ESM8M_MINUS_NOESM_ARM = 0.0339645 &lt;- s26/results/p_ladder_esm8m_s0.json and p_ladder_noesm_s0.json :: rows[*]/arm (paired mean difference) [built_chain (rebuild basis)] (DERIVED)</a:t>
+            </a:r>
+          </a:p>
+          <a:p>
+            <a:r>
+              <a:t>B3_BACC_HELIX = 0.556516 &lt;- s26/results/p_b3.json :: vs_helix/balanced_acc</a:t>
+            </a:r>
+          </a:p>
+          <a:p>
+            <a:r>
+              <a:t>B3_BACC_TORS = 0.521561 &lt;- s26/results/p_b3.json :: vs_tors/balanced_acc</a:t>
+            </a:r>
+          </a:p>
+          <a:p>
+            <a:r>
+              <a:t>B3_FAIL18_TORS = 0.463126 &lt;- s26/results/p_b3.json :: oracle_stratum_FAIL18/d_tors_FAIL18 [built_chain]</a:t>
+            </a:r>
+          </a:p>
+          <a:p>
+            <a:r>
+              <a:t>B3_MSE_CI_HELIX = [-1.4948132091199144, -0.6997898256339864] &lt;- s26/results/p_b3.json :: vs_helix/mse_reduction/ci95_fold</a:t>
+            </a:r>
+          </a:p>
+          <a:p>
+            <a:r>
+              <a:t>B3_MSE_X_HELIX = -1.19373 &lt;- s26/results/p_b3.json :: vs_helix/mse_reduction/effect_over_mde</a:t>
+            </a:r>
+          </a:p>
+          <a:p>
+            <a:r>
+              <a:t>B3_NULL95_HELIX = 0.566157 &lt;- s26/results/p_b3.json :: vs_helix/null_p95</a:t>
+            </a:r>
+          </a:p>
+          <a:p>
+            <a:r>
+              <a:t>B3_NULL95_TORS = 0.578151 &lt;- s26/results/p_b3.json :: vs_tors/null_p95</a:t>
+            </a:r>
+          </a:p>
+          <a:p>
+            <a:r>
+              <a:t>B3_R2_HELIX = 0.404344 &lt;- s26/results/p_b3.json :: vs_helix/heldout_r2</a:t>
+            </a:r>
+          </a:p>
+          <a:p>
+            <a:r>
+              <a:t>B3_RHO_SSE_HELIX = -0.637705 &lt;- s26/results/p_b3_features.json :: rows[*]/ss_E against (production rmsd_arm minus s14/results/ladder.json :: per_target/L0_constant_helix), Pearson (DERIVED)</a:t>
+            </a:r>
+          </a:p>
+          <a:p>
+            <a:r>
+              <a:t>C2_ANCHOR_ARM = 3.21263 &lt;- s26/results/p_ladder_report_shipped_s0.json :: arm/mean [built_chain (leaderboard-rebuild basis, L57)]</a:t>
+            </a:r>
+          </a:p>
+          <a:p>
+            <a:r>
+              <a:t>C2_CONLY_ARM = 0.122273 &lt;- s26/results/p_ladder_report_conly_s0.json :: stats/arm/effect [built_chain (rebuild basis 3.2126, L57)]</a:t>
+            </a:r>
+          </a:p>
+          <a:p>
+            <a:r>
+              <a:t>C2_CONLY_ARM_CI = [-0.0349670129156046, 0.2674009333267108] &lt;- s26/results/p_ladder_report_conly_s0.json :: stats/arm/ci95_fold</a:t>
+            </a:r>
+          </a:p>
+          <a:p>
+            <a:r>
+              <a:t>C2_CONLY_ARM_FOLDS = 4 &lt;- s26/results/p_ladder_report_conly_s0.json :: stats/arm/folds_same_sign</a:t>
+            </a:r>
+          </a:p>
+          <a:p>
+            <a:r>
+              <a:t>C2_CONLY_ARM_X = 0.616581 &lt;- s26/results/p_ladder_report_conly_s0.json :: stats/arm/effect_over_mde</a:t>
+            </a:r>
+          </a:p>
+          <a:p>
+            <a:r>
+              <a:t>C2_CONLY_SEL = 0.111602 &lt;- s26/results/p_ladder_report_conly_s0.json :: stats/sel/effect [s8_selection]</a:t>
+            </a:r>
+          </a:p>
+          <a:p>
+            <a:r>
+              <a:t>C2_CONLY_SEL_X = 0.419527 &lt;- s26/results/p_ladder_report_conly_s0.json :: stats/sel/effect_over_mde</a:t>
+            </a:r>
+          </a:p>
+          <a:p>
+            <a:r>
+              <a:t>C2_ESM8M_ARM = 0.241812 &lt;- s26/results/p_ladder_report_esm8m_s0.json :: stats/arm/effect [built_chain (rebuild basis 3.2126, L57)]</a:t>
+            </a:r>
+          </a:p>
+          <a:p>
+            <a:r>
+              <a:t>C2_ESM8M_ARM_CI = [0.11339351234211517, 0.3853393140498519] &lt;- s26/results/p_ladder_report_esm8m_s0.json :: stats/arm/ci95_fold</a:t>
+            </a:r>
+          </a:p>
+          <a:p>
+            <a:r>
+              <a:t>C2_ESM8M_ARM_FOLDS = 5 &lt;- s26/results/p_ladder_report_esm8m_s0.json :: stats/arm/folds_same_sign</a:t>
+            </a:r>
+          </a:p>
+          <a:p>
+            <a:r>
+              <a:t>C2_ESM8M_ARM_X = 1.16581 &lt;- s26/results/p_ladder_report_esm8m_s0.json :: stats/arm/effect_over_mde</a:t>
+            </a:r>
+          </a:p>
+          <a:p>
+            <a:r>
+              <a:t>C2_ESM8M_SEL = 0.224616 &lt;- s26/results/p_ladder_report_esm8m_s0.json :: stats/sel/effect [s8_selection]</a:t>
+            </a:r>
+          </a:p>
+          <a:p>
+            <a:r>
+              <a:t>C2_ESM8M_SEL_X = 0.878594 &lt;- s26/results/p_ladder_report_esm8m_s0.json :: stats/sel/effect_over_mde</a:t>
+            </a:r>
+          </a:p>
+          <a:p>
+            <a:r>
+              <a:t>C2_NOESM_ARM = 0.207848 &lt;- s26/results/p_ladder_report_noesm_s0.json :: stats/arm/effect [built_chain (rebuild basis 3.2126, L57)]</a:t>
+            </a:r>
+          </a:p>
+          <a:p>
+            <a:r>
+              <a:t>C2_NOESM_ARM_CI = [0.09855816866912079, 0.39421059397275443] &lt;- s26/results/p_ladder_report_noesm_s0.json :: stats/arm/ci95_fold</a:t>
+            </a:r>
+          </a:p>
+          <a:p>
+            <a:r>
+              <a:t>C2_NOESM_ARM_FOLDS = 5 &lt;- s26/results/p_ladder_report_noesm_s0.json :: stats/arm/folds_same_sign</a:t>
+            </a:r>
+          </a:p>
+          <a:p>
+            <a:r>
+              <a:t>C2_NOESM_ARM_L = 79 &lt;- s26/results/p_ladder_report_noesm_s0.json :: stats/arm/n_worse</a:t>
+            </a:r>
+          </a:p>
+          <a:p>
+            <a:r>
+              <a:t>C2_NOESM_ARM_MDE = 0.205442 &lt;- s26/results/p_ladder_report_noesm_s0.json :: stats/arm/mde</a:t>
+            </a:r>
+          </a:p>
+          <a:p>
+            <a:r>
+              <a:t>C2_NOESM_ARM_SE = 0.0733301 &lt;- s26/results/p_ladder_report_noesm_s0.json :: stats/arm/se</a:t>
+            </a:r>
+          </a:p>
+          <a:p>
+            <a:r>
+              <a:t>C2_NOESM_ARM_W = 47 &lt;- s26/results/p_ladder_report_noesm_s0.json :: stats/arm/n_better</a:t>
+            </a:r>
+          </a:p>
+          <a:p>
+            <a:r>
+              <a:t>C2_NOESM_ARM_X = 1.01171 &lt;- s26/results/p_ladder_report_noesm_s0.json :: stats/arm/effect_over_mde</a:t>
+            </a:r>
+          </a:p>
+          <a:p>
+            <a:r>
+              <a:t>C2_NOESM_SEL = 0.329877 &lt;- s26/results/p_ladder_report_noesm_s0.json :: stats/sel/effect [s8_selection]</a:t>
+            </a:r>
+          </a:p>
+          <a:p>
+            <a:r>
+              <a:t>C2_NOESM_SEL_CI = [0.21223500867684683, 0.4475182609425651] &lt;- s26/results/p_ladder_report_noesm_s0.json :: stats/sel/ci95_fold</a:t>
+            </a:r>
+          </a:p>
+          <a:p>
+            <a:r>
+              <a:t>C2_NOESM_SEL_X = 1.27407 &lt;- s26/results/p_ladder_report_noesm_s0.json :: stats/sel/effect_over_mde</a:t>
+            </a:r>
+          </a:p>
+          <a:p>
+            <a:r>
+              <a:t>C2_PCA32_ARM_T = 126 &lt;- s26/results/p_ladder_report_pca32_s0.json :: stats/arm/n_tied</a:t>
             </a:r>
           </a:p>
           <a:p>
@@ -2729,11 +3249,6 @@
           </a:p>
           <a:p>
             <a:r>
-              <a:t>HELIX = 4.06475 &lt;- s12/results/s14_ladder.json :: rows/L0_constant_helix/mean [built_chain]</a:t>
-            </a:r>
-          </a:p>
-          <a:p>
-            <a:r>
               <a:t>PAULI_N_CELLS = 104 &lt;- s13/results/geo_pauli.json :: len(cells)</a:t>
             </a:r>
           </a:p>
@@ -2744,16 +3259,6 @@
           </a:p>
           <a:p>
             <a:r>
-              <a:t>PROD_KL_1A13 = 5.43789e-05 &lt;- s26/results/probe/1A13.json :: product_diagnostics/zrank/kl_gibbs_to_product</a:t>
-            </a:r>
-          </a:p>
-          <a:p>
-            <a:r>
-              <a:t>PROD_KL_IDEAL = 7.23403e-17 &lt;- s26/results/probe/1A13.json :: product_diagnostics/ideal_ladder/kl_gibbs_to_product</a:t>
-            </a:r>
-          </a:p>
-          <a:p>
-            <a:r>
               <a:t>Q_CELLS = 2592 &lt;- s25/results/q_verify.json :: results/n_cells</a:t>
             </a:r>
           </a:p>
@@ -2795,11 +3300,6 @@
           <a:p>
             <a:r>
               <a:t>SLOPE_LIN = -0.649187 &lt;- s25/results/q_plateau.json :: results/linear_alpha1_T0/log2_slope_per_qubit</a:t>
-            </a:r>
-          </a:p>
-          <a:p>
-            <a:r>
-              <a:t>TORS = 3.77046 &lt;- s13/results/tors_eval.json :: reports/a_pepPos/build/mean [built_chain]</a:t>
             </a:r>
           </a:p>
         </p:txBody>
@@ -6113,7 +6613,7 @@
                 </a:solidFill>
                 <a:latin typeface="Calibri"/>
               </a:rPr>
-              <a:t>Direction C: learn a better distance prior; physics for validity, not accuracy</a:t>
+              <a:t>Direction C (verdict KEEP WITH EDITS): learn a better prior; physics for validity only</a:t>
             </a:r>
           </a:p>
         </p:txBody>
@@ -6182,7 +6682,7 @@
                 </a:solidFill>
                 <a:latin typeface="Calibri"/>
               </a:rPr>
-              <a:t>10 / 11    from s26/PROPOSAL_C.md (DRAFT, lane P) and s26/C3_RESULT.md (lane PH, L39, Adversary L46); verdict PENDING C2 to C5</a:t>
+              <a:t>10 / 11    from s26/PROPOSAL_C.md (lane P, 0a85323f with addendum 1) and s26/C3_RESULT.md addenda 1 to 4 (lane PH); verdicts L117 / L120; C2 basis: built chain, rebuild 3.2126 (L57)</a:t>
             </a:r>
           </a:p>
         </p:txBody>
@@ -6196,7 +6696,7 @@
         <p:spPr>
           <a:xfrm>
             <a:off x="548640" y="1280160"/>
-            <a:ext cx="5669280" cy="5120640"/>
+            <a:ext cx="5760720" cy="5120640"/>
           </a:xfrm>
           <a:prstGeom prst="rect">
             <a:avLst/>
@@ -6211,161 +6711,145 @@
           <a:p>
             <a:pPr>
               <a:spcAft>
-                <a:spcPts val="300"/>
+                <a:spcPts val="200"/>
               </a:spcAft>
             </a:pPr>
             <a:r>
-              <a:rPr sz="1200" b="1">
+              <a:rPr sz="1050" b="1">
                 <a:solidFill>
                   <a:srgbClr val="F2A93B"/>
                 </a:solidFill>
                 <a:latin typeface="Calibri"/>
               </a:rPr>
-              <a:t>What the proposal says</a:t>
+              <a:t>What the proposal says, and the four edits</a:t>
             </a:r>
           </a:p>
           <a:p>
             <a:pPr>
               <a:spcAft>
-                <a:spcPts val="300"/>
+                <a:spcPts val="200"/>
               </a:spcAft>
             </a:pPr>
             <a:r>
-              <a:rPr sz="1200" b="0">
+              <a:rPr sz="1050" b="0">
                 <a:solidFill>
                   <a:srgbClr val="ECECF0"/>
                 </a:solidFill>
                 <a:latin typeface="Calibri"/>
               </a:rPr>
-              <a:t>• The prior bounds the accuracy; improve it by learning: better inputs (C2), physics kept honest (C3), routers for the per-target set size (C4), a learned correction of the common-mode error (C5); C1 reproduces the closures first.</a:t>
+              <a:t>• the prior bounds the accuracy; the premise is right and the four items are wrong as stated: learn a better PRIOR, not a ranker; AMBER for validity only; the routers are closed; C5 was running at the file's stamp (126 rows checkpointed at this build, complete = False: not a result) and keeps its pre-registration</a:t>
             </a:r>
           </a:p>
           <a:p>
             <a:pPr>
               <a:spcAft>
-                <a:spcPts val="300"/>
+                <a:spcPts val="200"/>
               </a:spcAft>
             </a:pPr>
             <a:r>
-              <a:rPr sz="1200" b="0">
-                <a:solidFill>
-                  <a:srgbClr val="ECECF0"/>
-                </a:solidFill>
-                <a:latin typeface="Calibri"/>
-              </a:rPr>
-              <a:t>• Not 'learn a better ranker': ranking inside the pool is closed at four levels; the prior is the only steep lever.</a:t>
+              <a:rPr sz="1050" b="1">
+                <a:solidFill>
+                  <a:srgbClr val="F2A93B"/>
+                </a:solidFill>
+                <a:latin typeface="Calibri"/>
+              </a:rPr>
+              <a:t>C1, final: the closures reproduce to the third decimal</a:t>
             </a:r>
           </a:p>
           <a:p>
             <a:pPr>
               <a:spcAft>
-                <a:spcPts val="300"/>
+                <a:spcPts val="200"/>
               </a:spcAft>
             </a:pPr>
             <a:r>
-              <a:rPr sz="1200" b="1">
-                <a:solidFill>
-                  <a:srgbClr val="F2A93B"/>
-                </a:solidFill>
-                <a:latin typeface="Calibri"/>
-              </a:rPr>
-              <a:t>C1, final: the closures reproduce to the third decimal</a:t>
+              <a:rPr sz="1050" b="0">
+                <a:solidFill>
+                  <a:srgbClr val="ECECF0"/>
+                </a:solidFill>
+                <a:latin typeface="Calibri"/>
+              </a:rPr>
+              <a:t>• set-transformer ranker 3.043 to 3.026 A real vs 2.534 to 2.146 with a leaked label; perfect ranker in the top-25 2.609 vs random 3.468</a:t>
             </a:r>
           </a:p>
           <a:p>
             <a:pPr>
               <a:spcAft>
-                <a:spcPts val="300"/>
+                <a:spcPts val="200"/>
               </a:spcAft>
             </a:pPr>
             <a:r>
-              <a:rPr sz="1200" b="0">
-                <a:solidFill>
-                  <a:srgbClr val="ECECF0"/>
-                </a:solidFill>
-                <a:latin typeface="Calibri"/>
-              </a:rPr>
-              <a:t>• set-transformer ranker, real features: 3.043 (n = 8) to 3.026 A (full); with a leaked label 2.534 to 2.146 (ORACLE; weighted-average basis)</a:t>
+              <a:rPr sz="1050" b="1">
+                <a:solidFill>
+                  <a:srgbClr val="F2A93B"/>
+                </a:solidFill>
+                <a:latin typeface="Calibri"/>
+              </a:rPr>
+              <a:t>C2, final: nine rungs of prior inputs, none beats the shipped prior</a:t>
             </a:r>
           </a:p>
           <a:p>
             <a:pPr>
               <a:spcAft>
-                <a:spcPts val="300"/>
+                <a:spcPts val="200"/>
               </a:spcAft>
             </a:pPr>
             <a:r>
-              <a:rPr sz="1200" b="0">
+              <a:rPr sz="1050" b="0">
                 <a:solidFill>
                   <a:srgbClr val="ECECF0"/>
                 </a:solidFill>
                 <a:latin typeface="Calibri"/>
               </a:rPr>
-              <a:t>• perfect ranker inside the shipped top-25: 2.609 A vs random member 3.468 and distogram argmin 3.454 (single window)</a:t>
+              <a:t>• the retrained shipped recipe reproduces the pipeline on 126/126 targets; removing the ESM-2 650M channel costs +0.208 A built chain / +0.330 A selection (5/5 folds); an 8M model carries none of it (+0.242 A)</a:t>
             </a:r>
           </a:p>
           <a:p>
             <a:pPr>
               <a:spcAft>
-                <a:spcPts val="300"/>
+                <a:spcPts val="200"/>
               </a:spcAft>
             </a:pPr>
             <a:r>
-              <a:rPr sz="1200" b="1">
-                <a:solidFill>
-                  <a:srgbClr val="F2A93B"/>
-                </a:solidFill>
-                <a:latin typeface="Calibri"/>
-              </a:rPr>
-              <a:t>C2, running: the prior-input ladder</a:t>
+              <a:rPr sz="1050" b="0">
+                <a:solidFill>
+                  <a:srgbClr val="ECECF0"/>
+                </a:solidFill>
+                <a:latin typeface="Calibri"/>
+              </a:rPr>
+              <a:t>• every other variant (contact head only, per-fold PCA 32 / 128, 2.7x capacity, triangle update, pool-histogram mix) lands within +0.018 to +0.122 A of the shipped prior, under MDEs of 0.13 to 0.20 A; the mix rung chooses lam = 0 on 5/5 folds; raw: 3 of 5 folds trained, not evaluated</a:t>
             </a:r>
           </a:p>
           <a:p>
             <a:pPr>
               <a:spcAft>
-                <a:spcPts val="300"/>
+                <a:spcPts val="200"/>
               </a:spcAft>
             </a:pPr>
             <a:r>
-              <a:rPr sz="1200" b="0">
-                <a:solidFill>
-                  <a:srgbClr val="ECECF0"/>
-                </a:solidFill>
-                <a:latin typeface="Calibri"/>
-              </a:rPr>
-              <a:t>• 11 rungs (no ESM, contact head only, pca32, pca32f, pca128, raw, 8M vs 650M, wide, pairnet, mix); 7 rungs have all five fold models on disk; evaluations running</a:t>
+              <a:rPr sz="1050" b="1">
+                <a:solidFill>
+                  <a:srgbClr val="F2A93B"/>
+                </a:solidFill>
+                <a:latin typeface="Calibri"/>
+              </a:rPr>
+              <a:t>C4, final: routers closed for the seventh and eighth time</a:t>
             </a:r>
           </a:p>
           <a:p>
             <a:pPr>
               <a:spcAft>
-                <a:spcPts val="300"/>
+                <a:spcPts val="200"/>
               </a:spcAft>
             </a:pPr>
             <a:r>
-              <a:rPr sz="1200" b="0">
+              <a:rPr sz="1050" b="0">
                 <a:solidFill>
                   <a:srgbClr val="ECECF0"/>
                 </a:solidFill>
                 <a:latin typeface="Calibri"/>
               </a:rPr>
-              <a:t>• falsifier, fixed before the first run: beat the shipped posterior on the built chain by more than its own MDE, fold-clustered CI excluding zero, 5/5 folds</a:t>
-            </a:r>
-          </a:p>
-          <a:p>
-            <a:pPr>
-              <a:spcAft>
-                <a:spcPts val="300"/>
-              </a:spcAft>
-            </a:pPr>
-            <a:r>
-              <a:rPr sz="1200" b="0">
-                <a:solidFill>
-                  <a:srgbClr val="ECECF0"/>
-                </a:solidFill>
-                <a:latin typeface="Calibri"/>
-              </a:rPr>
-              <a:t>• anchor: selection and point cloud reproduce the production cache (0e+00, 7.3e-14); built chain on the rebuild basis 3.2126 A (L57)</a:t>
+              <a:t>• 12 m* routers on four new feature blocks: 11 harmful, largest +0.068 A (0.91 x MDE), none clears its MDE; 6 s* routers all with the wrong sign (rho -0.21 to -0.10), costing +0.007 to +0.027 A (point cloud)</a:t>
             </a:r>
           </a:p>
         </p:txBody>
@@ -6378,8 +6862,8 @@
         </p:nvSpPr>
         <p:spPr>
           <a:xfrm>
-            <a:off x="6446520" y="1280160"/>
-            <a:ext cx="5349240" cy="5120640"/>
+            <a:off x="6492240" y="1280160"/>
+            <a:ext cx="5303520" cy="5120640"/>
           </a:xfrm>
           <a:prstGeom prst="rect">
             <a:avLst/>
@@ -6394,11 +6878,11 @@
           <a:p>
             <a:pPr>
               <a:spcAft>
-                <a:spcPts val="300"/>
+                <a:spcPts val="200"/>
               </a:spcAft>
             </a:pPr>
             <a:r>
-              <a:rPr sz="1200" b="1">
+              <a:rPr sz="1050" b="1">
                 <a:solidFill>
                   <a:srgbClr val="F2A93B"/>
                 </a:solidFill>
@@ -6410,113 +6894,81 @@
           <a:p>
             <a:pPr>
               <a:spcAft>
-                <a:spcPts val="300"/>
+                <a:spcPts val="200"/>
               </a:spcAft>
             </a:pPr>
             <a:r>
-              <a:rPr sz="1200" b="0">
+              <a:rPr sz="1050" b="0">
                 <a:solidFill>
                   <a:srgbClr val="ECECF0"/>
                 </a:solidFill>
                 <a:latin typeface="Calibri"/>
               </a:rPr>
-              <a:t>• the production relaxation moves the built chain 0.220 A and costs +0.0207 A (fold CI [+0.0154, +0.0290]), 2.16 x MDE (relaxed minus built chain)</a:t>
+              <a:t>• the production relaxation moves the built chain 0.220 A and costs +0.0207 A (fold CI [+0.0154, +0.0290], 2.16 x MDE); a random move of the same size costs +0.0096; AMBER minus random +0.0111 (5/5 folds, 1.12 x MDE: Type-M, sign measured, size an upper bound; replicated +0.0100)</a:t>
             </a:r>
           </a:p>
           <a:p>
             <a:pPr>
               <a:spcAft>
-                <a:spcPts val="300"/>
+                <a:spcPts val="200"/>
               </a:spcAft>
             </a:pPr>
             <a:r>
-              <a:rPr sz="1200" b="0">
+              <a:rPr sz="1050" b="0">
                 <a:solidFill>
                   <a:srgbClr val="ECECF0"/>
                 </a:solidFill>
                 <a:latin typeface="Calibri"/>
               </a:rPr>
-              <a:t>• a random move of the same size costs +0.0096 A [+0.0077, +0.0122]; AMBER minus random +0.0111 [+0.0062, +0.0171], 5/5 folds, 1.12 x MDE: Type-M zone, sign measured, size an upper bound</a:t>
+              <a:t>• AMBER minus a same-size move toward a random pool member +0.0385 A (2.27 x); that zero-information move itself improves the chain by -0.0207 A (replicated): the projection's cost, not physics</a:t>
             </a:r>
           </a:p>
           <a:p>
             <a:pPr>
               <a:spcAft>
-                <a:spcPts val="300"/>
+                <a:spcPts val="200"/>
               </a:spcAft>
             </a:pPr>
             <a:r>
-              <a:rPr sz="1200" b="0">
+              <a:rPr sz="1050" b="0">
                 <a:solidFill>
                   <a:srgbClr val="ECECF0"/>
                 </a:solidFill>
                 <a:latin typeface="Calibri"/>
               </a:rPr>
-              <a:t>• AMBER minus a move of the same size toward a random pool member: +0.0385 A [+0.0298, +0.0479]; ORACLE cosine of the displacement with the true residual: -0.049</a:t>
+              <a:t>• what validity buys (s26/results/ph_validity.json): emissions with a sub-2 A heavy-atom overlap 34 to 1; closest heavy-atom pair 2.36 to 2.78 A; 125 of 126 energies converge below 1000 kcal/mol; at the price of 1.3% bond and 2.5% angle strain, 6.6 deg of peptide-bond non-planarity, and a broken virtual bond on 2BP4 and 9KAR: a validity step on 124 of 126</a:t>
             </a:r>
           </a:p>
           <a:p>
             <a:pPr>
               <a:spcAft>
-                <a:spcPts val="300"/>
+                <a:spcPts val="200"/>
               </a:spcAft>
             </a:pPr>
             <a:r>
-              <a:rPr sz="1200" b="0">
+              <a:rPr sz="1050" b="0">
                 <a:solidFill>
                   <a:srgbClr val="ECECF0"/>
                 </a:solidFill>
                 <a:latin typeface="Calibri"/>
               </a:rPr>
-              <a:t>• what validity buys: 58.7% of built chains start above 1e4 kcal/mol; 125 of 126 converge below 1000 (9KAR ends at 1262); a validity step on 124 of 126, on 2BP4 and 9KAR it breaks a virtual bond</a:t>
+              <a:t>• stage 2 reduces to stage 1: the best C2 rung is the shipped prior, so the delivered chains are the production emission (L112)</a:t>
             </a:r>
           </a:p>
           <a:p>
             <a:pPr>
               <a:spcAft>
-                <a:spcPts val="300"/>
+                <a:spcPts val="200"/>
               </a:spcAft>
             </a:pPr>
             <a:r>
-              <a:rPr sz="1200" b="1">
-                <a:solidFill>
-                  <a:srgbClr val="F2A93B"/>
-                </a:solidFill>
-                <a:latin typeface="Calibri"/>
-              </a:rPr>
-              <a:t>C4, C5: pre-registered, pending</a:t>
-            </a:r>
-          </a:p>
-          <a:p>
-            <a:pPr>
-              <a:spcAft>
-                <a:spcPts val="300"/>
-              </a:spcAft>
-            </a:pPr>
-            <a:r>
-              <a:rPr sz="1200" b="0">
+              <a:rPr sz="1050" b="1">
                 <a:solidFill>
                   <a:srgbClr val="ECECF0"/>
                 </a:solidFill>
                 <a:latin typeface="Calibri"/>
               </a:rPr>
-              <a:t>• routers on a feature set no previous router used (C4); predict and subtract the common mode (C5)</a:t>
-            </a:r>
-          </a:p>
-          <a:p>
-            <a:pPr>
-              <a:spcAft>
-                <a:spcPts val="300"/>
-              </a:spcAft>
-            </a:pPr>
-            <a:r>
-              <a:rPr sz="1200" b="1">
-                <a:solidFill>
-                  <a:srgbClr val="ECECF0"/>
-                </a:solidFill>
-                <a:latin typeface="Calibri"/>
-              </a:rPr>
-              <a:t>• Verdict: PENDING the ladder (KEEP AS STATED / KEEP WITH EDITS / REPLACE, per lane P)</a:t>
+              <a:t>• Verdict: KEEP WITH EDITS. The prior is the lever; its derivative is steep and its inputs on this machine are flat; the honest next step is a language model too large for this box.</a:t>
             </a:r>
           </a:p>
         </p:txBody>
@@ -6645,7 +7097,7 @@
                 </a:solidFill>
                 <a:latin typeface="Calibri"/>
               </a:rPr>
-              <a:t>11 / 11    the direction line in the notes is DRAFT until the coordinator's verdict entry in s26/LEDGER.md</a:t>
+              <a:t>11 / 11    the direction line in the notes is the coordinator's ruling, ledger L117, verbatim</a:t>
             </a:r>
           </a:p>
         </p:txBody>
@@ -10406,7 +10858,7 @@
                 </a:solidFill>
                 <a:latin typeface="Calibri"/>
               </a:rPr>
-              <a:t>Direction B, and what we publish: the trainability paper</a:t>
+              <a:t>Direction B (verdict REPLACE), and what we publish: the trainability paper</a:t>
             </a:r>
           </a:p>
         </p:txBody>
@@ -10475,7 +10927,7 @@
                 </a:solidFill>
                 <a:latin typeface="Calibri"/>
               </a:rPr>
-              <a:t>9 / 11    from s26/PROPOSAL_B.md (lane P, DRAFT; B1 final) and s26/PROPOSAL_B_REPLACEMENT.md (lane Q); the paper replaces A (L68, L69) and, if B2/B3 are null, B</a:t>
+              <a:t>9 / 11    from s26/PROPOSAL_B.md (lane P, final, a88ea259) and s26/PROPOSAL_B_REPLACEMENT.md (lane Q); verdicts L117; C2 basis: built chain, rebuild 3.2126 (L57)</a:t>
             </a:r>
           </a:p>
         </p:txBody>
@@ -10489,7 +10941,7 @@
         <p:spPr>
           <a:xfrm>
             <a:off x="548640" y="1280160"/>
-            <a:ext cx="5577840" cy="5120640"/>
+            <a:ext cx="5623560" cy="5120640"/>
           </a:xfrm>
           <a:prstGeom prst="rect">
             <a:avLst/>
@@ -10504,11 +10956,11 @@
           <a:p>
             <a:pPr>
               <a:spcAft>
-                <a:spcPts val="300"/>
+                <a:spcPts val="200"/>
               </a:spcAft>
             </a:pPr>
             <a:r>
-              <a:rPr sz="1150" b="1">
+              <a:rPr sz="1100" b="1">
                 <a:solidFill>
                   <a:srgbClr val="F2A93B"/>
                 </a:solidFill>
@@ -10520,161 +10972,145 @@
           <a:p>
             <a:pPr>
               <a:spcAft>
-                <a:spcPts val="300"/>
+                <a:spcPts val="200"/>
               </a:spcAft>
             </a:pPr>
             <a:r>
-              <a:rPr sz="1150" b="0">
+              <a:rPr sz="1100" b="0">
                 <a:solidFill>
                   <a:srgbClr val="ECECF0"/>
                 </a:solidFill>
                 <a:latin typeface="Calibri"/>
               </a:rPr>
-              <a:t>• Replace or augment the shipped distance prior with the output of a large pretrained folding model, because the prior's accuracy is the only steep lever the record measured.</a:t>
+              <a:t>• replace or augment the shipped distance prior with the output of a large pretrained folding model; fallback B3: route between the pipeline and a sequence-only predictor if the targets it beats can be recognised without the native</a:t>
             </a:r>
           </a:p>
           <a:p>
             <a:pPr>
               <a:spcAft>
-                <a:spcPts val="300"/>
+                <a:spcPts val="200"/>
               </a:spcAft>
             </a:pPr>
             <a:r>
-              <a:rPr sz="1150" b="1">
+              <a:rPr sz="1100" b="1">
                 <a:solidFill>
                   <a:srgbClr val="F2A93B"/>
                 </a:solidFill>
                 <a:latin typeface="Calibri"/>
               </a:rPr>
-              <a:t>B1, final: the folding model cannot run on this machine</a:t>
+              <a:t>B1, final: the folding model cannot run here</a:t>
             </a:r>
           </a:p>
           <a:p>
             <a:pPr>
               <a:spcAft>
-                <a:spcPts val="300"/>
+                <a:spcPts val="200"/>
               </a:spcAft>
             </a:pPr>
             <a:r>
-              <a:rPr sz="1150" b="0">
+              <a:rPr sz="1100" b="0">
                 <a:solidFill>
                   <a:srgbClr val="ECECF0"/>
                 </a:solidFill>
                 <a:latin typeface="Calibri"/>
               </a:rPr>
-              <a:t>• no checkpoint on disk; 8.45 GB to download</a:t>
+              <a:t>• no checkpoint (8.45 GB to download); openfold and omegaconf absent, Python 3.13 vs &lt;= 3.9, CPU-only torch; 8.76 GB resident against 4.4 GB of headroom (fp16 everywhere 7.4 GB)</a:t>
             </a:r>
           </a:p>
           <a:p>
             <a:pPr>
               <a:spcAft>
-                <a:spcPts val="300"/>
+                <a:spcPts val="200"/>
               </a:spcAft>
             </a:pPr>
             <a:r>
-              <a:rPr sz="1150" b="0">
-                <a:solidFill>
-                  <a:srgbClr val="ECECF0"/>
-                </a:solidFill>
-                <a:latin typeface="Calibri"/>
-              </a:rPr>
-              <a:t>• openfold and omegaconf absent; openfold needs nvcc and Python &lt;= 3.9; this box is Python 3.13, CPU-only torch</a:t>
+              <a:rPr sz="1100" b="1">
+                <a:solidFill>
+                  <a:srgbClr val="F2A93B"/>
+                </a:solidFill>
+                <a:latin typeface="Calibri"/>
+              </a:rPr>
+              <a:t>B2, final: the feasible-scale ladder (built chain vs the shipped prior)</a:t>
             </a:r>
           </a:p>
           <a:p>
             <a:pPr>
               <a:spcAft>
-                <a:spcPts val="300"/>
+                <a:spcPts val="200"/>
               </a:spcAft>
             </a:pPr>
             <a:r>
-              <a:rPr sz="1150" b="0">
+              <a:rPr sz="1100" b="0">
                 <a:solidFill>
                   <a:srgbClr val="ECECF0"/>
                 </a:solidFill>
                 <a:latin typeface="Calibri"/>
               </a:rPr>
-              <a:t>• 8.76 GB resident as fair-esm loads it (fp16 LM, fp32 trunk) against 4.4 GB of headroom; fp16 everywhere is still 7.4 GB</a:t>
+              <a:t>• no ESM: +0.208 A (1.01 x MDE, fold CI [+0.099, +0.394], 5/5), selection +0.330: WORSE (Type-M); contact head only +0.122 (0.62 x): NOT MEASURED; 8M model for the 650M: +0.242 (1.17 x, 5/5): WORSE (Type-M)</a:t>
             </a:r>
           </a:p>
           <a:p>
             <a:pPr>
               <a:spcAft>
-                <a:spcPts val="300"/>
+                <a:spcPts val="200"/>
               </a:spcAft>
             </a:pPr>
             <a:r>
-              <a:rPr sz="1150" b="1">
-                <a:solidFill>
-                  <a:srgbClr val="F2A93B"/>
-                </a:solidFill>
-                <a:latin typeface="Calibri"/>
-              </a:rPr>
-              <a:t>B2, pending: the feasible-scale ladder</a:t>
+              <a:rPr sz="1100" b="0">
+                <a:solidFill>
+                  <a:srgbClr val="ECECF0"/>
+                </a:solidFill>
+                <a:latin typeface="Calibri"/>
+              </a:rPr>
+              <a:t>• the contact head alone is worth -0.218 A on selection (two thirds of the channel); the 8M model minus no ESM +0.034 A: it carries none of it</a:t>
             </a:r>
           </a:p>
           <a:p>
             <a:pPr>
               <a:spcAft>
-                <a:spcPts val="300"/>
+                <a:spcPts val="200"/>
               </a:spcAft>
             </a:pPr>
             <a:r>
-              <a:rPr sz="1150" b="0">
-                <a:solidFill>
-                  <a:srgbClr val="ECECF0"/>
-                </a:solidFill>
-                <a:latin typeface="Calibri"/>
-              </a:rPr>
-              <a:t>• the ESM-2 contact head alone as a prior input; the 8M language model against the 650M (rungs conly and esm8m of the C2 ladder)</a:t>
+              <a:rPr sz="1100" b="1">
+                <a:solidFill>
+                  <a:srgbClr val="F2A93B"/>
+                </a:solidFill>
+                <a:latin typeface="Calibri"/>
+              </a:rPr>
+              <a:t>B3, final: the set where the pipeline beats sequence-only is not recognisable native-free</a:t>
             </a:r>
           </a:p>
           <a:p>
             <a:pPr>
               <a:spcAft>
-                <a:spcPts val="300"/>
+                <a:spcPts val="200"/>
               </a:spcAft>
             </a:pPr>
             <a:r>
-              <a:rPr sz="1150" b="1">
-                <a:solidFill>
-                  <a:srgbClr val="F2A93B"/>
-                </a:solidFill>
-                <a:latin typeface="Calibri"/>
-              </a:rPr>
-              <a:t>B3, pending: where the pipeline beats sequence-only, and is that set recognisable native-free?</a:t>
+              <a:rPr sz="1100" b="0">
+                <a:solidFill>
+                  <a:srgbClr val="ECECF0"/>
+                </a:solidFill>
+                <a:latin typeface="Calibri"/>
+              </a:rPr>
+              <a:t>• sign classifier at chance: balanced accuracy 0.522 / 0.557 vs permutation nulls 0.578 / 0.566; only the SIZE of the gain over a constant helix is predictable (held-out R2 0.40), carried by the pool's strand content (Pearson -0.64)</a:t>
             </a:r>
           </a:p>
           <a:p>
             <a:pPr>
               <a:spcAft>
-                <a:spcPts val="300"/>
+                <a:spcPts val="200"/>
               </a:spcAft>
             </a:pPr>
             <a:r>
-              <a:rPr sz="1150" b="0">
+              <a:rPr sz="1100" b="1">
                 <a:solidFill>
                   <a:srgbClr val="ECECF0"/>
                 </a:solidFill>
                 <a:latin typeface="Calibri"/>
               </a:rPr>
-              <a:t>• built chains: pipeline 3.2148, sequence-only torsion predictor 3.7705, constant helix 4.0648 A; torsion minus pipeline +0.5557 (SE 0.1318, MDE 0.3694, 37W/89L); the classifier test is pending</a:t>
-            </a:r>
-          </a:p>
-          <a:p>
-            <a:pPr>
-              <a:spcAft>
-                <a:spcPts val="300"/>
-              </a:spcAft>
-            </a:pPr>
-            <a:r>
-              <a:rPr sz="1150" b="1">
-                <a:solidFill>
-                  <a:srgbClr val="ECECF0"/>
-                </a:solidFill>
-                <a:latin typeface="Calibri"/>
-              </a:rPr>
-              <a:t>• Verdict: PENDING B2/B3. If null: REPLACE with the trainability paper (right).</a:t>
+              <a:t>• Verdict: REPLACE. The replacement is the trainability paper (right); the one untested input, a larger language model, needs a larger machine.</a:t>
             </a:r>
           </a:p>
         </p:txBody>
@@ -10703,27 +11139,27 @@
           <a:p>
             <a:pPr>
               <a:spcAft>
-                <a:spcPts val="300"/>
+                <a:spcPts val="200"/>
               </a:spcAft>
             </a:pPr>
             <a:r>
-              <a:rPr sz="1150" b="1">
+              <a:rPr sz="1100" b="1">
                 <a:solidFill>
                   <a:srgbClr val="F2A93B"/>
                 </a:solidFill>
                 <a:latin typeface="Calibri"/>
               </a:rPr>
-              <a:t>What we publish: the trainability paper (in place of A, and of B if B2/B3 are null)</a:t>
+              <a:t>What we publish: the trainability paper (in place of A and B)</a:t>
             </a:r>
           </a:p>
           <a:p>
             <a:pPr>
               <a:spcAft>
-                <a:spcPts val="300"/>
+                <a:spcPts val="200"/>
               </a:spcAft>
             </a:pPr>
             <a:r>
-              <a:rPr sz="1150" b="0">
+              <a:rPr sz="1100" b="0">
                 <a:solidFill>
                   <a:srgbClr val="ECECF0"/>
                 </a:solidFill>
@@ -10735,11 +11171,11 @@
           <a:p>
             <a:pPr>
               <a:spcAft>
-                <a:spcPts val="300"/>
+                <a:spcPts val="200"/>
               </a:spcAft>
             </a:pPr>
             <a:r>
-              <a:rPr sz="1150" b="0">
+              <a:rPr sz="1100" b="0">
                 <a:solidFill>
                   <a:srgbClr val="ECECF0"/>
                 </a:solidFill>
@@ -10751,11 +11187,11 @@
           <a:p>
             <a:pPr>
               <a:spcAft>
-                <a:spcPts val="300"/>
+                <a:spcPts val="200"/>
               </a:spcAft>
             </a:pPr>
             <a:r>
-              <a:rPr sz="1150" b="0">
+              <a:rPr sz="1100" b="0">
                 <a:solidFill>
                   <a:srgbClr val="ECECF0"/>
                 </a:solidFill>
@@ -10767,11 +11203,11 @@
           <a:p>
             <a:pPr>
               <a:spcAft>
-                <a:spcPts val="300"/>
+                <a:spcPts val="200"/>
               </a:spcAft>
             </a:pPr>
             <a:r>
-              <a:rPr sz="1150" b="0">
+              <a:rPr sz="1100" b="0">
                 <a:solidFill>
                   <a:srgbClr val="ECECF0"/>
                 </a:solidFill>
@@ -10783,11 +11219,11 @@
           <a:p>
             <a:pPr>
               <a:spcAft>
-                <a:spcPts val="300"/>
+                <a:spcPts val="200"/>
               </a:spcAft>
             </a:pPr>
             <a:r>
-              <a:rPr sz="1150" b="0">
+              <a:rPr sz="1100" b="0">
                 <a:solidFill>
                   <a:srgbClr val="ECECF0"/>
                 </a:solidFill>
@@ -10799,11 +11235,11 @@
           <a:p>
             <a:pPr>
               <a:spcAft>
-                <a:spcPts val="300"/>
+                <a:spcPts val="200"/>
               </a:spcAft>
             </a:pPr>
             <a:r>
-              <a:rPr sz="1150" b="0">
+              <a:rPr sz="1100" b="0">
                 <a:solidFill>
                   <a:srgbClr val="ECECF0"/>
                 </a:solidFill>
@@ -10815,11 +11251,11 @@
           <a:p>
             <a:pPr>
               <a:spcAft>
-                <a:spcPts val="300"/>
+                <a:spcPts val="200"/>
               </a:spcAft>
             </a:pPr>
             <a:r>
-              <a:rPr sz="1150" b="1">
+              <a:rPr sz="1100" b="1">
                 <a:solidFill>
                   <a:srgbClr val="F2A93B"/>
                 </a:solidFill>
@@ -10831,11 +11267,11 @@
           <a:p>
             <a:pPr>
               <a:spcAft>
-                <a:spcPts val="300"/>
+                <a:spcPts val="200"/>
               </a:spcAft>
             </a:pPr>
             <a:r>
-              <a:rPr sz="1150" b="0">
+              <a:rPr sz="1100" b="0">
                 <a:solidFill>
                   <a:srgbClr val="ECECF0"/>
                 </a:solidFill>
@@ -10847,11 +11283,11 @@
           <a:p>
             <a:pPr>
               <a:spcAft>
-                <a:spcPts val="300"/>
+                <a:spcPts val="200"/>
               </a:spcAft>
             </a:pPr>
             <a:r>
-              <a:rPr sz="1150" b="0">
+              <a:rPr sz="1100" b="0">
                 <a:solidFill>
                   <a:srgbClr val="ECECF0"/>
                 </a:solidFill>
@@ -10863,11 +11299,11 @@
           <a:p>
             <a:pPr>
               <a:spcAft>
-                <a:spcPts val="300"/>
+                <a:spcPts val="200"/>
               </a:spcAft>
             </a:pPr>
             <a:r>
-              <a:rPr sz="1150" b="0">
+              <a:rPr sz="1100" b="0">
                 <a:solidFill>
                   <a:srgbClr val="A8A8B6"/>
                 </a:solidFill>

--- a/vqe_research_overview.pptx
+++ b/vqe_research_overview.pptx
@@ -645,7 +645,7 @@
           </a:p>
           <a:p>
             <a:r>
-              <a:t>Verdict KEEP WITH EDITS, final (`s26/PROPOSAL_C.md`, commit 0a85323f with addendum 1; coordinator L117; Adversary L120 STANDS). The four edits: (1) C2 "learn a better prior from better inputs" becomes "the prior's inputs are measured out at n = 126": the ESM-2 650M channel is the whole of the channel this instrument can see (+0.208 A built chain, +0.330 A selection, 5/5 folds), and no reduction, expansion, capacity, joint-consistency or pool-histogram variant of it moves the endpoint beyond 0.12 A against MDEs of 0.13 to 0.20 A; the lever that stays open is a larger language model, which does not fit this box (B1). (2) C3 "refine with physics" becomes "keep AMBER as a validity step only". (3) C4 "route the set size and scale" becomes "closed": 12 m* routers on four feature blocks no previous router used, 11 pointing the harmful way, the largest +0.068 A at 0.91 x MDE, none clearing its MDE; 6 s* routers, all with the wrong sign (rho -0.21 to -0.10), costing +0.007 to +0.027 A against s = 1 (`s26/results/p_c4.json`, L110, L115); C5 (predict and subtract the common mode) was RUNNING at the proposal's 02:12 stamp (`s26/PROPOSAL_C.md` addendum 1, correcting a pre-written outcome per L120); at this build `s26/results/p_c5.json` holds 126 checkpointed rows with complete = False, so it is NOT A RESULT; lane P appends a final addendum when the run finishes or at 04:15, and the record's prior for it is a null (S16, S19 L14, S24 L7). The raw rung has 3 of 5 fold models trained and was not evaluated. (4) "The prior's derivative is steep and the prior's inputs are flat": every achievable rung moves at cosine 0.2 to 0.5 to the native's direction (S25 L12). C1 (L26): closures reproduced, 3.0433 to 3.0258 real vs 2.5342 to 2.1460 leaked; 2.6087 vs 3.4676. C2, all nine evaluated rungs, built chain (rebuild basis 3.2126), effect (x MDE, fold CI, folds): noesm +0.208 (1.01 x, [+0.0986, +0.3942], 5/5, WORSE, Type-M); conly +0.122 (0.62 x, [-0.0350, +0.2674]); esm8m +0.242 (1.17 x, [+0.1134, +0.3853], 5/5, WORSE, Type-M); pca32 identity (126 ties); pca32f +0.018 (0.13 x, [-0.0725, +0.0970]); pca128 +0.076 (0.43 x, [-0.0691, +0.2157]); wide +0.032 (0.25 x, [-0.0300, +0.1279]); pairnet +0.041 (0.30 x, [-0.0442, +0.1143]); mix identity (126 ties, lam* = 0 on 5/5 folds); raw: 3 of 5 folds trained, not evaluated. No rung is better than the shipped prior on the built chain (False). C3 (L39, L46, L87, L100; `s26/C3_RESULT.md` addenda 1 to 4): AMBER vs the built chain +0.0207 (fold CI [+0.0154, +0.0290], 2.16 x); vs a random move of its own size +0.0111 ([+0.0062, +0.0171], 1.12 x, Type-M: sign measured, size an upper bound; replication +0.0100); vs a same-size move toward a random pool member +0.0385 ([+0.0298, +0.0479]; replication +0.0414); the toward-member control itself improves the chain, -0.0178, replicated at -0.0207 [-0.0250, -0.0166], a statement about the projection's cost (S16 L27), not about physics; ORACLE cosine -0.049. The validity axis (`s26/results/ph_validity.json`, L100): heavy-atom pairs below 2.0 A 0.444 to 0.008 per target (34 targets to 1); closest pair 2.36 to 2.78 A; bond strain 1.3%, angle strain 2.5%, omega non-planarity 6.6 deg; Ramachandran favoured 0.930 to 0.911; 125 of 126 converge below 1000 kcal/mol (9KAR ends at 1262); a validity step on 124 of 126, on 2BP4 and 9KAR it breaks a virtual bond. Stage 2 reduces to stage 1 because the best C2 rung is the shipped prior (L112, addendum 4). The calibration flag, restated per L123: the pool's own disagreement predicts the emitted chain's error (Spearman +0.452 partial on n and Rg, fold CI [+0.2799, +0.6093]); the relaxation's displacement tracks that disagreement at rho 0.76 and adds nothing given it (`s26/results/a_strain_vs_spread.json`); never a selector.</a:t>
+              <a:t>Verdict KEEP WITH EDITS, final (`s26/PROPOSAL_C.md` with addenda 1 and 2, 03:54; coordinator L117; Adversary L120 STANDS). The four edits: (1) C2 "learn a better prior from better inputs" becomes "the prior's inputs are measured out at n = 126": the ESM-2 650M channel is the whole of the channel this instrument can see (+0.208 A built chain, +0.330 A selection, 5/5 folds), and no reduction, expansion, capacity, joint-consistency or pool-histogram variant of it moves the endpoint beyond 0.12 A against MDEs of 0.13 to 0.20 A; the lever that stays open is a larger language model, which does not fit this box (B1). (2) C3 "refine with physics" becomes "keep AMBER as a validity step only". (3) C4 "route the set size and scale" becomes "closed": 12 m* routers on four feature blocks no previous router used, 11 pointing the harmful way, the largest +0.068 A at 0.91 x MDE, none clearing its MDE; 6 s* routers, all with the wrong sign (rho -0.21 to -0.10), costing +0.007 to +0.027 A against s = 1 (`s26/results/p_c4.json`, L110, L115); C5 (predict and subtract the common mode) is CLOSED (`s26/PROPOSAL_C.md` addendum 2, 03:54; ledger L132; `s26/results/p_c5.json` complete = True, 126/126): subtracting a predicted common-mode correction on held-out folds is null to harmful on the built chain (rebuild basis): GLOBAL in the coordinate frame -0.0090 A (-0.23 x MDE, fold CI [-0.0331, +0.0185], NOT MEASURED), GLOBAL in distance space +0.0312 (0.60 x, NOT MEASURED), RIDGE in distance space on 45 native-free features +0.1643 (1.79 x, fold CI [+0.1176, +0.2253], 5/5 folds, WORSE), indistinguishable from a random correction of the same size (+0.1351, 1.33 x); the ORACLE ceilings are -1.875 A (distance space) and -3.129 A (coordinate frame): the common mode is most of the error and nothing native-free touches it (S16, S19 L14, S24 L7 confirmed on the same operator). The raw rung (1280-d input) is NOT RUN: 4 of 5 fold models trained, no evaluation (L133); its inputs are bracketed by the null pca32f and pca128 rungs. (4) "The prior's derivative is steep and the prior's inputs are flat": every achievable rung moves at cosine 0.2 to 0.5 to the native's direction (S25 L12). C1 (L26): closures reproduced, 3.0433 to 3.0258 real vs 2.5342 to 2.1460 leaked; 2.6087 vs 3.4676. C2, all nine evaluated rungs, built chain (rebuild basis 3.2126), effect (x MDE, fold CI, folds): noesm +0.208 (1.01 x, [+0.0986, +0.3942], 5/5, WORSE, Type-M); conly +0.122 (0.62 x, [-0.0350, +0.2674]); esm8m +0.242 (1.17 x, [+0.1134, +0.3853], 5/5, WORSE, Type-M); pca32 identity (126 ties); pca32f +0.018 (0.13 x, [-0.0725, +0.0970]); pca128 +0.076 (0.43 x, [-0.0691, +0.2157]); wide +0.032 (0.25 x, [-0.0300, +0.1279]); pairnet +0.041 (0.30 x, [-0.0442, +0.1143]); mix identity (126 ties, lam* = 0 on 5/5 folds); raw: NOT RUN, 4 of 5 folds trained, not evaluated (L133). No rung is better than the shipped prior on the built chain (False). C3 (L39, L46, L87, L100; `s26/C3_RESULT.md` addenda 1 to 4): AMBER vs the built chain +0.0207 (fold CI [+0.0154, +0.0290], 2.16 x); vs a random move of its own size +0.0111 ([+0.0062, +0.0171], 1.12 x, Type-M: sign measured, size an upper bound; replication +0.0100); vs a same-size move toward a random pool member +0.0385 ([+0.0298, +0.0479]; replication +0.0414); the toward-member control itself improves the chain, -0.0178, replicated at -0.0207 [-0.0250, -0.0166], a statement about the projection's cost (S16 L27), not about physics; ORACLE cosine -0.049. The validity axis (`s26/results/ph_validity.json`, L100): heavy-atom pairs below 2.0 A 0.444 to 0.008 per target (34 targets to 1); closest pair 2.36 to 2.78 A; bond strain 1.3%, angle strain 2.5%, omega non-planarity 6.6 deg; Ramachandran favoured 0.930 to 0.911; 125 of 126 converge below 1000 kcal/mol (9KAR ends at 1262); a validity step on 124 of 126, on 2BP4 and 9KAR it breaks a virtual bond. Stage 2 reduces to stage 1 because the best C2 rung is the shipped prior (L112, addendum 4). The calibration flag, restated per L123: the pool's own disagreement predicts the emitted chain's error (Spearman +0.452 partial on n and Rg, fold CI [+0.2799, +0.6093]); the relaxation's displacement tracks that disagreement at rho 0.76 and adds nothing given it (`s26/results/a_strain_vs_spread.json`); never a selector.</a:t>
             </a:r>
           </a:p>
           <a:p/>
@@ -966,12 +966,87 @@
           </a:p>
           <a:p>
             <a:r>
-              <a:t>C5_COMPLETE = False &lt;- s26/results/p_c5.json :: complete (absent or false = not a result) (DERIVED)</a:t>
-            </a:r>
-          </a:p>
-          <a:p>
-            <a:r>
-              <a:t>C5_N_ROWS = 126 &lt;- s26/results/p_c5.json :: rows (count of checkpointed targets at build time) (DERIVED)</a:t>
+              <a:t>C5_COMPLETE = True &lt;- s26/results/p_c5.json :: complete (absent or false = not a result) (DERIVED)</a:t>
+            </a:r>
+          </a:p>
+          <a:p>
+            <a:r>
+              <a:t>C5_GLOBAL_R1 = 0.031217 &lt;- s26/results/p_c5.json :: summary/global_R1_a0.5/effect [built_chain (rebuild basis 3.2126)]</a:t>
+            </a:r>
+          </a:p>
+          <a:p>
+            <a:r>
+              <a:t>C5_GLOBAL_R1_VERDICT = NOT MEASURED &lt;- s26/results/p_c5.json :: summary/global_R1_a0.5/verdict</a:t>
+            </a:r>
+          </a:p>
+          <a:p>
+            <a:r>
+              <a:t>C5_GLOBAL_R1_X = 0.601462 &lt;- s26/results/p_c5.json :: summary/global_R1_a0.5/effect_over_mde</a:t>
+            </a:r>
+          </a:p>
+          <a:p>
+            <a:r>
+              <a:t>C5_GLOBAL_R2 = -0.00903203 &lt;- s26/results/p_c5.json :: summary/global_R2_a0.5/effect [built_chain (rebuild basis 3.2126)]</a:t>
+            </a:r>
+          </a:p>
+          <a:p>
+            <a:r>
+              <a:t>C5_GLOBAL_R2_CI = [-0.03312525896366089, 0.018532209148554846] &lt;- s26/results/p_c5.json :: summary/global_R2_a0.5/ci95_fold</a:t>
+            </a:r>
+          </a:p>
+          <a:p>
+            <a:r>
+              <a:t>C5_GLOBAL_R2_VERDICT = NOT MEASURED &lt;- s26/results/p_c5.json :: summary/global_R2_a0.5/verdict</a:t>
+            </a:r>
+          </a:p>
+          <a:p>
+            <a:r>
+              <a:t>C5_GLOBAL_R2_X = -0.230242 &lt;- s26/results/p_c5.json :: summary/global_R2_a0.5/effect_over_mde</a:t>
+            </a:r>
+          </a:p>
+          <a:p>
+            <a:r>
+              <a:t>C5_ORACLE_R1 = -1.87494 &lt;- s26/results/p_c5.json :: summary/oracle_R1/effect [built_chain (rebuild basis 3.2126)]</a:t>
+            </a:r>
+          </a:p>
+          <a:p>
+            <a:r>
+              <a:t>C5_ORACLE_R2 = -3.12927 &lt;- s26/results/p_c5.json :: summary/oracle_R2/effect [built_chain (rebuild basis 3.2126)]</a:t>
+            </a:r>
+          </a:p>
+          <a:p>
+            <a:r>
+              <a:t>C5_RANDOM_R1 = 0.135095 &lt;- s26/results/p_c5.json :: summary/random_R1/effect [built_chain (rebuild basis 3.2126)]</a:t>
+            </a:r>
+          </a:p>
+          <a:p>
+            <a:r>
+              <a:t>C5_RANDOM_R1_X = 1.32747 &lt;- s26/results/p_c5.json :: summary/random_R1/effect_over_mde</a:t>
+            </a:r>
+          </a:p>
+          <a:p>
+            <a:r>
+              <a:t>C5_RIDGE_R1 = 0.164312 &lt;- s26/results/p_c5.json :: summary/ridge_R1/effect [built_chain (rebuild basis 3.2126)]</a:t>
+            </a:r>
+          </a:p>
+          <a:p>
+            <a:r>
+              <a:t>C5_RIDGE_R1_CI = [0.1175672352707539, 0.22529816879162798] &lt;- s26/results/p_c5.json :: summary/ridge_R1/ci95_fold</a:t>
+            </a:r>
+          </a:p>
+          <a:p>
+            <a:r>
+              <a:t>C5_RIDGE_R1_FOLDS = 5 &lt;- s26/results/p_c5.json :: summary/ridge_R1/folds_same_sign</a:t>
+            </a:r>
+          </a:p>
+          <a:p>
+            <a:r>
+              <a:t>C5_RIDGE_R1_VERDICT = WORSE &lt;- s26/results/p_c5.json :: summary/ridge_R1/verdict</a:t>
+            </a:r>
+          </a:p>
+          <a:p>
+            <a:r>
+              <a:t>C5_RIDGE_R1_X = 1.78626 &lt;- s26/results/p_c5.json :: summary/ridge_R1/effect_over_mde</a:t>
             </a:r>
           </a:p>
           <a:p>
@@ -981,7 +1056,7 @@
           </a:p>
           <a:p>
             <a:r>
-              <a:t>RAW_FOLDS_TRAINED = 3 &lt;- s26/models/p_ladder/raw_fold*_s0.pt (count at build time) (DERIVED)</a:t>
+              <a:t>RAW_FOLDS_TRAINED = 4 &lt;- s26/models/p_ladder/raw_fold*_s0.pt (count at build time) (DERIVED)</a:t>
             </a:r>
           </a:p>
           <a:p>
@@ -6682,7 +6757,7 @@
                 </a:solidFill>
                 <a:latin typeface="Calibri"/>
               </a:rPr>
-              <a:t>10 / 11    from s26/PROPOSAL_C.md (lane P, 0a85323f with addendum 1) and s26/C3_RESULT.md addenda 1 to 4 (lane PH); verdicts L117 / L120; C2 basis: built chain, rebuild 3.2126 (L57)</a:t>
+              <a:t>10 / 11    from s26/PROPOSAL_C.md (lane P, with addenda 1 and 2) and s26/C3_RESULT.md addenda 1 to 4 (lane PH); verdicts L117 / L120; C5 L132; C2 basis: built chain, rebuild 3.2126 (L57)</a:t>
             </a:r>
           </a:p>
         </p:txBody>
@@ -6737,7 +6812,7 @@
                 </a:solidFill>
                 <a:latin typeface="Calibri"/>
               </a:rPr>
-              <a:t>• the prior bounds the accuracy; the premise is right and the four items are wrong as stated: learn a better PRIOR, not a ranker; AMBER for validity only; the routers are closed; C5 was running at the file's stamp (126 rows checkpointed at this build, complete = False: not a result) and keeps its pre-registration</a:t>
+              <a:t>• the prior bounds the accuracy; the premise is right and the four items are wrong as stated: learn a better PRIOR, not a ranker; AMBER for validity only; the routers are closed; C5 (predict and subtract the common mode) is closed at one agent-day: null (GLOBAL -0.009 / +0.031 A) to harmful (RIDGE +0.164 A, 1.79 x MDE, 5/5 folds), ORACLE ceilings -1.87 / -3.13 A</a:t>
             </a:r>
           </a:p>
           <a:p>
@@ -6817,7 +6892,7 @@
                 </a:solidFill>
                 <a:latin typeface="Calibri"/>
               </a:rPr>
-              <a:t>• every other variant (contact head only, per-fold PCA 32 / 128, 2.7x capacity, triangle update, pool-histogram mix) lands within +0.018 to +0.122 A of the shipped prior, under MDEs of 0.13 to 0.20 A; the mix rung chooses lam = 0 on 5/5 folds; raw: 3 of 5 folds trained, not evaluated</a:t>
+              <a:t>• every other variant (contact head only, per-fold PCA 32 / 128, 2.7x capacity, triangle update, pool-histogram mix) lands within +0.018 to +0.122 A of the shipped prior, under MDEs of 0.13 to 0.20 A; the mix rung chooses lam = 0 on 5/5 folds; raw: not run (4 of 5 folds trained, no evaluation)</a:t>
             </a:r>
           </a:p>
           <a:p>

--- a/vqe_research_overview.pptx
+++ b/vqe_research_overview.pptx
@@ -1638,13 +1638,18 @@
           </a:p>
           <a:p>
             <a:r>
-              <a:t>The overlays are ORACLE-superposed (Kabsch onto the native through `s12.instrument.superpose_batch`, for the figure only); the RMSD printed on each figure was recomputed by `s26/pr_figures.py` and equals the production record. The benchmark numbers are typed from claim C06 of `s26/EXAMINATION.md`; no S26 lane opened `s9/final_report.json`, and the two benchmark means (2.9610 full system, 2.9507 shipped baseline) are asserted by a passing test. Caveat that attaches to every benchmark figure (L44, L55, L58): 2/60 benchmark targets carry a verbatim self-copy in their fold model's training set; dev-proxy price 0.002 A; own-native envelope 0.028 A (mean CI) to 0.151 A (worst target) on the built chain under assumption A2; class MINOR (0.017 to 0.170 A) under every reading, against a benchmark CI half-width of 0.170; it cannot move the benchmark verdict either way.</a:t>
+              <a:t>The 3.2148 A production number does not run the selector (the production Config has quantum = False) and is seed-free: it is 3.2148 on both A1 seeds (L139, L140), while the deployed selector's own arm moves 0.033 A between seeds (slide 5 notes). The overlays are ORACLE-superposed (Kabsch onto the native through `s12.instrument.superpose_batch`, for the figure only); the RMSD printed on each figure was recomputed by `s26/pr_figures.py` and equals the production record. The benchmark numbers are typed from claim C06 of `s26/EXAMINATION.md`; no S26 lane opened `s9/final_report.json`, and the two benchmark means (2.9610 full system, 2.9507 shipped baseline) are asserted by a passing test. Caveat that attaches to every benchmark figure (L44, L55, L58): 2/60 benchmark targets carry a verbatim self-copy in their fold model's training set; dev-proxy price 0.002 A; own-native envelope 0.028 A (mean CI) to 0.151 A (worst target) on the built chain under assumption A2; class MINOR (0.017 to 0.170 A) under every reading, against a benchmark CI half-width of 0.170; it cannot move the benchmark verdict either way.</a:t>
             </a:r>
           </a:p>
           <a:p/>
           <a:p>
             <a:r>
               <a:t>SOURCES (not spoken; token = value &lt;- artefact path [basis]):</a:t>
+            </a:r>
+          </a:p>
+          <a:p>
+            <a:r>
+              <a:t>A1_FIXED_SEED_DELTA = 0.0329021 &lt;- s26/results/a1s1_stats.json :: means/fixed_zrank_it50/rmsd_q_synth minus s26/results/a1_stats.json :: means/fixed_zrank_it50/rmsd_q_synth [built_chain (rmsd_q_synth)] (DERIVED)</a:t>
             </a:r>
           </a:p>
           <a:p>
@@ -1875,13 +1880,48 @@
           </a:p>
           <a:p>
             <a:r>
-              <a:t>The deployed table sets alpha = 1 on folds 0, 3, 4, so 61.9% of targets carry no tail constraint; there the objective is an entropy-regularised mean. Across 18 readout arms, mean RMSD tracks the entropy of the readout weights at rho -0.74; the nine circuit arms sit +0.0090 A from a curve fitted on the nine no-circuit arms. Against an exact Boltzmann weighting at the same temperature the selector is -0.0002 A. The withdrawn "+0.113 A CVaR contribution" (S25 L5) is not on any slide. The generation lane's exact MPS twin agrees with the dense circuit to 3.331e-16; it is not the selector.</a:t>
+              <a:t>The deployed table sets alpha = 1 on folds 0, 3, 4, so 61.9% of targets carry no tail constraint; there the objective is an entropy-regularised mean. Across 18 readout arms, mean RMSD tracks the entropy of the readout weights at rho -0.74; the nine circuit arms sit +0.0090 A from a curve fitted on the nine no-circuit arms. Against an exact Boltzmann weighting at the same temperature the selector is -0.0002 A. The withdrawn "+0.113 A CVaR contribution" (S25 L5) is not on any slide. The generation lane's exact MPS twin agrees with the dense circuit to 3.331e-16; it is not the selector. A1 (L68) reproduces the readout-slack finding with a second ansatz family: the exact Gibbs state in place of the trained circuit moves the built chain +0.0088 A (0.11 x MDE). The deployed circuit's own seed variance (L139, L140): on two seeds its built chain is 3.2280 and 3.2610 A (+0.033), while an ADAPT-grown circuit, which converges to the same product Gibbs state whatever the start, sits at 3.2142 / 3.2161; the fixed 21-parameter circuit is a seed-sensitive under-optimiser (0.90 nats short of its optimum in a seed-dependent place), which is why A1's contrast is set by the comparator's seed and is not measured on either seed.</a:t>
             </a:r>
           </a:p>
           <a:p/>
           <a:p>
             <a:r>
               <a:t>SOURCES (not spoken; token = value &lt;- artefact path [basis]):</a:t>
+            </a:r>
+          </a:p>
+          <a:p>
+            <a:r>
+              <a:t>A1S1_FIXED_MEAN = 3.26095 &lt;- s26/results/a1s1_stats.json :: means/fixed_zrank_it50/rmsd_q_synth [built_chain (rmsd_q_synth)]</a:t>
+            </a:r>
+          </a:p>
+          <a:p>
+            <a:r>
+              <a:t>A1S1_L2_MEAN = 3.21607 &lt;- s26/results/a1s1_stats.json :: means/adaptL2_adam_best_zrank_P21/rmsd_q_synth [built_chain (rmsd_q_synth)]</a:t>
+            </a:r>
+          </a:p>
+          <a:p>
+            <a:r>
+              <a:t>A1_FIXED_MEAN = 3.22805 &lt;- s26/results/a1_stats.json :: means/fixed_zrank_it50/rmsd_q_synth [built_chain (rmsd_q_synth)]</a:t>
+            </a:r>
+          </a:p>
+          <a:p>
+            <a:r>
+              <a:t>A1_FIXED_SEED_DELTA = 0.0329021 &lt;- s26/results/a1s1_stats.json :: means/fixed_zrank_it50/rmsd_q_synth minus s26/results/a1_stats.json :: means/fixed_zrank_it50/rmsd_q_synth [built_chain (rmsd_q_synth)] (DERIVED)</a:t>
+            </a:r>
+          </a:p>
+          <a:p>
+            <a:r>
+              <a:t>A1_GIBBS_EFFECT = 0.00881939 &lt;- s26/results/a1_stats.json :: contrasts/'rmsd_q_synth:gibbs_T-fixed_zrank_it50'/effect [built_chain (rmsd_q_synth)]</a:t>
+            </a:r>
+          </a:p>
+          <a:p>
+            <a:r>
+              <a:t>A1_GIBBS_X = 0.108017 &lt;- s26/results/a1_stats.json :: contrasts/'rmsd_q_synth:gibbs_T-fixed_zrank_it50'/effect_over_mde</a:t>
+            </a:r>
+          </a:p>
+          <a:p>
+            <a:r>
+              <a:t>A1_L2_MEAN = 3.21424 &lt;- s26/results/a1_stats.json :: means/adaptL2_adam_best_zrank_P21/rmsd_q_synth [built_chain (rmsd_q_synth)]</a:t>
             </a:r>
           </a:p>
           <a:p>
@@ -2610,7 +2650,7 @@
           </a:p>
           <a:p>
             <a:r>
-              <a:t>We tested letting the circuit grow itself. qubit-ADAPT-VQE starts from one layer of single-qubit rotations and adds, one at a time, whichever operator would lower the objective fastest. We ran it on all 126 development peptides with the deployed objective, seed and readout, and compared the built chains pairwise. The answer is no change: -0.014 to -0.022 angstroms, a quarter to a third of what the comparison can resolve, with fold-clustered intervals straddling zero. All 12 variants point the same way, but they are one observation, not twelve, and none clears its bar; the resolution is 0.06 angstroms. Why? At the deployed setting the optimum the circuit is asked to reach is a product state: seven single-qubit rotations represent it exactly, to 0.0002 nats. When ADAPT is offered entangling operators it does append them, on 60 to 78 of the 78 targets, but they are inert: together they lower the objective by less than 0.001 nats, their angles stay below 0.02 radians under L-BFGS, and the state remains a product state to 0.0004 nats. The deployed 21-parameter circuit stops 0.90 nats short of that same optimum, and reaching it exactly moves the emitted structure by those 0.014 to 0.022 angstroms, a third of the resolution. Its Lie algebra is already the full real algebra from depth two: shallowness, not structure. So Proposal A is replaced. The adaptive circuit is a correct, tested tool; it confirmed the diagnosis instead of curing it. What we publish is on the next slide.</a:t>
+              <a:t>We tested letting the circuit grow itself. qubit-ADAPT-VQE starts from one layer of single-qubit rotations and adds, one at a time, whichever operator would lower the objective fastest. We ran it on all 126 development peptides with the deployed objective and readout, on two seeds, and compared the built chains pairwise. The grown circuit's structures are -0.014 to -0.052 angstroms closer on average, between a quarter and four fifths of what the comparison can resolve, so the effect is not measured on either seed; the spread between the seeds comes from the deployed circuit, which lands in a different place each time, not from the grown one. The resolution is 0.06 angstroms. Why? At the deployed setting the optimum is a product state: seven single-qubit rotations represent it exactly, to 0.0002 nats. Offered entangling operators, ADAPT does append them, on 60 to 78 of the 78 targets, but they are inert: together they lower the objective by less than 0.001 nats, their angles stay below 0.02 radians under L-BFGS, and the state remains a product state to 0.0004 nats. The deployed 21-parameter circuit stops 0.90 nats short of that optimum, and using the optimum itself moves the structure by a tenth of the resolution. Its Lie algebra is already the full real algebra from depth two: shallowness, not structure. So Proposal A is replaced. The adaptive circuit is a correct, tested tool; it confirmed the diagnosis instead of curing it. What we publish is on the next slide.</a:t>
             </a:r>
           </a:p>
           <a:p/>
@@ -2621,7 +2661,7 @@
           </a:p>
           <a:p>
             <a:r>
-              <a:t>Verdict REPLACE (`s26/PROPOSAL_A.md`, lane Q; L68; accepted by the coordinator in L69, subject to the Adversary's check of L68): the mechanism is absent, not weak. A1 basis: built chain, `rmsd_q_synth` (the production projection of the weighted average over the 128 candidates) on both sides; the deployed selector's arm is 3.2280 A on that basis against the production top-75 arm 3.2148 A, and the whole quantum synthesis is worth +0.0133 A (0.26 x MDE) against the classical arm, so the resolution is about four times the component's own footprint. Primaries (`s26/results/a1_stats.json`): ADAPT 2-local pool minus fixed -0.0138 (SE 0.0210, MDE 0.0588, -0.23 x, fold CI [-0.0705, +0.0442], 58W/68L, 3/5 folds); ADAPT Tang pool minus fixed -0.0222 (SE 0.0217, MDE 0.0608, -0.36 x, fold CI [-0.0854, +0.0424], 61W/65L). All 12 ADAPT arms (two pools, two optimisers, 7 / 14 / 21 parameters) are between -0.0245 and -0.0128 A at 0.21 to 0.40 x MDE; on the selection readout -0.0478 to -0.0385 A at up to 0.47 x MDE with 45 to 59 exact ties (the shape of S25's headline: a direction the instrument cannot size). The twelve arms are one observation, not twelve: their per-target delta vectors correlate at 0.955 on average (min 0.919; Adversary L70 caveat 1). The 21 parameters are a budget: the Adam primaries realise 21 (repeats of one rotation merge), L-BFGS 7 to 21 (L70 caveat 2). Controls: the exact Gibbs state in place of the circuit +0.0088 (0.11 x) overall, -0.0271 on the 78 alpha = 1 targets where it is the optimum and +0.0671 on the 48 alpha = 0.25 targets where it is not (L70 caveat 3); the matched-entropy random Hamiltonian +0.0337 (0.34 x, fold CI [+0.0122, +0.0581], 5/5 folds). Product-state facts from the 126 per-target records (`s26/results/a1/*.json`, no native): KL(Gibbs || product of marginals) mean 1.4e-04, max 7.9e-04; on the 78 alpha = 1 targets the fixed circuit's KL to Gibbs is 0.9027 (max 0.984; S25's 0.902 reproduced) and the 7-parameter RY layer's 1.5e-04 (max 7.9e-04). Growth at alpha = 1, L75's reconciliation of my L73 flag (the two "no operator selected" sentences of L68 and `s26/PROPOSAL_A.md` are retracted there and corrected by an addendum): the growth halts by the eps = 1e-3 gradient criterion on 156 of 156 (pool, target) cells under L-BFGS and at the 21-parameter cap under Adam, but operators ARE appended, on 60 (pool V) and 68 (pool L2) of the 78 targets under L-BFGS, every one a multi-qubit string, and on 78 of 78 under Adam; they are inert: the free energy moves by at most 1.2e-04 nats under L-BFGS and 8.6e-04 under Adam (median -9.4e-06 under L-BFGS), the appended angles stay at or below 0.018 rad under L-BFGS, and the state stays a product state to KL 4.1e-04 (`s26/results/a1/*.json :: adapt/*/sequence, trace, theta; arms/adapt*_P21/kl_to_product`). The ideal-ladder statements of L27 and L35 (nothing appended at alpha = 1) stand: there E is exactly affine and every pool gradient is exactly zero; on a real target tie-averaging leaves a residual gradient just above eps. The A4 figure (slide 8) is lane Q's; the product-circuit reading rests on the adapt sets of `s26/results/q_dla.json` (L47). Slide 9 carries what is published in A's place. L119's bootstrap (`s26/results/q_var_boot.json`, every q_var.json row reproduced at relative 0.0000): the alpha = 0.25 grown-L2 minus fixed slope difference is -0.056, 95% CI [-0.1824, +0.0866] (includes zero, so "decays like the fixed ansatz" now carries a stored interval); the alpha = 1 grown minus fixed differences are +0.23 to +0.72 with every interval excluding zero ("no decay" is measured, not read); the A4 figure on this slide carries those intervals as error bars. A3 (L125, `s26/results/a3_stats.json`, `a3_property.json`): a target-dependent Hamiltonian (the raw standardised score at a per-target temperature matched to the deployed entropy) makes the trained states target-dependent, 124 of 126 distinct against 40 under the deployed rank ladder, and the readout does not notice: +0.0034 A on the built chain, 0.04 x MDE, fold CI [-0.0446, +0.0337].</a:t>
+              <a:t>Verdict REPLACE (`s26/PROPOSAL_A.md` with addenda 1 to 3, lane Q; L68, L69, L70, L75, L139): the mechanism is absent, not weak. The seed-1 replication (L139, reversed fold order, `s26/results/a1s1_stats.json`): 2-local pool -0.0449 A (-0.71 x MDE 0.0635, fold CI [-0.0960, -0.0037], 4/5 folds, 72W/54L, NOT MEASURED), Tang pool -0.0523 (-0.79 x MDE 0.0659, fold CI [-0.1087, -0.0054], 4/5, 77W/49L, NOT MEASURED). So the registered "ADAPT is null" falsifier (inside 0.5x MDE with fold CIs spanning zero) fired at seed 0 and not at seed 1, where the two primaries sit in the Type-M zone; neither seed clears its MDE, so A1 is NOT MEASURED on either seed, and by S20 L-B's rule two seeds do not settle a variational arm either way. The seed spread lives in the comparator, the fixed 21-parameter circuit, which stops 0.90 nats short of the optimum in a seed-dependent place: 3.2280 A at seed 0 to 3.2610 at seed 1, while the ADAPT arms, which converge to the same product Gibbs state whatever the start, move from 3.2142 to 3.2161 and 3.2059 to 3.2087; all 6 seed-1 ADAPT arms are negative (True) and the largest is 0.79 x its MDE. Per the Adversary's L140 the reading is "underpowered at seed 0, Type-M at seed 1", the two seed contrasts are one ADAPT value against two draws of the fixed comparator (no pooling across seeds is licensed), and the comparator's seed variance (+0.033 A) is a fact about the deployed selector. The product-state diagnosis is the reason and the verdict REPLACE stands on seed-independent facts. L138 (`s26/results/q_dla_a1.json`, the exact Lie closure of every ADAPT run at every growth step): the grown set's algebra tracks the appended strings and not what the circuit does, dim 7 exactly where nothing was appended (True) and up to 530 where inert multi-qubit strings were; the alpha = 0.25 L2 sets reach a median 1025 of 8,128 at P = 21 (max 2,017); no grown set reaches so(128) (any: False). A1 basis: built chain, `rmsd_q_synth` (the production projection of the weighted average over the 128 candidates) on both sides; the deployed selector's arm is 3.2280 A on that basis against the production top-75 arm 3.2148 A, and the whole quantum synthesis is worth +0.0133 A (0.26 x MDE) against the classical arm, so the resolution is about four times the component's own footprint. Primaries (`s26/results/a1_stats.json`): ADAPT 2-local pool minus fixed -0.0138 (SE 0.0210, MDE 0.0588, -0.23 x, fold CI [-0.0705, +0.0442], 58W/68L, 3/5 folds); ADAPT Tang pool minus fixed -0.0222 (SE 0.0217, MDE 0.0608, -0.36 x, fold CI [-0.0854, +0.0424], 61W/65L). All 12 ADAPT arms (two pools, two optimisers, 7 / 14 / 21 parameters) are between -0.0245 and -0.0128 A at 0.21 to 0.40 x MDE; on the selection readout -0.0478 to -0.0385 A at up to 0.47 x MDE with 45 to 59 exact ties (the shape of S25's headline: a direction the instrument cannot size). The twelve arms are one observation, not twelve: their per-target delta vectors correlate at 0.955 on average (min 0.919; Adversary L70 caveat 1). The 21 parameters are a budget: the Adam primaries realise 21 (repeats of one rotation merge), L-BFGS 7 to 21 (L70 caveat 2). Controls: the exact Gibbs state in place of the circuit +0.0088 (0.11 x) overall, -0.0271 on the 78 alpha = 1 targets where it is the optimum and +0.0671 on the 48 alpha = 0.25 targets where it is not (L70 caveat 3); the matched-entropy random Hamiltonian +0.0337 (0.34 x, fold CI [+0.0122, +0.0581], 5/5 folds). Product-state facts from the 126 per-target records (`s26/results/a1/*.json`, no native): KL(Gibbs || product of marginals) mean 1.4e-04, max 7.9e-04; on the 78 alpha = 1 targets the fixed circuit's KL to Gibbs is 0.9027 (max 0.984; S25's 0.902 reproduced) and the 7-parameter RY layer's 1.5e-04 (max 7.9e-04). Growth at alpha = 1, L75's reconciliation of my L73 flag (the two "no operator selected" sentences of L68 and `s26/PROPOSAL_A.md` are retracted there and corrected by an addendum): the growth halts by the eps = 1e-3 gradient criterion on 156 of 156 (pool, target) cells under L-BFGS and at the 21-parameter cap under Adam, but operators ARE appended, on 60 (pool V) and 68 (pool L2) of the 78 targets under L-BFGS, every one a multi-qubit string, and on 78 of 78 under Adam; they are inert: the free energy moves by at most 1.2e-04 nats under L-BFGS and 8.6e-04 under Adam (median -9.4e-06 under L-BFGS), the appended angles stay at or below 0.018 rad under L-BFGS, and the state stays a product state to KL 4.1e-04 (`s26/results/a1/*.json :: adapt/*/sequence, trace, theta; arms/adapt*_P21/kl_to_product`). The ideal-ladder statements of L27 and L35 (nothing appended at alpha = 1) stand: there E is exactly affine and every pool gradient is exactly zero; on a real target tie-averaging leaves a residual gradient just above eps. The A4 figure (slide 8) is lane Q's; the product-circuit reading rests on the adapt sets of `s26/results/q_dla.json` (L47). Slide 9 carries what is published in A's place. L119's bootstrap (`s26/results/q_var_boot.json`, every q_var.json row reproduced at relative 0.0000): the alpha = 0.25 grown-L2 minus fixed slope difference is -0.056, 95% CI [-0.1824, +0.0866] (includes zero, so "decays like the fixed ansatz" now carries a stored interval); the alpha = 1 grown minus fixed differences are +0.23 to +0.72 with every interval excluding zero ("no decay" is measured, not read); the A4 figure on this slide carries those intervals as error bars. A3 (L125, `s26/results/a3_stats.json`, `a3_property.json`): a target-dependent Hamiltonian (the raw standardised score at a per-target temperature matched to the deployed entropy) makes the trained states target-dependent, 124 of 126 distinct against 40 under the deployed rank ladder, and the readout does not notice: +0.0034 A on the built chain, 0.04 x MDE, fold CI [-0.0446, +0.0337].</a:t>
             </a:r>
           </a:p>
           <a:p/>
@@ -2632,6 +2672,111 @@
           </a:p>
           <a:p>
             <a:r>
+              <a:t>A1S1_ARMS_ALL_NEG = True &lt;- s26/results/a1s1_stats.json :: every 'rmsd_q_synth:adapt*' effect &lt; 0 (DERIVED)</a:t>
+            </a:r>
+          </a:p>
+          <a:p>
+            <a:r>
+              <a:t>A1S1_FIXED_MEAN = 3.26095 &lt;- s26/results/a1s1_stats.json :: means/fixed_zrank_it50/rmsd_q_synth [built_chain (rmsd_q_synth)]</a:t>
+            </a:r>
+          </a:p>
+          <a:p>
+            <a:r>
+              <a:t>A1S1_L2_CI = [-0.09600106535815536, -0.003665688505696382] &lt;- s26/results/a1s1_stats.json :: contrasts/'rmsd_q_synth:adaptL2_adam_best_zrank_P21-fixed_zrank_it50'/ci95_fold</a:t>
+            </a:r>
+          </a:p>
+          <a:p>
+            <a:r>
+              <a:t>A1S1_L2_EFFECT = -0.0448809 &lt;- s26/results/a1s1_stats.json :: contrasts/'rmsd_q_synth:adaptL2_adam_best_zrank_P21-fixed_zrank_it50'/effect [built_chain (rmsd_q_synth)]</a:t>
+            </a:r>
+          </a:p>
+          <a:p>
+            <a:r>
+              <a:t>A1S1_L2_FOLDS = 4 &lt;- s26/results/a1s1_stats.json :: contrasts/'rmsd_q_synth:adaptL2_adam_best_zrank_P21-fixed_zrank_it50'/folds_same_sign</a:t>
+            </a:r>
+          </a:p>
+          <a:p>
+            <a:r>
+              <a:t>A1S1_L2_L = 54 &lt;- s26/results/a1s1_stats.json :: contrasts/'rmsd_q_synth:adaptL2_adam_best_zrank_P21-fixed_zrank_it50'/n_worse</a:t>
+            </a:r>
+          </a:p>
+          <a:p>
+            <a:r>
+              <a:t>A1S1_L2_MDE = 0.0634673 &lt;- s26/results/a1s1_stats.json :: contrasts/'rmsd_q_synth:adaptL2_adam_best_zrank_P21-fixed_zrank_it50'/mde</a:t>
+            </a:r>
+          </a:p>
+          <a:p>
+            <a:r>
+              <a:t>A1S1_L2_MEAN = 3.21607 &lt;- s26/results/a1s1_stats.json :: means/adaptL2_adam_best_zrank_P21/rmsd_q_synth [built_chain (rmsd_q_synth)]</a:t>
+            </a:r>
+          </a:p>
+          <a:p>
+            <a:r>
+              <a:t>A1S1_L2_VERDICT = NOT MEASURED &lt;- s26/results/a1s1_stats.json :: contrasts/'rmsd_q_synth:adaptL2_adam_best_zrank_P21-fixed_zrank_it50'/verdict</a:t>
+            </a:r>
+          </a:p>
+          <a:p>
+            <a:r>
+              <a:t>A1S1_L2_W = 72 &lt;- s26/results/a1s1_stats.json :: contrasts/'rmsd_q_synth:adaptL2_adam_best_zrank_P21-fixed_zrank_it50'/n_better</a:t>
+            </a:r>
+          </a:p>
+          <a:p>
+            <a:r>
+              <a:t>A1S1_L2_X = -0.70715 &lt;- s26/results/a1s1_stats.json :: contrasts/'rmsd_q_synth:adaptL2_adam_best_zrank_P21-fixed_zrank_it50'/effect_over_mde</a:t>
+            </a:r>
+          </a:p>
+          <a:p>
+            <a:r>
+              <a:t>A1S1_N_ARMS = 6 &lt;- s26/results/a1s1_stats.json :: contrasts/'rmsd_q_synth:adapt*' (count) (DERIVED)</a:t>
+            </a:r>
+          </a:p>
+          <a:p>
+            <a:r>
+              <a:t>A1S1_V_CI = [-0.10872053314398761, -0.005409507483908904] &lt;- s26/results/a1s1_stats.json :: contrasts/'rmsd_q_synth:adaptV_adam_best_zrank_P21-fixed_zrank_it50'/ci95_fold</a:t>
+            </a:r>
+          </a:p>
+          <a:p>
+            <a:r>
+              <a:t>A1S1_V_EFFECT = -0.0522869 &lt;- s26/results/a1s1_stats.json :: contrasts/'rmsd_q_synth:adaptV_adam_best_zrank_P21-fixed_zrank_it50'/effect [built_chain (rmsd_q_synth)]</a:t>
+            </a:r>
+          </a:p>
+          <a:p>
+            <a:r>
+              <a:t>A1S1_V_FOLDS = 4 &lt;- s26/results/a1s1_stats.json :: contrasts/'rmsd_q_synth:adaptV_adam_best_zrank_P21-fixed_zrank_it50'/folds_same_sign</a:t>
+            </a:r>
+          </a:p>
+          <a:p>
+            <a:r>
+              <a:t>A1S1_V_L = 49 &lt;- s26/results/a1s1_stats.json :: contrasts/'rmsd_q_synth:adaptV_adam_best_zrank_P21-fixed_zrank_it50'/n_worse</a:t>
+            </a:r>
+          </a:p>
+          <a:p>
+            <a:r>
+              <a:t>A1S1_V_MDE = 0.0658936 &lt;- s26/results/a1s1_stats.json :: contrasts/'rmsd_q_synth:adaptV_adam_best_zrank_P21-fixed_zrank_it50'/mde</a:t>
+            </a:r>
+          </a:p>
+          <a:p>
+            <a:r>
+              <a:t>A1S1_V_MEAN = 3.20866 &lt;- s26/results/a1s1_stats.json :: means/adaptV_adam_best_zrank_P21/rmsd_q_synth [built_chain (rmsd_q_synth)]</a:t>
+            </a:r>
+          </a:p>
+          <a:p>
+            <a:r>
+              <a:t>A1S1_V_VERDICT = NOT MEASURED &lt;- s26/results/a1s1_stats.json :: contrasts/'rmsd_q_synth:adaptV_adam_best_zrank_P21-fixed_zrank_it50'/verdict</a:t>
+            </a:r>
+          </a:p>
+          <a:p>
+            <a:r>
+              <a:t>A1S1_V_W = 77 &lt;- s26/results/a1s1_stats.json :: contrasts/'rmsd_q_synth:adaptV_adam_best_zrank_P21-fixed_zrank_it50'/n_better</a:t>
+            </a:r>
+          </a:p>
+          <a:p>
+            <a:r>
+              <a:t>A1S1_V_X = -0.793506 &lt;- s26/results/a1s1_stats.json :: contrasts/'rmsd_q_synth:adaptV_adam_best_zrank_P21-fixed_zrank_it50'/effect_over_mde</a:t>
+            </a:r>
+          </a:p>
+          <a:p>
+            <a:r>
               <a:t>A1_APPENDED_ADAM = 78 &lt;- s26/results/a1/*.json :: adapt/{V,L2}_adam_best_zrank/sequence non-empty (count over 78) (DERIVED)</a:t>
             </a:r>
           </a:p>
@@ -2677,6 +2822,11 @@
           </a:p>
           <a:p>
             <a:r>
+              <a:t>A1_BOTH_SEEDS_X_MAX = 0.793506 &lt;- s26/results/a1s1_stats.json :: max |effect/MDE| over the seed-1 ADAPT arms (DERIVED)</a:t>
+            </a:r>
+          </a:p>
+          <a:p>
+            <a:r>
               <a:t>A1_DF_ABSMAX_ALL = 0.000861746 &lt;- s26/results/a1/*.json :: adapt/*_zrank/trace: F(P = 7) - F(final), max over the 78 and the four arms (DERIVED)</a:t>
             </a:r>
           </a:p>
@@ -2687,6 +2837,11 @@
           </a:p>
           <a:p>
             <a:r>
+              <a:t>A1_FIXED_SEED_DELTA = 0.0329021 &lt;- s26/results/a1s1_stats.json :: means/fixed_zrank_it50/rmsd_q_synth minus s26/results/a1_stats.json :: means/fixed_zrank_it50/rmsd_q_synth [built_chain (rmsd_q_synth)] (DERIVED)</a:t>
+            </a:r>
+          </a:p>
+          <a:p>
+            <a:r>
               <a:t>A1_GIBBS_ALPHA025 = 0.067115 &lt;- s26/results/a1/*.json :: the same over the 48 alpha = 0.25 targets (the Gibbs state is not the CVaR optimum there) [built_chain (rmsd_q_synth)] (DERIVED)</a:t>
             </a:r>
           </a:p>
@@ -2767,6 +2922,11 @@
           </a:p>
           <a:p>
             <a:r>
+              <a:t>A1_L2_MEAN = 3.21424 &lt;- s26/results/a1_stats.json :: means/adaptL2_adam_best_zrank_P21/rmsd_q_synth [built_chain (rmsd_q_synth)]</a:t>
+            </a:r>
+          </a:p>
+          <a:p>
+            <a:r>
               <a:t>A1_L2_SE = 0.0209879 &lt;- s26/results/a1_stats.json :: contrasts/'rmsd_q_synth:adaptL2_adam_best_zrank_P21-fixed_zrank_it50'/se</a:t>
             </a:r>
           </a:p>
@@ -2892,6 +3052,11 @@
           </a:p>
           <a:p>
             <a:r>
+              <a:t>A1_V_MEAN = 3.2059 &lt;- s26/results/a1_stats.json :: means/adaptV_adam_best_zrank_P21/rmsd_q_synth [built_chain (rmsd_q_synth)]</a:t>
+            </a:r>
+          </a:p>
+          <a:p>
+            <a:r>
               <a:t>A1_V_SE = 0.0217045 &lt;- s26/results/a1_stats.json :: contrasts/'rmsd_q_synth:adaptV_adam_best_zrank_P21-fixed_zrank_it50'/se</a:t>
             </a:r>
           </a:p>
@@ -2963,6 +3128,36 @@
           <a:p>
             <a:r>
               <a:t>ARM_MEAN = 3.21477 &lt;- bench_results/baseline_tuning126.json :: science/rmsd_arm/mean [built_chain]</a:t>
+            </a:r>
+          </a:p>
+          <a:p>
+            <a:r>
+              <a:t>DLA_A1_ANY_SO128 = False &lt;- s26/results/q_dla_a1.json :: results/summary/*/n_reach_so128 &gt; 0 (any) (DERIVED)</a:t>
+            </a:r>
+          </a:p>
+          <a:p>
+            <a:r>
+              <a:t>DLA_A1_DIM7_IFF_NOTHING = True &lt;- s26/results/q_dla_a1.json :: results/summary/'*_lbfgs_zrank:alpha1.0'/dim7_iff_nothing_appended (DERIVED)</a:t>
+            </a:r>
+          </a:p>
+          <a:p>
+            <a:r>
+              <a:t>DLA_A1_L2_A025_MAX = 2017 &lt;- s26/results/q_dla_a1.json :: results/summary/'L2_adam_best_zrank:alpha0.25'/final/max</a:t>
+            </a:r>
+          </a:p>
+          <a:p>
+            <a:r>
+              <a:t>DLA_A1_L2_A025_MEDIAN = 1025 &lt;- s26/results/q_dla_a1.json :: results/summary/'L2_adam_best_zrank:alpha0.25'/final/median</a:t>
+            </a:r>
+          </a:p>
+          <a:p>
+            <a:r>
+              <a:t>DLA_A1_V_LBFGS_A1_MAX = 530 &lt;- s26/results/q_dla_a1.json :: results/summary/'V_lbfgs_zrank:alpha1.0'/final/max</a:t>
+            </a:r>
+          </a:p>
+          <a:p>
+            <a:r>
+              <a:t>DLA_SO128 = 8128 &lt;- s26/results/q_dla.json :: results/fixed/n7_L3/dim_so</a:t>
             </a:r>
           </a:p>
           <a:p>
@@ -9112,7 +9307,7 @@
                 </a:solidFill>
                 <a:latin typeface="Calibri"/>
               </a:rPr>
-              <a:t>• mean 3.2148 A, median 2.966, best 0.182 (1S9Z), worst 8.240 (2MQ2)</a:t>
+              <a:t>• mean 3.2148 A, median 2.966, best 0.182 (1S9Z), worst 8.240 (2MQ2); this number does not run the selector (Config quantum = False) and is seed-free</a:t>
             </a:r>
           </a:p>
           <a:p>
@@ -9655,6 +9850,22 @@
                 </a:solidFill>
                 <a:latin typeface="Calibri"/>
               </a:rPr>
+              <a:t>• on two seeds the deployed circuit's built chain is 3.228 and 3.261 A (a 0.033 A seed variance of the readout) while an ADAPT-grown circuit is seed-stable at 3.214 / 3.216 (L139, L140)</a:t>
+            </a:r>
+          </a:p>
+          <a:p>
+            <a:pPr>
+              <a:spcAft>
+                <a:spcPts val="300"/>
+              </a:spcAft>
+            </a:pPr>
+            <a:r>
+              <a:rPr sz="1300" b="0">
+                <a:solidFill>
+                  <a:srgbClr val="ECECF0"/>
+                </a:solidFill>
+                <a:latin typeface="Calibri"/>
+              </a:rPr>
               <a:t>• off in production; the theorem says it can delete a top-m member, never add one</a:t>
             </a:r>
           </a:p>
@@ -10552,7 +10763,7 @@
                 </a:solidFill>
                 <a:latin typeface="Calibri"/>
               </a:rPr>
-              <a:t>8 / 11    from s26/PROPOSAL_A.md (lane Q; L68, accepted L69); A1 basis: built chain, rmsd_q_synth on both sides; A4 figure: lane Q, s26/results/q_var.json</a:t>
+              <a:t>8 / 11    from s26/PROPOSAL_A.md with addenda 1 to 3 (lane Q; L68, L69, L75, L139); A1 basis: built chain, rmsd_q_synth on both sides; A4 figure: lane Q, s26/results/q_var.json</a:t>
             </a:r>
           </a:p>
         </p:txBody>
@@ -10652,13 +10863,13 @@
               </a:spcAft>
             </a:pPr>
             <a:r>
-              <a:rPr sz="1100" b="1">
+              <a:rPr sz="1050" b="1">
                 <a:solidFill>
                   <a:srgbClr val="F2A93B"/>
                 </a:solidFill>
                 <a:latin typeface="Calibri"/>
               </a:rPr>
-              <a:t>A1, the endpoint: ADAPT under the same 21-parameter budget (realised 21 by the Adam primaries, 7 to 21 by L-BFGS) vs the deployed fixed circuit, paired on 126 targets</a:t>
+              <a:t>A1, the endpoint: ADAPT under the same 21-parameter budget vs the deployed fixed circuit, paired on 126 targets, two seeds</a:t>
             </a:r>
           </a:p>
           <a:p>
@@ -10668,13 +10879,13 @@
               </a:spcAft>
             </a:pPr>
             <a:r>
-              <a:rPr sz="1100" b="0">
+              <a:rPr sz="1050" b="0">
                 <a:solidFill>
                   <a:srgbClr val="ECECF0"/>
                 </a:solidFill>
                 <a:latin typeface="Calibri"/>
               </a:rPr>
-              <a:t>• 2-local pool: -0.0138 A, SE 0.0210, MDE 0.0588, -0.23 x MDE, fold CI [-0.071, +0.044], 58W/68L</a:t>
+              <a:t>• seed 0: 2-local pool -0.0138 A (-0.23 x MDE 0.0588, fold CI [-0.071, +0.044]), Tang pool -0.0222 (-0.36 x, fold CI [-0.085, +0.042]); seed 1: -0.0449 (-0.71 x MDE 0.0635, fold CI [-0.096, -0.004], 4/5), -0.0523 (-0.79 x, fold CI [-0.109, -0.005], 4/5)</a:t>
             </a:r>
           </a:p>
           <a:p>
@@ -10684,13 +10895,13 @@
               </a:spcAft>
             </a:pPr>
             <a:r>
-              <a:rPr sz="1100" b="0">
+              <a:rPr sz="1050" b="0">
                 <a:solidFill>
                   <a:srgbClr val="ECECF0"/>
                 </a:solidFill>
                 <a:latin typeface="Calibri"/>
               </a:rPr>
-              <a:t>• Tang pool: -0.0222 A, SE 0.0217, MDE 0.0608, -0.36 x MDE, fold CI [-0.085, +0.042], 61W/65L</a:t>
+              <a:t>• NOT MEASURED on either seed: below 0.5x MDE at seed 0, in the Type-M zone at seed 1; the direction is the same on both (12 + 6 ADAPT arms all negative, one observation per seed at correlation 0.955); the grown circuits are seed-stable (3.214 / 3.216 A) and the deployed fixed circuit moves 0.033 A between seeds (3.228 / 3.261), so the size of the contrast is set by the deployed circuit's seed, not by growth; resolution 0.06 A (L139, L140)</a:t>
             </a:r>
           </a:p>
           <a:p>
@@ -10700,29 +10911,13 @@
               </a:spcAft>
             </a:pPr>
             <a:r>
-              <a:rPr sz="1100" b="0">
+              <a:rPr sz="1050" b="0">
                 <a:solidFill>
                   <a:srgbClr val="ECECF0"/>
                 </a:solidFill>
                 <a:latin typeface="Calibri"/>
               </a:rPr>
-              <a:t>• NOT MEASURED: null at the registered threshold, resolution 0.06 A; all 12 ADAPT arms between -0.024 and -0.013 A at 0.21 to 0.40 x MDE, but one observation, not twelve (their per-target deltas correlate at 0.955; L70)</a:t>
-            </a:r>
-          </a:p>
-          <a:p>
-            <a:pPr>
-              <a:spcAft>
-                <a:spcPts val="200"/>
-              </a:spcAft>
-            </a:pPr>
-            <a:r>
-              <a:rPr sz="1100" b="0">
-                <a:solidFill>
-                  <a:srgbClr val="ECECF0"/>
-                </a:solidFill>
-                <a:latin typeface="Calibri"/>
-              </a:rPr>
-              <a:t>• the exact Gibbs state in place of the circuit: +0.0088 A (0.11 x) overall; -0.0271 on the 78 alpha = 1 targets where it is the optimum, +0.0671 on the 48 alpha = 0.25 targets where it is not (L70)</a:t>
+              <a:t>• the exact Gibbs state in place of the circuit: +0.0088 A (0.11 x) at seed 0; -0.0271 on the 78 alpha = 1 targets where it is the optimum, +0.0671 on the 48 alpha = 0.25 targets where it is not (L70)</a:t>
             </a:r>
           </a:p>
         </p:txBody>
@@ -10867,13 +11062,29 @@
               </a:spcAft>
             </a:pPr>
             <a:r>
+              <a:rPr sz="1100" b="0">
+                <a:solidFill>
+                  <a:srgbClr val="ECECF0"/>
+                </a:solidFill>
+                <a:latin typeface="Calibri"/>
+              </a:rPr>
+              <a:t>• the grown sets' algebra tracks the appended strings, not what the circuit does: dim 7 exactly where nothing was appended, up to 530 where inert strings were; median 1025 of 8,128 for the alpha = 0.25 L2 sets; no grown set reaches so(128) (L138)</a:t>
+            </a:r>
+          </a:p>
+          <a:p>
+            <a:pPr>
+              <a:spcAft>
+                <a:spcPts val="300"/>
+              </a:spcAft>
+            </a:pPr>
+            <a:r>
               <a:rPr sz="1100" b="1">
                 <a:solidFill>
                   <a:srgbClr val="ECECF0"/>
                 </a:solidFill>
                 <a:latin typeface="Calibri"/>
               </a:rPr>
-              <a:t>• Verdict: REPLACE. The mechanism is absent, not weak: a better ansatz has nothing to be better at, and the readout cannot see the difference between two well-trained states. What replaces it is the trainability paper (slide 9), with A2, A4 and the product-state result as its Sprint 26 additions.</a:t>
+              <a:t>• Verdict: REPLACE. The mechanism is absent, not weak: the optimum is a product state, the growth is inert, and the readout cannot see the difference between two well-trained states; the endpoint is not measured on either seed. What replaces it is the trainability paper (slide 9), with A2, A4 and the product-state result as its Sprint 26 additions.</a:t>
             </a:r>
           </a:p>
         </p:txBody>
